--- a/ASRRL_Methodology.pptx
+++ b/ASRRL_Methodology.pptx
@@ -17,6 +17,8 @@
     <p:sldId id="265" r:id="rId17"/>
     <p:sldId id="266" r:id="rId18"/>
     <p:sldId id="267" r:id="rId19"/>
+    <p:sldId id="268" r:id="rId20"/>
+    <p:sldId id="269" r:id="rId21"/>
   </p:sldIdLst>
   <p:sldSz cx="12191695" cy="6858000" type="screen4x3"/>
   <p:notesSz cx="6858000" cy="9144000"/>
@@ -519,7 +521,7 @@
           <a:p/>
           <a:p>
             <a:r>
-              <a:t>This presentation details the complete methodology of the ASRRL Intrusion Detection System (IDS) framework. ASRRL is a novel approach that combines multiple machine learning and formal methods techniques into an 8-stage pipeline for network traffic classification.</a:t>
+              <a:t>This presentation details the complete methodology of the ASRRL Intrusion Detection System (IDS) framework. ASRRL combines multiple ML and formal methods techniques into a 9-stage pipeline (Stages 0–8) for network traffic classification.</a:t>
             </a:r>
           </a:p>
           <a:p/>
@@ -530,62 +532,43 @@
           </a:p>
           <a:p>
             <a:r>
-              <a:t>1. Symbolic Reasoning via Z3 SMT Solver: Decision tree paths are converted into formal logic constraints using the Z3 theorem prover from Microsoft Research. This provides mathematically provable safety guarantees — every classification decision can be traced back to a satisfiable logical constraint.</a:t>
+              <a:t>1. PCAP Binary Preprocessing (Stage 0): Raw binary PCAP packet captures are converted to flow-level features using CICFlowMeter/Argus, establishing the bridge between raw network data and the ML pipeline.</a:t>
             </a:r>
           </a:p>
           <a:p/>
           <a:p>
             <a:r>
-              <a:t>2. Reinforcement Learning with Safety Shielding: A tabular Q-learning agent learns optimal classification policies, but every proposed action is verified against the Z3 constraint set before execution. If the proposed action violates constraints, a "safety shield" overrides it with the best safe alternative.</a:t>
+              <a:t>2. Symbolic Reasoning via Z3 SMT Solver: Decision tree paths are converted into formal logic constraints using Microsoft Research's Z3 theorem prover, providing mathematically provable safety guarantees.</a:t>
             </a:r>
           </a:p>
           <a:p/>
           <a:p>
             <a:r>
-              <a:t>3. Dynamic Adaptation: Unlike static classifiers, ASRRL adapts at runtime through:</a:t>
-            </a:r>
-          </a:p>
-          <a:p>
-            <a:r>
-              <a:t>   - Adaptive buffer sizing (10-200 flows) that responds to traffic volatility</a:t>
-            </a:r>
-          </a:p>
-          <a:p>
-            <a:r>
-              <a:t>   - Dynamic threshold adaptation (0.40-0.70) that balances false positive and false negative rates per dataset</a:t>
+              <a:t>3. Reinforcement Learning with Safety Shielding: A tabular Q-learning agent learns optimal classification policies, but every proposed action is verified against Z3 constraints before execution.</a:t>
             </a:r>
           </a:p>
           <a:p/>
           <a:p>
             <a:r>
-              <a:t>4. Novel Pattern Detection: DBSCAN clustering on misclassified flows discovers previously unseen attack signatures, which are converted to new Z3 constraints — enabling zero-day attack detection.</a:t>
+              <a:t>4. Dynamic Adaptation: Adaptive buffer sizing (10-200 flows) and dynamic threshold adaptation (0.40-0.70) handle concept drift at runtime.</a:t>
             </a:r>
           </a:p>
           <a:p/>
           <a:p>
             <a:r>
-              <a:t>DATASETS: We evaluate on three well-established IDS benchmark datasets:</a:t>
-            </a:r>
-          </a:p>
-          <a:p>
-            <a:r>
-              <a:t>- UNSW-NB15 (2015): 2.5M flows, 9 attack types, from UNSW Canberra</a:t>
-            </a:r>
-          </a:p>
-          <a:p>
-            <a:r>
-              <a:t>- CSE-CIC-IDS-2018 (2018): 16M flows, 7 attack types, from Canadian Institute for Cybersecurity</a:t>
-            </a:r>
-          </a:p>
-          <a:p>
-            <a:r>
-              <a:t>- CIC-IDS2017 (2017): 3.1M flows, 14 attack types, from Canadian Institute for Cybersecurity</a:t>
+              <a:t>5. Novel Pattern Detection: DBSCAN clustering discovers zero-day attack patterns and incorporates them as new Z3 constraints.</a:t>
             </a:r>
           </a:p>
           <a:p/>
           <a:p>
             <a:r>
-              <a:t>Each dataset is processed through the identical 8-stage pipeline, demonstrating the framework's generalizability across different network environments, attack distributions, and temporal characteristics.</a:t>
+              <a:t>6. Parallel Processing: Pipeline stages with independent data paths are parallelized for throughput — PCAP processing, Z3 extraction, and final classification are embarrassingly parallel.</a:t>
+            </a:r>
+          </a:p>
+          <a:p/>
+          <a:p>
+            <a:r>
+              <a:t>DATASETS: UNSW-NB15, CSE-CIC-IDS-2018, CIC-IDS2017.</a:t>
             </a:r>
           </a:p>
         </p:txBody>
@@ -655,123 +638,19 @@
           <a:lstStyle/>
           <a:p>
             <a:r>
-              <a:t>SLIDE 10 — Stage 7: Dynamic Threshold Adaptation</a:t>
+              <a:t>SLIDE 10 — Stage 6: Adaptive Buffer Management</a:t>
             </a:r>
           </a:p>
           <a:p/>
           <a:p>
             <a:r>
-              <a:t>PURPOSE: Continuously adapt the classification threshold to maintain optimal balance between false positive and false negative rates as traffic patterns evolve.</a:t>
+              <a:t>Sequential stage — buffer state depends on previous window. Cannot be parallelized within a single traffic stream, but different streams (e.g., per-subnet or per-sensor) could maintain independent buffers in parallel.</a:t>
             </a:r>
           </a:p>
           <a:p/>
           <a:p>
             <a:r>
-              <a:t>WHY DYNAMIC THRESHOLD:</a:t>
-            </a:r>
-          </a:p>
-          <a:p>
-            <a:r>
-              <a:t>A static threshold (e.g., 0.5) is suboptimal because:</a:t>
-            </a:r>
-          </a:p>
-          <a:p>
-            <a:r>
-              <a:t>- Different datasets have different optimal thresholds due to varying attack ratios</a:t>
-            </a:r>
-          </a:p>
-          <a:p>
-            <a:r>
-              <a:t>- Traffic patterns change over time (concept drift), shifting the optimal operating point</a:t>
-            </a:r>
-          </a:p>
-          <a:p>
-            <a:r>
-              <a:t>- A threshold that's optimal during training may not be optimal during deployment</a:t>
-            </a:r>
-          </a:p>
-          <a:p/>
-          <a:p>
-            <a:r>
-              <a:t>EMA ERROR BALANCING:</a:t>
-            </a:r>
-          </a:p>
-          <a:p>
-            <a:r>
-              <a:t>Exponential Moving Average smooths the error signals:</a:t>
-            </a:r>
-          </a:p>
-          <a:p>
-            <a:r>
-              <a:t>- EMA_FPR = β * FPR_t + (1-β) * EMA_FPR_{t-1}</a:t>
-            </a:r>
-          </a:p>
-          <a:p>
-            <a:r>
-              <a:t>- EMA_FNR = β * FNR_t + (1-β) * EMA_FNR_{t-1}</a:t>
-            </a:r>
-          </a:p>
-          <a:p>
-            <a:r>
-              <a:t>- β = 0.3: gives 30% weight to most recent window, 70% to history</a:t>
-            </a:r>
-          </a:p>
-          <a:p/>
-          <a:p>
-            <a:r>
-              <a:t>ADAPTATION LOGIC:</a:t>
-            </a:r>
-          </a:p>
-          <a:p>
-            <a:r>
-              <a:t>- If EMA_FPR &gt; EMA_FNR: too many false positives → raise threshold → fewer flows classified as attacks</a:t>
-            </a:r>
-          </a:p>
-          <a:p>
-            <a:r>
-              <a:t>- If EMA_FNR &gt; EMA_FPR: too many missed attacks → lower threshold → more flows classified as attacks</a:t>
-            </a:r>
-          </a:p>
-          <a:p>
-            <a:r>
-              <a:t>- Step size 0.005: small enough for stable convergence, large enough to adapt within ~100 windows</a:t>
-            </a:r>
-          </a:p>
-          <a:p/>
-          <a:p>
-            <a:r>
-              <a:t>BOUNDS [0.40, 0.70]:</a:t>
-            </a:r>
-          </a:p>
-          <a:p>
-            <a:r>
-              <a:t>- Lower bound 0.40: prevents overly aggressive detection (would cause &gt;30% FPR)</a:t>
-            </a:r>
-          </a:p>
-          <a:p>
-            <a:r>
-              <a:t>- Upper bound 0.70: prevents overly permissive detection (would miss &gt;40% of attacks)</a:t>
-            </a:r>
-          </a:p>
-          <a:p/>
-          <a:p>
-            <a:r>
-              <a:t>OBSERVED CONVERGENCE:</a:t>
-            </a:r>
-          </a:p>
-          <a:p>
-            <a:r>
-              <a:t>- UNSW-NB15: converges to τ ≈ 0.625 (higher attack ratio needs higher threshold)</a:t>
-            </a:r>
-          </a:p>
-          <a:p>
-            <a:r>
-              <a:t>- CSE-CIC-2018: converges to τ ≈ 0.625</a:t>
-            </a:r>
-          </a:p>
-          <a:p>
-            <a:r>
-              <a:t>- CIC-IDS2017: converges to τ ≈ 0.685</a:t>
+              <a:t>Grows +10 during volatility, shrinks -5 during stability. Bounds: [10, 200]. Asymmetric rates create conservative bias.</a:t>
             </a:r>
           </a:p>
         </p:txBody>
@@ -841,144 +720,19 @@
           <a:lstStyle/>
           <a:p>
             <a:r>
-              <a:t>SLIDE 11 — Stage 8: Final Classification Decision</a:t>
+              <a:t>SLIDE 11 — Stage 7: Dynamic Threshold Adaptation</a:t>
             </a:r>
           </a:p>
           <a:p/>
           <a:p>
             <a:r>
-              <a:t>PURPOSE: Combine all previous stages into a final, verified classification decision for each network flow.</a:t>
+              <a:t>Sequential stage — EMA depends on previous state. Like Stage 6, this cannot be parallelized within a single stream but operates independently across datasets.</a:t>
             </a:r>
           </a:p>
           <a:p/>
           <a:p>
             <a:r>
-              <a:t>THREE-TIER DECISION LOGIC:</a:t>
-            </a:r>
-          </a:p>
-          <a:p>
-            <a:r>
-              <a:t>The classification uses the dynamic threshold τ from Stage 7 to create three confidence zones:</a:t>
-            </a:r>
-          </a:p>
-          <a:p/>
-          <a:p>
-            <a:r>
-              <a:t>Tier 1 — High Confidence Attack (p_i ≥ τ):</a:t>
-            </a:r>
-          </a:p>
-          <a:p>
-            <a:r>
-              <a:t>- The DT leaf probability exceeds the adaptive threshold</a:t>
-            </a:r>
-          </a:p>
-          <a:p>
-            <a:r>
-              <a:t>- Classified as ATTACK without invoking RL or Z3</a:t>
-            </a:r>
-          </a:p>
-          <a:p>
-            <a:r>
-              <a:t>- Fastest path — no solver overhead</a:t>
-            </a:r>
-          </a:p>
-          <a:p>
-            <a:r>
-              <a:t>- Typically ~50% of flows in attack-heavy periods</a:t>
-            </a:r>
-          </a:p>
-          <a:p/>
-          <a:p>
-            <a:r>
-              <a:t>Tier 2 — High Confidence Benign (p_i ≤ 1-τ):</a:t>
-            </a:r>
-          </a:p>
-          <a:p>
-            <a:r>
-              <a:t>- The DT leaf probability is below the complementary threshold</a:t>
-            </a:r>
-          </a:p>
-          <a:p>
-            <a:r>
-              <a:t>- Classified as BENIGN without invoking RL or Z3</a:t>
-            </a:r>
-          </a:p>
-          <a:p>
-            <a:r>
-              <a:t>- Typically ~20% of flows</a:t>
-            </a:r>
-          </a:p>
-          <a:p/>
-          <a:p>
-            <a:r>
-              <a:t>Tier 3 — Uncertain Region (1-τ &lt; p_i &lt; τ):</a:t>
-            </a:r>
-          </a:p>
-          <a:p>
-            <a:r>
-              <a:t>- DT is uncertain — this is where ASRRL adds the most value</a:t>
-            </a:r>
-          </a:p>
-          <a:p>
-            <a:r>
-              <a:t>- The Q-learning agent proposes an action based on learned policy</a:t>
-            </a:r>
-          </a:p>
-          <a:p>
-            <a:r>
-              <a:t>- Z3 safety shield verifies the action against formal constraints</a:t>
-            </a:r>
-          </a:p>
-          <a:p>
-            <a:r>
-              <a:t>- If verified: execute RL action; if not: override with safe alternative</a:t>
-            </a:r>
-          </a:p>
-          <a:p>
-            <a:r>
-              <a:t>- Typically ~30% of flows</a:t>
-            </a:r>
-          </a:p>
-          <a:p/>
-          <a:p>
-            <a:r>
-              <a:t>AUDIT TRAIL:</a:t>
-            </a:r>
-          </a:p>
-          <a:p>
-            <a:r>
-              <a:t>Every classification produces:</a:t>
-            </a:r>
-          </a:p>
-          <a:p>
-            <a:r>
-              <a:t>1. DT leaf probability p_i</a:t>
-            </a:r>
-          </a:p>
-          <a:p>
-            <a:r>
-              <a:t>2. Leaf state s_i</a:t>
-            </a:r>
-          </a:p>
-          <a:p>
-            <a:r>
-              <a:t>3. Tier used (HIGH_ATTACK, HIGH_BENIGN, RL_VERIFIED)</a:t>
-            </a:r>
-          </a:p>
-          <a:p>
-            <a:r>
-              <a:t>4. Z3 verification result (for Tier 3 only)</a:t>
-            </a:r>
-          </a:p>
-          <a:p>
-            <a:r>
-              <a:t>5. Original RL proposed action vs final action (if shield overrode)</a:t>
-            </a:r>
-          </a:p>
-          <a:p/>
-          <a:p>
-            <a:r>
-              <a:t>This provides complete explainability — every decision can be traced back through the pipeline.</a:t>
+              <a:t>Observed convergence: UNSW-NB15 → τ≈0.625, CSE-CIC-2018 → τ≈0.625, CIC-IDS2017 → τ≈0.685.</a:t>
             </a:r>
           </a:p>
         </p:txBody>
@@ -1048,85 +802,336 @@
           <a:lstStyle/>
           <a:p>
             <a:r>
-              <a:t>SLIDE 12 — Experimental Results: ASRRL Dynamic vs. Static Baselines</a:t>
+              <a:t>SLIDE 12 — Stage 8: Final Classification Decision</a:t>
             </a:r>
           </a:p>
           <a:p/>
           <a:p>
             <a:r>
-              <a:t>PERFORMANCE OVERVIEW:</a:t>
-            </a:r>
-          </a:p>
-          <a:p>
-            <a:r>
-              <a:t>ASRRL Dynamic (Buffer+Threshold) achieves F1 scores of 0.98+ across all three datasets, which is competitive with static baselines like Random Forest (0.99+) and XGBoost (0.99+).</a:t>
+              <a:t>PARALLELISM: This is the most parallelizable stage. At inference time:</a:t>
+            </a:r>
+          </a:p>
+          <a:p>
+            <a:r>
+              <a:t>- The Q-table is frozen (read-only) → no write conflicts</a:t>
+            </a:r>
+          </a:p>
+          <a:p>
+            <a:r>
+              <a:t>- The constraint set C is frozen (read-only) → each Z3 solver instance is independent</a:t>
+            </a:r>
+          </a:p>
+          <a:p>
+            <a:r>
+              <a:t>- Each flow x_i is classified independently → embarrassingly parallel</a:t>
+            </a:r>
+          </a:p>
+          <a:p>
+            <a:r>
+              <a:t>- Can distribute across N cores for ~Nx throughput improvement</a:t>
             </a:r>
           </a:p>
           <a:p/>
           <a:p>
             <a:r>
-              <a:t>KEY FINDING — WHY SLIGHTLY LOWER F1 IS ACCEPTABLE:</a:t>
-            </a:r>
-          </a:p>
-          <a:p>
-            <a:r>
-              <a:t>While ASRRL's F1 is 1-2% below the best static classifiers, it provides capabilities that no static classifier can match:</a:t>
+              <a:t>This is where real-time IDS throughput is critical — production systems need to classify millions of flows per second.</a:t>
+            </a:r>
+          </a:p>
+        </p:txBody>
+      </p:sp>
+      <p:sp>
+        <p:nvSpPr>
+          <p:cNvPr id="4" name="Slide Number Placeholder 3"/>
+          <p:cNvSpPr>
+            <a:spLocks noGrp="1"/>
+          </p:cNvSpPr>
+          <p:nvPr>
+            <p:ph type="sldNum" idx="5" sz="quarter"/>
+          </p:nvPr>
+        </p:nvSpPr>
+        <p:spPr/>
+      </p:sp>
+    </p:spTree>
+  </p:cSld>
+  <p:clrMapOvr>
+    <a:masterClrMapping/>
+  </p:clrMapOvr>
+</p:notes>
+</file>
+
+<file path=ppt/notesSlides/notesSlide13.xml><?xml version="1.0" encoding="utf-8"?>
+<p:notes xmlns:a="http://schemas.openxmlformats.org/drawingml/2006/main" xmlns:p="http://schemas.openxmlformats.org/presentationml/2006/main" xmlns:r="http://schemas.openxmlformats.org/officeDocument/2006/relationships">
+  <p:cSld>
+    <p:spTree>
+      <p:nvGrpSpPr>
+        <p:cNvPr id="1" name=""/>
+        <p:cNvGrpSpPr/>
+        <p:nvPr/>
+      </p:nvGrpSpPr>
+      <p:grpSpPr>
+        <a:xfrm>
+          <a:off x="0" y="0"/>
+          <a:ext cx="0" cy="0"/>
+          <a:chOff x="0" y="0"/>
+          <a:chExt cx="0" cy="0"/>
+        </a:xfrm>
+      </p:grpSpPr>
+      <p:sp>
+        <p:nvSpPr>
+          <p:cNvPr id="2" name="Slide Image Placeholder 1"/>
+          <p:cNvSpPr>
+            <a:spLocks noGrp="1"/>
+          </p:cNvSpPr>
+          <p:nvPr>
+            <p:ph type="sldImg" idx="2"/>
+          </p:nvPr>
+        </p:nvSpPr>
+        <p:spPr/>
+      </p:sp>
+      <p:sp>
+        <p:nvSpPr>
+          <p:cNvPr id="3" name="Notes Placeholder 2"/>
+          <p:cNvSpPr>
+            <a:spLocks noGrp="1"/>
+          </p:cNvSpPr>
+          <p:nvPr>
+            <p:ph type="body" idx="3" sz="quarter"/>
+          </p:nvPr>
+        </p:nvSpPr>
+        <p:spPr/>
+        <p:txBody>
+          <a:bodyPr/>
+          <a:lstStyle/>
+          <a:p>
+            <a:r>
+              <a:t>SLIDE 13 — Parallel Processing Architecture</a:t>
             </a:r>
           </a:p>
           <a:p/>
           <a:p>
             <a:r>
-              <a:t>1. FORMAL SAFETY GUARANTEES: Every ASRRL classification is verified against Z3 constraints. Static classifiers are black boxes (RF) or shallow interpretable (DT alone) but cannot provide mathematical proofs of safety.</a:t>
+              <a:t>This slide addresses the advisor's question about where parallel processing is used in the pipeline.</a:t>
             </a:r>
           </a:p>
           <a:p/>
           <a:p>
             <a:r>
-              <a:t>2. DYNAMIC ADAPTATION: The buffer converges to dataset-specific sizes (30-37 flows) and the threshold adapts to dataset-specific optima (0.625-0.685). Static classifiers use fixed parameters set at training time.</a:t>
+              <a:t>SUMMARY OF PARALLELISM:</a:t>
             </a:r>
           </a:p>
           <a:p/>
           <a:p>
             <a:r>
-              <a:t>3. ZERO-DAY DETECTION: DBSCAN discovers novel attack patterns at runtime and incorporates them into the constraint set. Static classifiers can only detect attack types seen in training data.</a:t>
+              <a:t>EMBARRASSINGLY PARALLEL STAGES:</a:t>
+            </a:r>
+          </a:p>
+          <a:p>
+            <a:r>
+              <a:t>1. Stage 0 (PCAP Preprocessing): Each PCAP file is processed by an independent CICFlowMeter/Argus instance. No shared state between files. This is I/O-bound and scales linearly with CPU cores.</a:t>
             </a:r>
           </a:p>
           <a:p/>
           <a:p>
             <a:r>
-              <a:t>4. COMPLETE EXPLAINABILITY: Every ASRRL decision has an audit trail (DT probability, leaf state, Z3 check, confidence tier). RF provides feature importance but not per-decision explanations.</a:t>
+              <a:t>2. Stage 3 (Z3 Constraint Extraction): Each of the L leaf paths can be extracted independently. The path traversal and constraint construction are pure functions of the tree structure. Only the final merge step (checking consistency of the full constraint set) requires sequential processing.</a:t>
             </a:r>
           </a:p>
           <a:p/>
           <a:p>
             <a:r>
-              <a:t>STATISTICAL SIGNIFICANCE (from table_significance.csv):</a:t>
-            </a:r>
-          </a:p>
-          <a:p>
-            <a:r>
-              <a:t>- Wilcoxon signed-rank tests show ASRRL significantly differs from most baselines at p&lt;0.05</a:t>
-            </a:r>
-          </a:p>
-          <a:p>
-            <a:r>
-              <a:t>- Notable exceptions: XGBoost on CSE-CIC-2018 (p=0.084) and LightGBM on UNSW-NB15 (p=0.225)</a:t>
+              <a:t>3. Stage 8 (Final Classification at Inference): This is the critical real-time stage. At inference time, the Q-table and constraint set are both read-only (frozen after training). Each flow can be classified by an independent worker thread/process. With N CPU cores, throughput scales ~Nx. The tiered approach further helps: ~70% of flows take the fast path (direct DT classification, no Z3 call), only ~30% require Z3 solver invocation.</a:t>
             </a:r>
           </a:p>
           <a:p/>
           <a:p>
             <a:r>
-              <a:t>CONSTRAINT FIDELITY (from table_fidelity.csv):</a:t>
-            </a:r>
-          </a:p>
-          <a:p>
-            <a:r>
-              <a:t>- All three datasets achieve 100% fidelity, 100% coverage, 100% opinion rate</a:t>
-            </a:r>
-          </a:p>
-          <a:p>
-            <a:r>
-              <a:t>- This means every Z3 constraint is satisfiable and consistent with the data</a:t>
+              <a:t>4. Cross-Dataset Parallelism: Since each dataset has its own independent pipeline (separate DT, Q-table, constraint set, buffer, threshold), all three datasets can be processed simultaneously.</a:t>
+            </a:r>
+          </a:p>
+          <a:p/>
+          <a:p>
+            <a:r>
+              <a:t>SEQUENTIAL BOTTLENECKS (and why they're acceptable):</a:t>
+            </a:r>
+          </a:p>
+          <a:p>
+            <a:r>
+              <a:t>1. Stage 2 (DT Training): CART is inherently sequential, but with depth=6 and 50K samples, it completes in &lt;1 second.</a:t>
+            </a:r>
+          </a:p>
+          <a:p>
+            <a:r>
+              <a:t>2. Stage 4 (Q-Learning): Within an episode, Q-updates are sequential. But training converges quickly and runs offline.</a:t>
+            </a:r>
+          </a:p>
+          <a:p>
+            <a:r>
+              <a:t>3. Stage 5 (DBSCAN): Sequential neighborhood queries, but operates on the small subset of misclassified flows only.</a:t>
+            </a:r>
+          </a:p>
+          <a:p>
+            <a:r>
+              <a:t>4. Stages 6-7 (Buffer/Threshold): Temporal dependencies prevent within-stream parallelism. However, different network segments (per-subnet, per-sensor, per-VLAN) can maintain independent buffer/threshold states in parallel.</a:t>
+            </a:r>
+          </a:p>
+          <a:p/>
+          <a:p>
+            <a:r>
+              <a:t>TRAINING vs INFERENCE:</a:t>
+            </a:r>
+          </a:p>
+          <a:p>
+            <a:r>
+              <a:t>- Training phase (Stages 0-7): Mostly sequential, runs offline. Total time: seconds to minutes depending on dataset size.</a:t>
+            </a:r>
+          </a:p>
+          <a:p>
+            <a:r>
+              <a:t>- Inference phase (Stage 8): Fully parallel, runs in real-time. This is where parallelism matters most for production IDS deployment.</a:t>
+            </a:r>
+          </a:p>
+          <a:p/>
+          <a:p>
+            <a:r>
+              <a:t>IMPLEMENTATION OPTIONS:</a:t>
+            </a:r>
+          </a:p>
+          <a:p>
+            <a:r>
+              <a:t>- Python multiprocessing.Pool for Stage 0 (PCAP files)</a:t>
+            </a:r>
+          </a:p>
+          <a:p>
+            <a:r>
+              <a:t>- concurrent.futures.ThreadPoolExecutor for Stage 3 (leaf paths, GIL-free Z3 calls)</a:t>
+            </a:r>
+          </a:p>
+          <a:p>
+            <a:r>
+              <a:t>- Ray or Dask for distributed Stage 8 inference across multiple machines</a:t>
+            </a:r>
+          </a:p>
+          <a:p>
+            <a:r>
+              <a:t>- Independent process per dataset for cross-dataset parallelism</a:t>
+            </a:r>
+          </a:p>
+        </p:txBody>
+      </p:sp>
+      <p:sp>
+        <p:nvSpPr>
+          <p:cNvPr id="4" name="Slide Number Placeholder 3"/>
+          <p:cNvSpPr>
+            <a:spLocks noGrp="1"/>
+          </p:cNvSpPr>
+          <p:nvPr>
+            <p:ph type="sldNum" idx="5" sz="quarter"/>
+          </p:nvPr>
+        </p:nvSpPr>
+        <p:spPr/>
+      </p:sp>
+    </p:spTree>
+  </p:cSld>
+  <p:clrMapOvr>
+    <a:masterClrMapping/>
+  </p:clrMapOvr>
+</p:notes>
+</file>
+
+<file path=ppt/notesSlides/notesSlide14.xml><?xml version="1.0" encoding="utf-8"?>
+<p:notes xmlns:a="http://schemas.openxmlformats.org/drawingml/2006/main" xmlns:p="http://schemas.openxmlformats.org/presentationml/2006/main" xmlns:r="http://schemas.openxmlformats.org/officeDocument/2006/relationships">
+  <p:cSld>
+    <p:spTree>
+      <p:nvGrpSpPr>
+        <p:cNvPr id="1" name=""/>
+        <p:cNvGrpSpPr/>
+        <p:nvPr/>
+      </p:nvGrpSpPr>
+      <p:grpSpPr>
+        <a:xfrm>
+          <a:off x="0" y="0"/>
+          <a:ext cx="0" cy="0"/>
+          <a:chOff x="0" y="0"/>
+          <a:chExt cx="0" cy="0"/>
+        </a:xfrm>
+      </p:grpSpPr>
+      <p:sp>
+        <p:nvSpPr>
+          <p:cNvPr id="2" name="Slide Image Placeholder 1"/>
+          <p:cNvSpPr>
+            <a:spLocks noGrp="1"/>
+          </p:cNvSpPr>
+          <p:nvPr>
+            <p:ph type="sldImg" idx="2"/>
+          </p:nvPr>
+        </p:nvSpPr>
+        <p:spPr/>
+      </p:sp>
+      <p:sp>
+        <p:nvSpPr>
+          <p:cNvPr id="3" name="Notes Placeholder 2"/>
+          <p:cNvSpPr>
+            <a:spLocks noGrp="1"/>
+          </p:cNvSpPr>
+          <p:nvPr>
+            <p:ph type="body" idx="3" sz="quarter"/>
+          </p:nvPr>
+        </p:nvSpPr>
+        <p:spPr/>
+        <p:txBody>
+          <a:bodyPr/>
+          <a:lstStyle/>
+          <a:p>
+            <a:r>
+              <a:t>SLIDE 14 — Experimental Results</a:t>
+            </a:r>
+          </a:p>
+          <a:p/>
+          <a:p>
+            <a:r>
+              <a:t>ASRRL Dynamic achieves F1 scores of 0.98+ across all three datasets, competitive with static baselines (RF: 0.99+, XGBoost: 0.99+).</a:t>
+            </a:r>
+          </a:p>
+          <a:p/>
+          <a:p>
+            <a:r>
+              <a:t>Why slightly lower F1 is acceptable:</a:t>
+            </a:r>
+          </a:p>
+          <a:p>
+            <a:r>
+              <a:t>1. FORMAL SAFETY GUARANTEES: Every classification is Z3-verified</a:t>
+            </a:r>
+          </a:p>
+          <a:p>
+            <a:r>
+              <a:t>2. DYNAMIC ADAPTATION: Buffer and threshold adapt at runtime</a:t>
+            </a:r>
+          </a:p>
+          <a:p>
+            <a:r>
+              <a:t>3. ZERO-DAY DETECTION: DBSCAN discovers novel attack patterns</a:t>
+            </a:r>
+          </a:p>
+          <a:p>
+            <a:r>
+              <a:t>4. PARALLEL INFERENCE: Stage 8 scales linearly with CPU cores</a:t>
+            </a:r>
+          </a:p>
+          <a:p>
+            <a:r>
+              <a:t>5. COMPLETE EXPLAINABILITY: Full audit trail per decision</a:t>
+            </a:r>
+          </a:p>
+          <a:p/>
+          <a:p>
+            <a:r>
+              <a:t>Statistical significance: Wilcoxon tests show significant differences from most baselines at p&lt;0.05.</a:t>
+            </a:r>
+          </a:p>
+          <a:p>
+            <a:r>
+              <a:t>Constraint fidelity: 100% fidelity, coverage, and opinion rate across all datasets.</a:t>
             </a:r>
           </a:p>
         </p:txBody>
@@ -1196,101 +1201,106 @@
           <a:lstStyle/>
           <a:p>
             <a:r>
-              <a:t>SLIDE 2 — ASRRL Architecture: End-to-End Pipeline Overview</a:t>
+              <a:t>SLIDE 2 — ASRRL Architecture: 9-Stage Pipeline with Parallel Processing</a:t>
             </a:r>
           </a:p>
           <a:p/>
           <a:p>
             <a:r>
-              <a:t>This slide presents the complete 8-stage pipeline that every network flow passes through from raw ingestion to final verified classification.</a:t>
+              <a:t>This slide presents the complete 9-stage pipeline (Stage 0 through Stage 8). The key addition from the previous version is Stage 0 (PCAP Binary Preprocessing), which addresses how raw binary network captures are converted into the flow-level tabular data that the ML pipeline consumes.</a:t>
             </a:r>
           </a:p>
           <a:p/>
           <a:p>
             <a:r>
-              <a:t>PIPELINE FLOW:</a:t>
-            </a:r>
-          </a:p>
-          <a:p>
-            <a:r>
-              <a:t>The architecture processes data sequentially through 8 components, but with important feedback loops:</a:t>
-            </a:r>
-          </a:p>
-          <a:p>
-            <a:r>
-              <a:t>- Stage 5 (DBSCAN) feeds novel patterns back to Stage 3 (Z3 constraints), creating an evolving constraint set</a:t>
-            </a:r>
-          </a:p>
-          <a:p>
-            <a:r>
-              <a:t>- Stage 6 (Buffer) and Stage 7 (Threshold) are runtime adaptation mechanisms that tune the system based on observed traffic patterns</a:t>
+              <a:t>STAGE 0 — PCAP PREPROCESSING:</a:t>
+            </a:r>
+          </a:p>
+          <a:p>
+            <a:r>
+              <a:t>Real network traffic is captured as binary PCAP (Packet CAPture) files containing raw packet headers and payloads. Before any ML processing:</a:t>
+            </a:r>
+          </a:p>
+          <a:p>
+            <a:r>
+              <a:t>1. Packets are reassembled into TCP streams</a:t>
+            </a:r>
+          </a:p>
+          <a:p>
+            <a:r>
+              <a:t>2. Flows are aggregated by 5-tuple (src_ip, dst_ip, src_port, dst_port, protocol)</a:t>
+            </a:r>
+          </a:p>
+          <a:p>
+            <a:r>
+              <a:t>3. Timeout-based flow termination applies (active ~120s, idle ~60s)</a:t>
+            </a:r>
+          </a:p>
+          <a:p>
+            <a:r>
+              <a:t>4. CICFlowMeter (for CIC datasets) or Argus (for UNSW-NB15) computes 49–80+ statistical features per flow</a:t>
+            </a:r>
+          </a:p>
+          <a:p>
+            <a:r>
+              <a:t>5. Output: CSV files with one row per flow</a:t>
             </a:r>
           </a:p>
           <a:p/>
           <a:p>
             <a:r>
-              <a:t>WHY 8 STAGES:</a:t>
-            </a:r>
-          </a:p>
-          <a:p>
-            <a:r>
-              <a:t>Traditional IDS systems use a single classifier that maps features directly to labels. ASRRL decomposes this into 8 stages because:</a:t>
-            </a:r>
-          </a:p>
-          <a:p>
-            <a:r>
-              <a:t>1. Stages 1-2 (Ingestion + DT): Provide interpretable feature processing and a symbolic model whose decision paths can be formally analyzed</a:t>
-            </a:r>
-          </a:p>
-          <a:p>
-            <a:r>
-              <a:t>2. Stage 3 (Z3): Converts the DT into formal logic — the key differentiator enabling provable safety</a:t>
-            </a:r>
-          </a:p>
-          <a:p>
-            <a:r>
-              <a:t>3. Stage 4 (Q-Learning): Learns an adaptive policy that improves over the static DT, while Z3 constrains it to safe actions</a:t>
-            </a:r>
-          </a:p>
-          <a:p>
-            <a:r>
-              <a:t>4. Stage 5 (DBSCAN): Addresses the open-world problem — new attack types not in training data can be detected</a:t>
-            </a:r>
-          </a:p>
-          <a:p>
-            <a:r>
-              <a:t>5. Stages 6-7 (Buffer + Threshold): Handle concept drift — network traffic characteristics change over time</a:t>
-            </a:r>
-          </a:p>
-          <a:p>
-            <a:r>
-              <a:t>6. Stage 8 (Classification): Combines all signals into a final decision with full audit trail</a:t>
+              <a:t>PARALLEL PROCESSING POINTS:</a:t>
+            </a:r>
+          </a:p>
+          <a:p>
+            <a:r>
+              <a:t>The pipeline is NOT fully sequential — several stages support parallel execution:</a:t>
+            </a:r>
+          </a:p>
+          <a:p>
+            <a:r>
+              <a:t>- Stage 0: Each PCAP file processed independently → embarrassingly parallel</a:t>
+            </a:r>
+          </a:p>
+          <a:p>
+            <a:r>
+              <a:t>- Stage 3: Each leaf path extracted and verified independently → parallel per leaf</a:t>
+            </a:r>
+          </a:p>
+          <a:p>
+            <a:r>
+              <a:t>- Stage 8: Each flow classified independently → embarrassingly parallel per flow</a:t>
+            </a:r>
+          </a:p>
+          <a:p>
+            <a:r>
+              <a:t>- Cross-dataset: All 3 datasets processed through independent pipeline instances</a:t>
             </a:r>
           </a:p>
           <a:p/>
           <a:p>
             <a:r>
-              <a:t>THREE DATASETS:</a:t>
-            </a:r>
-          </a:p>
-          <a:p>
-            <a:r>
-              <a:t>All three datasets pass through the identical pipeline, demonstrating generalizability:</a:t>
-            </a:r>
-          </a:p>
-          <a:p>
-            <a:r>
-              <a:t>- UNSW-NB15: 2.5M flows, 9 attack types, 30% attack ratio</a:t>
-            </a:r>
-          </a:p>
-          <a:p>
-            <a:r>
-              <a:t>- CSE-CIC-IDS-2018: 16M flows, 7 attack types, 15% attack ratio</a:t>
-            </a:r>
-          </a:p>
-          <a:p>
-            <a:r>
-              <a:t>- CIC-IDS2017: 3.1M flows, 14 attack types, 20% attack ratio</a:t>
+              <a:t>SEQUENTIAL BOTTLENECKS:</a:t>
+            </a:r>
+          </a:p>
+          <a:p>
+            <a:r>
+              <a:t>- Stage 2 (DT training): CART splits are computed greedily → inherently sequential</a:t>
+            </a:r>
+          </a:p>
+          <a:p>
+            <a:r>
+              <a:t>- Stage 4 (Q-learning): Episodes update shared Q-table → sequential within episodes</a:t>
+            </a:r>
+          </a:p>
+          <a:p>
+            <a:r>
+              <a:t>- Stage 5 (DBSCAN): Core algorithm uses sequential neighborhood queries</a:t>
+            </a:r>
+          </a:p>
+          <a:p>
+            <a:r>
+              <a:t>- Stages 6-7 (Buffer/Threshold): Temporal dependency on previous window state</a:t>
             </a:r>
           </a:p>
         </p:txBody>
@@ -1366,91 +1376,31 @@
           <a:p/>
           <a:p>
             <a:r>
-              <a:t>This slide shows the concrete feature extraction process for each of the three primary datasets. The key challenge is that each dataset has a different raw schema, but ASRRL needs a unified 7-feature representation.</a:t>
+              <a:t>This slide now includes PCAP source information and flow extraction tools for each dataset.</a:t>
             </a:r>
           </a:p>
           <a:p/>
           <a:p>
             <a:r>
-              <a:t>UNSW-NB15 (University of New South Wales, 2015):</a:t>
-            </a:r>
-          </a:p>
-          <a:p>
-            <a:r>
-              <a:t>- Created by the Australian Centre for Cyber Security using the IXIA PerfectStorm tool</a:t>
-            </a:r>
-          </a:p>
-          <a:p>
-            <a:r>
-              <a:t>- Contains 49 raw features including flow-level (dur, rate, sbytes), connection-level (ct_srv_src), and content-level features</a:t>
-            </a:r>
-          </a:p>
-          <a:p>
-            <a:r>
-              <a:t>- Feature mapping: 'dur' (seconds) multiplied by 1000 for ms. 'ct_srv_src' serves as entropy proxy</a:t>
-            </a:r>
-          </a:p>
-          <a:p>
-            <a:r>
-              <a:t>- 9 attack categories with ~30% attack ratio</a:t>
+              <a:t>UNSW-NB15: PCAP captured by IXIA PerfectStorm tool at UNSW Canberra. Flows extracted by Argus and Bro-IDS network monitors. The raw PCAP binary data was processed into 49-column CSV format by the dataset creators.</a:t>
             </a:r>
           </a:p>
           <a:p/>
           <a:p>
             <a:r>
-              <a:t>CSE-CIC-IDS-2018 (Canadian Institute for Cybersecurity, 2018):</a:t>
-            </a:r>
-          </a:p>
-          <a:p>
-            <a:r>
-              <a:t>- Generated using CICFlowMeter on AWS infrastructure with realistic attack scenarios over 10 days</a:t>
-            </a:r>
-          </a:p>
-          <a:p>
-            <a:r>
-              <a:t>- 80+ features. Flow Duration in microseconds divided by 1000. Fwd IAT Std quantile-normalized for entropy.</a:t>
-            </a:r>
-          </a:p>
-          <a:p>
-            <a:r>
-              <a:t>- 7 attack categories with ~15% attack ratio</a:t>
+              <a:t>CSE-CIC-IDS-2018: PCAP captured over 10 days on AWS infrastructure simulating enterprise network. CICFlowMeter processed the binary PCAPs into 80+ flow-level features using 5-tuple aggregation with configurable timeouts.</a:t>
             </a:r>
           </a:p>
           <a:p/>
           <a:p>
             <a:r>
-              <a:t>CIC-IDS2017 (Canadian Institute for Cybersecurity, 2017):</a:t>
-            </a:r>
-          </a:p>
-          <a:p>
-            <a:r>
-              <a:t>- Predecessor to CSE-CIC-2018 using same CICFlowMeter tool but different attack scenarios</a:t>
-            </a:r>
-          </a:p>
-          <a:p>
-            <a:r>
-              <a:t>- Same 80+ feature schema; same preprocessing function handles both CIC datasets</a:t>
-            </a:r>
-          </a:p>
-          <a:p>
-            <a:r>
-              <a:t>- 14 attack categories with ~20% attack ratio</a:t>
+              <a:t>CIC-IDS2017: PCAP captured over 5 days at CIC lab network. Same CICFlowMeter tool processed the binary captures into the same 80+ feature format.</a:t>
             </a:r>
           </a:p>
           <a:p/>
           <a:p>
             <a:r>
-              <a:t>STANDARDIZED OUTPUT: x_i = [flow_duration, pkt_rate, byte_rate, entropy, port_cat, size_cat, protocol]</a:t>
-            </a:r>
-          </a:p>
-          <a:p>
-            <a:r>
-              <a:t>- First 4 continuous (Z-score normalized), last 3 categorical integers</a:t>
-            </a:r>
-          </a:p>
-          <a:p>
-            <a:r>
-              <a:t>- Binary label y_i in {0, 1} where 0=benign, 1=attack</a:t>
+              <a:t>KEY POINT FOR ADVISOR: All three benchmark datasets ship as pre-extracted CSVs. The PCAP → flow conversion was performed by the dataset creators using established tools (CICFlowMeter, Argus). Our Stage 0 documents this preprocessing step and shows it as part of the complete pipeline.</a:t>
             </a:r>
           </a:p>
         </p:txBody>
@@ -1520,93 +1470,153 @@
           <a:lstStyle/>
           <a:p>
             <a:r>
-              <a:t>SLIDE 4 — Stage 1: Data Ingestion &amp; StandardScaler Normalization</a:t>
+              <a:t>SLIDE 4 — Stage 0: PCAP Binary Preprocessing &amp; Flow Aggregation</a:t>
             </a:r>
           </a:p>
           <a:p/>
           <a:p>
             <a:r>
-              <a:t>PURPOSE: Transform raw, heterogeneous dataset columns into a standardized, normalized feature matrix suitable for machine learning.</a:t>
+              <a:t>PURPOSE: Bridge the gap between raw binary network captures (PCAP format) and the tabular flow-level data that the ML pipeline (Stages 1–8) consumes. This stage documents the complete data lineage from wire to CSV.</a:t>
             </a:r>
           </a:p>
           <a:p/>
           <a:p>
             <a:r>
-              <a:t>ALGORITHM DETAILS:</a:t>
-            </a:r>
-          </a:p>
-          <a:p>
-            <a:r>
-              <a:t>The StandardScaler from scikit-learn performs Z-score normalization independently on each of the 4 continuous features. For each feature j:</a:t>
-            </a:r>
-          </a:p>
-          <a:p>
-            <a:r>
-              <a:t>- Compute mean: mu_j = (1/n) * sum(x_j^(i)) for i=1..n</a:t>
-            </a:r>
-          </a:p>
-          <a:p>
-            <a:r>
-              <a:t>- Compute std: sigma_j = sqrt((1/(n-1)) * sum((x_j^(i) - mu_j)^2))</a:t>
-            </a:r>
-          </a:p>
-          <a:p>
-            <a:r>
-              <a:t>- Transform: z_j^(i) = (x_j^(i) - mu_j) / sigma_j</a:t>
+              <a:t>WHAT IS PCAP:</a:t>
+            </a:r>
+          </a:p>
+          <a:p>
+            <a:r>
+              <a:t>PCAP (Packet CAPture) is the standard binary format for storing captured network packets. Each PCAP file contains:</a:t>
+            </a:r>
+          </a:p>
+          <a:p>
+            <a:r>
+              <a:t>- Global header: magic number, version, snap length, link-layer type</a:t>
+            </a:r>
+          </a:p>
+          <a:p>
+            <a:r>
+              <a:t>- Per-packet records: timestamp (microsecond precision), captured length, original length, raw packet bytes</a:t>
+            </a:r>
+          </a:p>
+          <a:p>
+            <a:r>
+              <a:t>- Packet bytes include: Ethernet header (14 bytes) → IP header (20-60 bytes) → TCP/UDP/ICMP header → payload</a:t>
             </a:r>
           </a:p>
           <a:p/>
           <a:p>
             <a:r>
-              <a:t>This ensures each feature has zero mean and unit variance, preventing features with larger absolute values (e.g., byte_rate in millions) from dominating the decision tree splits over features with smaller values (e.g., entropy in [0,1]).</a:t>
+              <a:t>FLOW AGGREGATION PROCESS:</a:t>
+            </a:r>
+          </a:p>
+          <a:p>
+            <a:r>
+              <a:t>1. PACKET PARSING: Read binary PCAP, decode Ethernet/IP/transport headers to extract 5-tuple</a:t>
+            </a:r>
+          </a:p>
+          <a:p>
+            <a:r>
+              <a:t>2. FLOW GROUPING: Group packets by (src_ip, dst_ip, src_port, dst_port, protocol) into bidirectional flows</a:t>
+            </a:r>
+          </a:p>
+          <a:p>
+            <a:r>
+              <a:t>3. TIMEOUT TERMINATION: Flows are terminated when:</a:t>
+            </a:r>
+          </a:p>
+          <a:p>
+            <a:r>
+              <a:t>   - Idle timeout (T_idle = 60s): no packets for 60 seconds</a:t>
+            </a:r>
+          </a:p>
+          <a:p>
+            <a:r>
+              <a:t>   - Active timeout (T_active = 120s): flow duration exceeds 120 seconds</a:t>
+            </a:r>
+          </a:p>
+          <a:p>
+            <a:r>
+              <a:t>   - FIN/RST flag: TCP connection termination</a:t>
+            </a:r>
+          </a:p>
+          <a:p>
+            <a:r>
+              <a:t>4. FEATURE COMPUTATION: For each terminated flow, compute statistical features:</a:t>
+            </a:r>
+          </a:p>
+          <a:p>
+            <a:r>
+              <a:t>   - Duration, total packets (fwd+bwd), total bytes (fwd+bwd)</a:t>
+            </a:r>
+          </a:p>
+          <a:p>
+            <a:r>
+              <a:t>   - Packet rate, byte rate, packet size stats (mean, std, min, max)</a:t>
+            </a:r>
+          </a:p>
+          <a:p>
+            <a:r>
+              <a:t>   - Inter-arrival time stats (mean, std, min, max) for fwd and bwd directions</a:t>
+            </a:r>
+          </a:p>
+          <a:p>
+            <a:r>
+              <a:t>   - TCP flags (SYN, ACK, FIN, RST, PSH, URG counts)</a:t>
+            </a:r>
+          </a:p>
+          <a:p>
+            <a:r>
+              <a:t>   - Payload statistics, header lengths, etc.</a:t>
             </a:r>
           </a:p>
           <a:p/>
           <a:p>
             <a:r>
-              <a:t>DATASET-SPECIFIC MAPPINGS:</a:t>
-            </a:r>
-          </a:p>
-          <a:p>
-            <a:r>
-              <a:t>- UNSW-NB15: dur*1000→flow_duration, rate→pkt_rate, sbytes+dbytes→byte_rate, normalize(ct_srv_src)→entropy</a:t>
-            </a:r>
-          </a:p>
-          <a:p>
-            <a:r>
-              <a:t>- CSE-CIC-2018/CIC-IDS2017: Flow Duration/1000→flow_duration, Flow Packets/s→pkt_rate, Flow Bytes/s→byte_rate, quantile_norm(Fwd IAT Std)→entropy</a:t>
+              <a:t>TOOLS USED:</a:t>
+            </a:r>
+          </a:p>
+          <a:p>
+            <a:r>
+              <a:t>- CICFlowMeter (v3/v4): Java-based tool from CIC that reads PCAP and outputs CICFlowMeter-format CSVs with 80+ features. Used for both CIC-IDS2017 and CSE-CIC-IDS-2018.</a:t>
+            </a:r>
+          </a:p>
+          <a:p>
+            <a:r>
+              <a:t>- Argus: Open-source flow generator that produces NetFlow-like records. Used alongside Bro-IDS (now Zeek) for UNSW-NB15.</a:t>
             </a:r>
           </a:p>
           <a:p/>
           <a:p>
             <a:r>
-              <a:t>WHY Z-SCORE NORMALIZATION:</a:t>
-            </a:r>
-          </a:p>
-          <a:p>
-            <a:r>
-              <a:t>- Decision trees are somewhat robust to feature scaling, but normalized features produce more interpretable Z3 constraints</a:t>
-            </a:r>
-          </a:p>
-          <a:p>
-            <a:r>
-              <a:t>- Thresholds in Z3 constraints become standard deviation units rather than raw units</a:t>
-            </a:r>
-          </a:p>
-          <a:p>
-            <a:r>
-              <a:t>- The scaler is fit on training data only to prevent data leakage</a:t>
-            </a:r>
-          </a:p>
-          <a:p>
-            <a:r>
-              <a:t>- Categorical features (port_cat 0-5, size_cat 0-3, protocol 0-2) passed through unchanged</a:t>
+              <a:t>PARALLELISM:</a:t>
+            </a:r>
+          </a:p>
+          <a:p>
+            <a:r>
+              <a:t>PCAP processing is embarrassingly parallel:</a:t>
+            </a:r>
+          </a:p>
+          <a:p>
+            <a:r>
+              <a:t>- Multiple PCAP files can be processed simultaneously (one per CPU core)</a:t>
+            </a:r>
+          </a:p>
+          <a:p>
+            <a:r>
+              <a:t>- Large PCAP files can be split by time window and processed in parallel</a:t>
+            </a:r>
+          </a:p>
+          <a:p>
+            <a:r>
+              <a:t>- This is the most computationally intensive preprocessing step (parsing millions of packets)</a:t>
             </a:r>
           </a:p>
           <a:p/>
           <a:p>
             <a:r>
-              <a:t>OUTPUT: X_norm (n×7 matrix) and y (n-vector of binary labels) fed to Stage 2.</a:t>
+              <a:t>KEY POINT: The three benchmark datasets ship as pre-extracted CSVs. The PCAP-to-CSV conversion was performed by the dataset creators. However, in a production deployment, Stage 0 would run in real-time using CICFlowMeter or similar tools on live traffic captures.</a:t>
             </a:r>
           </a:p>
         </p:txBody>
@@ -1676,97 +1686,67 @@
           <a:lstStyle/>
           <a:p>
             <a:r>
-              <a:t>SLIDE 5 — Stage 2: Decision Tree Symbolic Model (CART)</a:t>
+              <a:t>SLIDE 5 — Stage 1: Feature Extraction &amp; StandardScaler Normalization</a:t>
             </a:r>
           </a:p>
           <a:p/>
           <a:p>
             <a:r>
-              <a:t>PURPOSE: Train an interpretable decision tree classifier whose internal decision paths can be extracted as formal logic constraints for Z3 verification.</a:t>
+              <a:t>PURPOSE: Transform the raw CSV output from Stage 0 (49–80+ columns) into a standardized 7-feature normalized matrix.</a:t>
             </a:r>
           </a:p>
           <a:p/>
           <a:p>
             <a:r>
-              <a:t>WHY DECISION TREE (not Random Forest or Neural Network):</a:t>
-            </a:r>
-          </a:p>
-          <a:p>
-            <a:r>
-              <a:t>The decision tree is chosen specifically because it is a "white-box" model — every prediction can be explained as a conjunction of feature threshold comparisons along a root-to-leaf path. This is critical because:</a:t>
-            </a:r>
-          </a:p>
-          <a:p>
-            <a:r>
-              <a:t>1. Each path can be directly translated into a Z3 logical implication (Stage 3)</a:t>
-            </a:r>
-          </a:p>
-          <a:p>
-            <a:r>
-              <a:t>2. Each leaf node provides a discrete state ID for the Q-learning agent (Stage 4)</a:t>
-            </a:r>
-          </a:p>
-          <a:p>
-            <a:r>
-              <a:t>3. The shallow depth (max_depth=6) limits the number of constraints, keeping Z3 verification tractable at runtime</a:t>
+              <a:t>This stage now explicitly receives input from Stage 0 (PCAP preprocessing), closing the gap between binary network data and the ML pipeline.</a:t>
             </a:r>
           </a:p>
           <a:p/>
           <a:p>
             <a:r>
-              <a:t>ALGORITHM — CART:</a:t>
-            </a:r>
-          </a:p>
-          <a:p>
-            <a:r>
-              <a:t>At each node, the algorithm searches over all 7 features and all possible thresholds to find the split that minimizes the weighted Gini impurity:</a:t>
-            </a:r>
-          </a:p>
-          <a:p>
-            <a:r>
-              <a:t>- Gini(S) = 1 - p_0^2 - p_1^2</a:t>
-            </a:r>
-          </a:p>
-          <a:p>
-            <a:r>
-              <a:t>- Pure node: Gini = 0, Maximum impurity: Gini = 0.5</a:t>
+              <a:t>ALGORITHM DETAILS:</a:t>
+            </a:r>
+          </a:p>
+          <a:p>
+            <a:r>
+              <a:t>The StandardScaler performs Z-score normalization on each of the 4 continuous features independently:</a:t>
+            </a:r>
+          </a:p>
+          <a:p>
+            <a:r>
+              <a:t>- Compute mean and standard deviation from training data</a:t>
+            </a:r>
+          </a:p>
+          <a:p>
+            <a:r>
+              <a:t>- Transform: z = (x - mu) / sigma</a:t>
             </a:r>
           </a:p>
           <a:p/>
           <a:p>
             <a:r>
-              <a:t>HYPERPARAMETERS:</a:t>
-            </a:r>
-          </a:p>
-          <a:p>
-            <a:r>
-              <a:t>- max_depth=6: Limits tree to 6 levels, producing at most 64 leaf nodes</a:t>
-            </a:r>
-          </a:p>
-          <a:p>
-            <a:r>
-              <a:t>- min_samples_leaf=15: Prevents overfitting by requiring at least 15 training samples per leaf</a:t>
+              <a:t>DATASET-SPECIFIC MAPPINGS:</a:t>
+            </a:r>
+          </a:p>
+          <a:p>
+            <a:r>
+              <a:t>- UNSW-NB15 (49 cols → 7): dur*1000, rate, sbytes+dbytes, normalize(ct_srv_src), bin(dsport), bin(byte_rate), proto_map</a:t>
+            </a:r>
+          </a:p>
+          <a:p>
+            <a:r>
+              <a:t>- CSE-CIC-2018 (80+ cols → 7): Flow Duration/1000, Flow Packets/s, Flow Bytes/s, quantile_norm(Fwd IAT Std), bin(Dst Port), bin(bytes*dur), proto_map</a:t>
+            </a:r>
+          </a:p>
+          <a:p>
+            <a:r>
+              <a:t>- CIC-IDS2017 (80+ cols → 7): Same as CSE-CIC-2018 (both use CICFlowMeter output format)</a:t>
             </a:r>
           </a:p>
           <a:p/>
           <a:p>
             <a:r>
-              <a:t>DUAL OUTPUT:</a:t>
-            </a:r>
-          </a:p>
-          <a:p>
-            <a:r>
-              <a:t>1. leaf_id(x_i): integer identifying which leaf the flow reaches → becomes state in Q-learning</a:t>
-            </a:r>
-          </a:p>
-          <a:p>
-            <a:r>
-              <a:t>2. P(attack|x_i): fraction of training attacks in that leaf → drives threshold classification</a:t>
-            </a:r>
-          </a:p>
-          <a:p>
-            <a:r>
-              <a:t>3. ŷ_DT(x_i): majority class of the leaf → baseline DT prediction</a:t>
+              <a:t>OUTPUT: X_norm (n×7) and y (n binary labels) fed to Stage 2.</a:t>
             </a:r>
           </a:p>
         </p:txBody>
@@ -1836,108 +1816,40 @@
           <a:lstStyle/>
           <a:p>
             <a:r>
-              <a:t>SLIDE 6 — Stage 3: Z3 SMT Constraint Extraction from Decision Tree</a:t>
+              <a:t>SLIDE 6 — Stage 2: Decision Tree Symbolic Model (CART)</a:t>
             </a:r>
           </a:p>
           <a:p/>
           <a:p>
             <a:r>
-              <a:t>PURPOSE: Convert the interpretable decision tree into formal logic constraints using Microsoft Research's Z3 theorem prover. This is the key innovation that enables provable safety guarantees.</a:t>
+              <a:t>PURPOSE: Train an interpretable decision tree whose decision paths can be extracted as formal logic constraints.</a:t>
             </a:r>
           </a:p>
           <a:p/>
           <a:p>
             <a:r>
-              <a:t>WHAT IS Z3:</a:t>
-            </a:r>
-          </a:p>
-          <a:p>
-            <a:r>
-              <a:t>Z3 is a Satisfiability Modulo Theories (SMT) solver. Given a set of logical constraints over real/integer variables, it can determine whether any assignment of values satisfies all constraints simultaneously (sat) or no such assignment exists (unsat).</a:t>
+              <a:t>WHY DECISION TREE: It is a "white-box" model — every prediction is a conjunction of feature threshold comparisons along a root-to-leaf path. This enables:</a:t>
+            </a:r>
+          </a:p>
+          <a:p>
+            <a:r>
+              <a:t>1. Direct translation into Z3 logical implications (Stage 3)</a:t>
+            </a:r>
+          </a:p>
+          <a:p>
+            <a:r>
+              <a:t>2. Discrete state IDs for Q-learning (Stage 4)</a:t>
+            </a:r>
+          </a:p>
+          <a:p>
+            <a:r>
+              <a:t>3. Tractable verification (max 64 leaves with depth=6)</a:t>
             </a:r>
           </a:p>
           <a:p/>
           <a:p>
             <a:r>
-              <a:t>ALGORITHM DETAILS:</a:t>
-            </a:r>
-          </a:p>
-          <a:p>
-            <a:r>
-              <a:t>For each of the L leaf nodes in the decision tree:</a:t>
-            </a:r>
-          </a:p>
-          <a:p>
-            <a:r>
-              <a:t>1. Extract the path from root to leaf as a sequence of (feature, threshold, direction) triples</a:t>
-            </a:r>
-          </a:p>
-          <a:p>
-            <a:r>
-              <a:t>2. Convert each split into a Z3 constraint: Real('feature_name') &lt;= threshold or &gt; threshold</a:t>
-            </a:r>
-          </a:p>
-          <a:p>
-            <a:r>
-              <a:t>3. Combine all splits along the path with And() to form the precondition</a:t>
-            </a:r>
-          </a:p>
-          <a:p>
-            <a:r>
-              <a:t>4. Create an Implies() constraint: if precondition holds, then action must equal leaf class</a:t>
-            </a:r>
-          </a:p>
-          <a:p>
-            <a:r>
-              <a:t>5. Check satisfiability with existing constraints before adding (prevents contradictions)</a:t>
-            </a:r>
-          </a:p>
-          <a:p/>
-          <a:p>
-            <a:r>
-              <a:t>CONSTRAINT FORMAT:</a:t>
-            </a:r>
-          </a:p>
-          <a:p>
-            <a:r>
-              <a:t>φ_l : (f_1 ≤ θ_1) ∧ (f_3 &gt; θ_3) ∧ ... ⇒ (action = class_l)</a:t>
-            </a:r>
-          </a:p>
-          <a:p/>
-          <a:p>
-            <a:r>
-              <a:t>The verify() function used in Stage 4 works by:</a:t>
-            </a:r>
-          </a:p>
-          <a:p>
-            <a:r>
-              <a:t>1. Substituting the flow's feature values into the Z3 variables</a:t>
-            </a:r>
-          </a:p>
-          <a:p>
-            <a:r>
-              <a:t>2. Setting action = proposed_action</a:t>
-            </a:r>
-          </a:p>
-          <a:p>
-            <a:r>
-              <a:t>3. Checking if the resulting system is satisfiable</a:t>
-            </a:r>
-          </a:p>
-          <a:p>
-            <a:r>
-              <a:t>4. If sat: the action is consistent with learned constraints (safe)</a:t>
-            </a:r>
-          </a:p>
-          <a:p>
-            <a:r>
-              <a:t>5. If unsat: the action violates constraints (unsafe, must be overridden)</a:t>
-            </a:r>
-          </a:p>
-          <a:p/>
-          <a:p>
-            <a:r>
-              <a:t>This provides a mathematical proof that every classification respects the symbolic model's learned rules.</a:t>
+              <a:t>NOTE ON PARALLELISM: CART training is inherently sequential — each split depends on the data partition from the previous split. This is one of the sequential bottlenecks in the pipeline. However, the tree is small (depth=6) so training completes in milliseconds.</a:t>
             </a:r>
           </a:p>
         </p:txBody>
@@ -2007,113 +1919,45 @@
           <a:lstStyle/>
           <a:p>
             <a:r>
-              <a:t>SLIDE 7 — Stage 4: Q-Learning RL with Z3 Safety Shielding</a:t>
+              <a:t>SLIDE 7 — Stage 3: Z3 SMT Constraint Extraction from Decision Tree</a:t>
             </a:r>
           </a:p>
           <a:p/>
           <a:p>
             <a:r>
-              <a:t>PURPOSE: Learn an adaptive classification policy that improves upon the static decision tree while maintaining provable safety guarantees through Z3 constraint verification.</a:t>
+              <a:t>PURPOSE: Convert the decision tree into formal logic constraints using Z3.</a:t>
             </a:r>
           </a:p>
           <a:p/>
           <a:p>
             <a:r>
-              <a:t>KEY INNOVATION — SAFETY SHIELDING:</a:t>
-            </a:r>
-          </a:p>
-          <a:p>
-            <a:r>
-              <a:t>The Q-learning agent proposes actions, but every action passes through the Z3 safety shield:</a:t>
-            </a:r>
-          </a:p>
-          <a:p>
-            <a:r>
-              <a:t>1. Agent proposes action a_proposed (either by exploration or exploitation)</a:t>
-            </a:r>
-          </a:p>
-          <a:p>
-            <a:r>
-              <a:t>2. Z3 solver checks: given the flow's features and the proposed action, is the constraint set satisfiable?</a:t>
-            </a:r>
-          </a:p>
-          <a:p>
-            <a:r>
-              <a:t>3. If sat: action is consistent with all learned rules → execute it</a:t>
-            </a:r>
-          </a:p>
-          <a:p>
-            <a:r>
-              <a:t>4. If unsat: action violates constraints → override with alternative action (1 - a_proposed)</a:t>
+              <a:t>PARALLELISM: Each leaf path extraction is independent:</a:t>
+            </a:r>
+          </a:p>
+          <a:p>
+            <a:r>
+              <a:t>- L leaf paths can be extracted concurrently (one per thread/core)</a:t>
+            </a:r>
+          </a:p>
+          <a:p>
+            <a:r>
+              <a:t>- Each path produces a candidate constraint φ_l</a:t>
+            </a:r>
+          </a:p>
+          <a:p>
+            <a:r>
+              <a:t>- The satisfiability merge step is sequential (constraints must be checked for mutual consistency)</a:t>
+            </a:r>
+          </a:p>
+          <a:p>
+            <a:r>
+              <a:t>- With L ≈ 60 leaves, parallelism reduces extraction time by ~Lx on multi-core systems</a:t>
             </a:r>
           </a:p>
           <a:p/>
           <a:p>
             <a:r>
-              <a:t>This means the RL agent can NEVER make a decision that contradicts the formally verified constraint set.</a:t>
-            </a:r>
-          </a:p>
-          <a:p/>
-          <a:p>
-            <a:r>
-              <a:t>REWARD STRUCTURE:</a:t>
-            </a:r>
-          </a:p>
-          <a:p>
-            <a:r>
-              <a:t>- True Positive (correctly block attack): +2.0</a:t>
-            </a:r>
-          </a:p>
-          <a:p>
-            <a:r>
-              <a:t>- True Negative (correctly allow benign): +1.0</a:t>
-            </a:r>
-          </a:p>
-          <a:p>
-            <a:r>
-              <a:t>- False Positive (incorrectly block benign): -1.0</a:t>
-            </a:r>
-          </a:p>
-          <a:p>
-            <a:r>
-              <a:t>- False Negative (miss an attack): -3.0</a:t>
-            </a:r>
-          </a:p>
-          <a:p>
-            <a:r>
-              <a:t>- Shield bonus (action passed Z3 check): +0.5</a:t>
-            </a:r>
-          </a:p>
-          <a:p/>
-          <a:p>
-            <a:r>
-              <a:t>The asymmetric penalties (-3 for FN vs -1 for FP) reflect the IDS priority: missing an attack is worse than a false alarm.</a:t>
-            </a:r>
-          </a:p>
-          <a:p/>
-          <a:p>
-            <a:r>
-              <a:t>HYPERPARAMETERS:</a:t>
-            </a:r>
-          </a:p>
-          <a:p>
-            <a:r>
-              <a:t>- Learning rate α=0.15: moderate learning speed</a:t>
-            </a:r>
-          </a:p>
-          <a:p>
-            <a:r>
-              <a:t>- Discount factor γ=0.95: values future rewards highly</a:t>
-            </a:r>
-          </a:p>
-          <a:p>
-            <a:r>
-              <a:t>- Epsilon start=0.20: 20% random exploration initially</a:t>
-            </a:r>
-          </a:p>
-          <a:p>
-            <a:r>
-              <a:t>- Epsilon decay=0.999: slow annealing to exploitation</a:t>
+              <a:t>The verify() function checks: given feature values and proposed action, is the constraint set satisfiable? sat = safe, unsat = unsafe.</a:t>
             </a:r>
           </a:p>
         </p:txBody>
@@ -2183,101 +2027,45 @@
           <a:lstStyle/>
           <a:p>
             <a:r>
-              <a:t>SLIDE 8 — Stage 5: DBSCAN Novel Attack Pattern Detection</a:t>
+              <a:t>SLIDE 8 — Stage 4: Q-Learning RL with Z3 Safety Shielding</a:t>
             </a:r>
           </a:p>
           <a:p/>
           <a:p>
             <a:r>
-              <a:t>PURPOSE: Discover previously unseen (zero-day) attack patterns by clustering misclassified flows and converting discovered clusters into new Z3 constraints.</a:t>
+              <a:t>PURPOSE: Learn an adaptive policy that improves on the static DT while maintaining safety guarantees.</a:t>
             </a:r>
           </a:p>
           <a:p/>
           <a:p>
             <a:r>
-              <a:t>WHY DBSCAN:</a:t>
-            </a:r>
-          </a:p>
-          <a:p>
-            <a:r>
-              <a:t>DBSCAN (Density-Based Spatial Clustering of Applications with Noise) is ideal for this task because:</a:t>
-            </a:r>
-          </a:p>
-          <a:p>
-            <a:r>
-              <a:t>1. It doesn't require specifying the number of clusters in advance (unlike K-means)</a:t>
-            </a:r>
-          </a:p>
-          <a:p>
-            <a:r>
-              <a:t>2. It naturally handles noise — isolated misclassifications are labeled as noise, not forced into clusters</a:t>
-            </a:r>
-          </a:p>
-          <a:p>
-            <a:r>
-              <a:t>3. It finds arbitrarily shaped clusters — attack patterns in feature space may not be spherical</a:t>
-            </a:r>
-          </a:p>
-          <a:p>
-            <a:r>
-              <a:t>4. Two parameters: ε=1.5 (neighborhood radius) and minPts=5 (minimum cluster size)</a:t>
+              <a:t>PARALLELISM NOTE: Q-learning training is partially sequential:</a:t>
+            </a:r>
+          </a:p>
+          <a:p>
+            <a:r>
+              <a:t>- Within an episode, each flow's Q-update depends on the current Q-table → sequential</a:t>
+            </a:r>
+          </a:p>
+          <a:p>
+            <a:r>
+              <a:t>- However, separate Q-tables are trained for each dataset independently → cross-dataset parallelism</a:t>
+            </a:r>
+          </a:p>
+          <a:p>
+            <a:r>
+              <a:t>- The Z3 verify() calls per flow are independent and could be batched</a:t>
             </a:r>
           </a:p>
           <a:p/>
           <a:p>
             <a:r>
-              <a:t>ALGORITHM:</a:t>
-            </a:r>
-          </a:p>
-          <a:p>
-            <a:r>
-              <a:t>1. Collect misclassified flows M = {x_i : predicted ≠ actual}</a:t>
-            </a:r>
-          </a:p>
-          <a:p>
-            <a:r>
-              <a:t>2. Run DBSCAN to find dense clusters in M</a:t>
-            </a:r>
-          </a:p>
-          <a:p>
-            <a:r>
-              <a:t>3. For each cluster K_m: compute centroid μ_m and std σ_m</a:t>
-            </a:r>
-          </a:p>
-          <a:p>
-            <a:r>
-              <a:t>4. Create Z3 constraint: if all features within μ ± 2σ, then action = majority class</a:t>
-            </a:r>
-          </a:p>
-          <a:p>
-            <a:r>
-              <a:t>5. Verify consistency with existing constraints before adding</a:t>
-            </a:r>
-          </a:p>
-          <a:p/>
-          <a:p>
-            <a:r>
-              <a:t>FEEDBACK LOOP:</a:t>
-            </a:r>
-          </a:p>
-          <a:p>
-            <a:r>
-              <a:t>New constraints C_novel are merged with existing C to form C'. This means:</a:t>
-            </a:r>
-          </a:p>
-          <a:p>
-            <a:r>
-              <a:t>- Future Q-learning episodes benefit from broader constraint coverage</a:t>
-            </a:r>
-          </a:p>
-          <a:p>
-            <a:r>
-              <a:t>- The safety shield becomes more comprehensive over time</a:t>
-            </a:r>
-          </a:p>
-          <a:p>
-            <a:r>
-              <a:t>- Previously unseen attack signatures are now formally recognized</a:t>
+              <a:t>REWARD: TP:+2, FN:-3, TN:+1, FP:-1, shield_bonus:+0.5</a:t>
+            </a:r>
+          </a:p>
+          <a:p>
+            <a:r>
+              <a:t>The asymmetric penalty (-3 FN vs -1 FP) reflects IDS priority: missing attacks is worse than false alarms.</a:t>
             </a:r>
           </a:p>
         </p:txBody>
@@ -2347,93 +2135,19 @@
           <a:lstStyle/>
           <a:p>
             <a:r>
-              <a:t>SLIDE 9 — Stage 6: Adaptive Buffer Management</a:t>
+              <a:t>SLIDE 9 — Stage 5: DBSCAN Novel Attack Pattern Detection</a:t>
             </a:r>
           </a:p>
           <a:p/>
           <a:p>
             <a:r>
-              <a:t>PURPOSE: Dynamically adjust the flow buffer size based on real-time traffic characteristics. This is a runtime adaptation mechanism that handles concept drift — the statistical properties of network traffic changing over time.</a:t>
+              <a:t>DBSCAN is inherently sequential (neighborhood queries depend on prior classifications of core/border/noise points). This is a sequential bottleneck, but runs on a small subset of data (only misclassified flows).</a:t>
             </a:r>
           </a:p>
           <a:p/>
           <a:p>
             <a:r>
-              <a:t>WHY ADAPTIVE BUFFERING:</a:t>
-            </a:r>
-          </a:p>
-          <a:p>
-            <a:r>
-              <a:t>Static buffer sizes create a fundamental trade-off:</a:t>
-            </a:r>
-          </a:p>
-          <a:p>
-            <a:r>
-              <a:t>- Small buffers (10-20 flows): Fast response, but insufficient context for accurate decisions in volatile traffic</a:t>
-            </a:r>
-          </a:p>
-          <a:p>
-            <a:r>
-              <a:t>- Large buffers (100-200 flows): Better context, but increased latency and may include stale data in changing conditions</a:t>
-            </a:r>
-          </a:p>
-          <a:p/>
-          <a:p>
-            <a:r>
-              <a:t>The adaptive buffer resolves this by growing during volatility (need more evidence) and shrinking during stability (prioritize speed).</a:t>
-            </a:r>
-          </a:p>
-          <a:p/>
-          <a:p>
-            <a:r>
-              <a:t>VOLATILITY METRICS:</a:t>
-            </a:r>
-          </a:p>
-          <a:p>
-            <a:r>
-              <a:t>1. Entropy standard deviation (σ_ent): Measures how much the entropy feature varies within the buffer. High variation suggests a mix of attack and benign traffic.</a:t>
-            </a:r>
-          </a:p>
-          <a:p>
-            <a:r>
-              <a:t>2. Byte rate variance (σ²_bytes): Measures traffic volume stability. Attack bursts (DoS, DDoS) cause spikes in byte rate.</a:t>
-            </a:r>
-          </a:p>
-          <a:p>
-            <a:r>
-              <a:t>3. Combined volatility = σ_ent + normalized σ²_bytes</a:t>
-            </a:r>
-          </a:p>
-          <a:p/>
-          <a:p>
-            <a:r>
-              <a:t>RESIZE LOGIC:</a:t>
-            </a:r>
-          </a:p>
-          <a:p>
-            <a:r>
-              <a:t>- Growth: +10 flows when volatility exceeds high threshold → conservative, accumulates more evidence</a:t>
-            </a:r>
-          </a:p>
-          <a:p>
-            <a:r>
-              <a:t>- Shrinkage: -5 flows when volatility below low threshold → gentle reduction</a:t>
-            </a:r>
-          </a:p>
-          <a:p>
-            <a:r>
-              <a:t>- Clipping: Always bounded to [10, 200] to prevent degenerate sizes</a:t>
-            </a:r>
-          </a:p>
-          <a:p>
-            <a:r>
-              <a:t>- Asymmetry: Grows faster than shrinks (+10 vs -5) creating a cautious bias</a:t>
-            </a:r>
-          </a:p>
-          <a:p/>
-          <a:p>
-            <a:r>
-              <a:t>IMPLEMENTATION: Uses Python deque with dynamic maxlen. When maxlen shrinks, oldest flows are automatically evicted.</a:t>
+              <a:t>The feedback loop C' = C ∪ C_novel means the constraint set grows over time, enabling detection of zero-day attacks.</a:t>
             </a:r>
           </a:p>
         </p:txBody>
@@ -5562,7 +5276,7 @@
               </a:defRPr>
             </a:pPr>
             <a:r>
-              <a:t>3 Benchmark Datasets  |  8-Stage Pipeline  |  IEEE Format Algorithms</a:t>
+              <a:t>3 Benchmark Datasets  |  9-Stage Pipeline (Stage 0–8)  |  Parallel Processing  |  IEEE Format</a:t>
             </a:r>
           </a:p>
         </p:txBody>
@@ -5618,13 +5332,13 @@
             <a:pPr algn="l">
               <a:defRPr sz="2400" b="1">
                 <a:solidFill>
-                  <a:srgbClr val="16A085"/>
+                  <a:srgbClr val="2980B9"/>
                 </a:solidFill>
                 <a:latin typeface="Calibri"/>
               </a:defRPr>
             </a:pPr>
             <a:r>
-              <a:t>Stage 7: Dynamic Threshold Adaptation</a:t>
+              <a:t>Stage 6: Adaptive Buffer Management</a:t>
             </a:r>
           </a:p>
         </p:txBody>
@@ -5717,7 +5431,7 @@
                 </a:solidFill>
                 <a:latin typeface="Times New Roman"/>
               </a:rPr>
-              <a:t>Dynamic Threshold Adaptation via EMA Error Balancing</a:t>
+              <a:t>Adaptive Buffer Resizing</a:t>
             </a:r>
           </a:p>
           <a:p>
@@ -5745,7 +5459,7 @@
                 </a:solidFill>
                 <a:latin typeface="Times New Roman"/>
               </a:rPr>
-              <a:t> Current threshold τ_t ∈ [0.40, 0.70], recent FPR_t, FNR_t, EMA decay β=0.3</a:t>
+              <a:t> Flow stream F, current buffer B_t with size |B_t|, bounds [10, 200]</a:t>
             </a:r>
           </a:p>
           <a:p>
@@ -5773,7 +5487,7 @@
                 </a:solidFill>
                 <a:latin typeface="Times New Roman"/>
               </a:rPr>
-              <a:t> Updated threshold τ_{t+1} balancing false positives and false negatives</a:t>
+              <a:t> Resized buffer B_{t+1} adapted to traffic volatility</a:t>
             </a:r>
           </a:p>
           <a:p>
@@ -5810,7 +5524,7 @@
                 </a:solidFill>
                 <a:latin typeface="Times New Roman"/>
               </a:rPr>
-              <a:t>each evaluation win</a:t>
+              <a:t>each time win</a:t>
             </a:r>
             <a:r>
               <a:rPr sz="1000" b="1">
@@ -5828,7 +5542,7 @@
                 </a:solidFill>
                 <a:latin typeface="Times New Roman"/>
               </a:rPr>
-              <a:t>w W_t </a:t>
+              <a:t>w W_t of flows </a:t>
             </a:r>
             <a:r>
               <a:rPr sz="1000" b="1">
@@ -5865,7 +5579,25 @@
                 </a:solidFill>
                 <a:latin typeface="Times New Roman"/>
               </a:rPr>
-              <a:t>FPR_t ← FP_t / (FP_t + TN_t)  // false positive rate</a:t>
+              <a:t>B_t.append(flows in W_t)  // sliding win</a:t>
+            </a:r>
+            <a:r>
+              <a:rPr sz="1000" b="1">
+                <a:solidFill>
+                  <a:srgbClr val="000000"/>
+                </a:solidFill>
+                <a:latin typeface="Times New Roman"/>
+              </a:rPr>
+              <a:t>do</a:t>
+            </a:r>
+            <a:r>
+              <a:rPr sz="1000" b="0">
+                <a:solidFill>
+                  <a:srgbClr val="000000"/>
+                </a:solidFill>
+                <a:latin typeface="Times New Roman"/>
+              </a:rPr>
+              <a:t>w buffer</a:t>
             </a:r>
           </a:p>
           <a:p>
@@ -5893,7 +5625,7 @@
                 </a:solidFill>
                 <a:latin typeface="Times New Roman"/>
               </a:rPr>
-              <a:t>FNR_t ← FN_t / (FN_t + TP_t)  // false negative rate</a:t>
+              <a:t>σ_ent ← std({entropy(x) : x ∈ B_t})  // entropy volatility</a:t>
             </a:r>
           </a:p>
           <a:p>
@@ -5921,7 +5653,7 @@
                 </a:solidFill>
                 <a:latin typeface="Times New Roman"/>
               </a:rPr>
-              <a:t>EMA_FPR ← β · FPR_t + (1 - β) · EMA_FPR  // exponential moving average</a:t>
+              <a:t>σ²_bytes ← var({byte_rate(x) : x ∈ B_t})  // byte rate variance</a:t>
             </a:r>
           </a:p>
           <a:p>
@@ -5949,7 +5681,7 @@
                 </a:solidFill>
                 <a:latin typeface="Times New Roman"/>
               </a:rPr>
-              <a:t>EMA_FNR ← β · FNR_t + (1 - β) · EMA_FNR</a:t>
+              <a:t>volatility ← σ_ent + σ²_bytes / max(σ²_bytes)</a:t>
             </a:r>
           </a:p>
           <a:p>
@@ -5986,7 +5718,7 @@
                 </a:solidFill>
                 <a:latin typeface="Times New Roman"/>
               </a:rPr>
-              <a:t>EMA_FPR &gt; EMA_FNR </a:t>
+              <a:t>volatility &gt; high_threshold </a:t>
             </a:r>
             <a:r>
               <a:rPr sz="1000" b="1">
@@ -6023,7 +5755,25 @@
                 </a:solidFill>
                 <a:latin typeface="Times New Roman"/>
               </a:rPr>
-              <a:t>τ_{t+1} ← τ_t + 0.005  // too many false positives: raise threshold</a:t>
+              <a:t>Δ ← +10  // high volatility: grow buffer </a:t>
+            </a:r>
+            <a:r>
+              <a:rPr sz="1000" b="1">
+                <a:solidFill>
+                  <a:srgbClr val="000000"/>
+                </a:solidFill>
+                <a:latin typeface="Times New Roman"/>
+              </a:rPr>
+              <a:t>for </a:t>
+            </a:r>
+            <a:r>
+              <a:rPr sz="1000" b="0">
+                <a:solidFill>
+                  <a:srgbClr val="000000"/>
+                </a:solidFill>
+                <a:latin typeface="Times New Roman"/>
+              </a:rPr>
+              <a:t>more context</a:t>
             </a:r>
           </a:p>
           <a:p>
@@ -6078,7 +5828,7 @@
                 </a:solidFill>
                 <a:latin typeface="Times New Roman"/>
               </a:rPr>
-              <a:t>EMA_FNR &gt; EMA_FPR </a:t>
+              <a:t>volatility &lt; low_threshold </a:t>
             </a:r>
             <a:r>
               <a:rPr sz="1000" b="1">
@@ -6115,7 +5865,25 @@
                 </a:solidFill>
                 <a:latin typeface="Times New Roman"/>
               </a:rPr>
-              <a:t>τ_{t+1} ← τ_t - 0.005  // too many false negatives: lower threshold</a:t>
+              <a:t>Δ ← -5  // low volatility: shrink buffer </a:t>
+            </a:r>
+            <a:r>
+              <a:rPr sz="1000" b="1">
+                <a:solidFill>
+                  <a:srgbClr val="000000"/>
+                </a:solidFill>
+                <a:latin typeface="Times New Roman"/>
+              </a:rPr>
+              <a:t>for </a:t>
+            </a:r>
+            <a:r>
+              <a:rPr sz="1000" b="0">
+                <a:solidFill>
+                  <a:srgbClr val="000000"/>
+                </a:solidFill>
+                <a:latin typeface="Times New Roman"/>
+              </a:rPr>
+              <a:t>faster response</a:t>
             </a:r>
           </a:p>
           <a:p>
@@ -6171,7 +5939,7 @@
                 </a:solidFill>
                 <a:latin typeface="Times New Roman"/>
               </a:rPr>
-              <a:t>τ_{t+1} ← τ_t  // balanced: maintain threshold</a:t>
+              <a:t>Δ ← 0  // stable: maintain current size</a:t>
             </a:r>
           </a:p>
           <a:p>
@@ -6227,7 +5995,7 @@
                 </a:solidFill>
                 <a:latin typeface="Times New Roman"/>
               </a:rPr>
-              <a:t>τ_{t+1} ← clip(τ_{t+1}, 0.40, 0.70)</a:t>
+              <a:t>|B_{t+1}| ← clip(|B_t| + Δ, 10, 200)</a:t>
             </a:r>
           </a:p>
           <a:p>
@@ -6292,7 +6060,7 @@
                 </a:solidFill>
                 <a:latin typeface="Times New Roman"/>
               </a:rPr>
-              <a:t>τ_{t+1}</a:t>
+              <a:t>B_{t+1}</a:t>
             </a:r>
           </a:p>
         </p:txBody>
@@ -6314,7 +6082,7 @@
         <p:spPr>
           <a:xfrm>
             <a:off x="7498079" y="640080"/>
-            <a:ext cx="4114800" cy="1572462"/>
+            <a:ext cx="4114800" cy="1968447"/>
           </a:xfrm>
           <a:prstGeom prst="rect">
             <a:avLst/>
@@ -6355,7 +6123,7 @@
               </a:defRPr>
             </a:pPr>
             <a:r>
-              <a:t>•  Continuously adjusts the classification threshold τ ∈ [0.40, 0.70] based on the balance between false positive rate (FPR) and false negative rate (FNR) in recent windows.</a:t>
+              <a:t>•  Dynamically resizes the flow buffer (10–200 flows) based on traffic volatility measured by entropy std and byte rate variance.</a:t>
             </a:r>
           </a:p>
           <a:p>
@@ -6371,7 +6139,7 @@
               </a:defRPr>
             </a:pPr>
             <a:r>
-              <a:t>•  Uses exponential moving average (EMA, β=0.3) to smooth noisy per-window error rates, preventing the threshold from oscillating due to short-term fluctuations.</a:t>
+              <a:t>•  High volatility triggers buffer growth (+10) to accumulate more context; low volatility triggers shrinkage (−5) for faster response.</a:t>
             </a:r>
           </a:p>
           <a:p>
@@ -6387,7 +6155,7 @@
               </a:defRPr>
             </a:pPr>
             <a:r>
-              <a:t>•  When FPR dominates, the threshold rises (+0.005) to reduce false alarms; when FNR dominates, it falls (−0.005) to catch more attacks—creating a self-correcting feedback loop.</a:t>
+              <a:t>•  Sequential stage: buffer state depends on previous window (temporal dependency), so this cannot be parallelized within a single stream.</a:t>
             </a:r>
           </a:p>
           <a:p>
@@ -6403,7 +6171,7 @@
               </a:defRPr>
             </a:pPr>
             <a:r>
-              <a:t>•  Hard bounds [0.40, 0.70] prevent the threshold from becoming too permissive (miss attacks) or too aggressive (block legitimate traffic).</a:t>
+              <a:t>•  Asymmetric growth/shrink rates (+10/−5) create a conservative bias—the system is quicker to accumulate evidence than to discard it.</a:t>
             </a:r>
           </a:p>
         </p:txBody>
@@ -6439,7 +6207,7 @@
               </a:defRPr>
             </a:pPr>
             <a:r>
-              <a:t>Output: τ_{t+1} → Used by Stage 8 for high-confidence direct classification</a:t>
+              <a:t>Output: Adapted buffer size |B_{t+1}| → Used by Stage 7 and Stage 8 for windowed classification</a:t>
             </a:r>
           </a:p>
         </p:txBody>
@@ -6495,13 +6263,890 @@
             <a:pPr algn="l">
               <a:defRPr sz="2400" b="1">
                 <a:solidFill>
+                  <a:srgbClr val="16A085"/>
+                </a:solidFill>
+                <a:latin typeface="Calibri"/>
+              </a:defRPr>
+            </a:pPr>
+            <a:r>
+              <a:t>Stage 7: Dynamic Threshold Adaptation</a:t>
+            </a:r>
+          </a:p>
+        </p:txBody>
+      </p:sp>
+      <p:sp>
+        <p:nvSpPr>
+          <p:cNvPr id="3" name="Rectangle 2"/>
+          <p:cNvSpPr/>
+          <p:nvPr/>
+        </p:nvSpPr>
+        <p:spPr>
+          <a:xfrm>
+            <a:off x="274320" y="640080"/>
+            <a:ext cx="6858000" cy="4572000"/>
+          </a:xfrm>
+          <a:prstGeom prst="rect">
+            <a:avLst/>
+          </a:prstGeom>
+          <a:solidFill>
+            <a:srgbClr val="F7F9FB"/>
+          </a:solidFill>
+          <a:ln w="19050">
+            <a:solidFill>
+              <a:srgbClr val="34495E"/>
+            </a:solidFill>
+          </a:ln>
+        </p:spPr>
+        <p:style>
+          <a:lnRef idx="1">
+            <a:schemeClr val="accent1"/>
+          </a:lnRef>
+          <a:fillRef idx="3">
+            <a:schemeClr val="accent1"/>
+          </a:fillRef>
+          <a:effectRef idx="2">
+            <a:schemeClr val="accent1"/>
+          </a:effectRef>
+          <a:fontRef idx="minor">
+            <a:schemeClr val="lt1"/>
+          </a:fontRef>
+        </p:style>
+        <p:txBody>
+          <a:bodyPr rtlCol="0" anchor="ctr"/>
+          <a:lstStyle/>
+          <a:p>
+            <a:pPr algn="ctr"/>
+          </a:p>
+        </p:txBody>
+      </p:sp>
+      <p:sp>
+        <p:nvSpPr>
+          <p:cNvPr id="4" name="TextBox 3"/>
+          <p:cNvSpPr txBox="1"/>
+          <p:nvPr/>
+        </p:nvSpPr>
+        <p:spPr>
+          <a:xfrm>
+            <a:off x="411480" y="685800"/>
+            <a:ext cx="6583680" cy="4480560"/>
+          </a:xfrm>
+          <a:prstGeom prst="rect">
+            <a:avLst/>
+          </a:prstGeom>
+          <a:noFill/>
+        </p:spPr>
+        <p:txBody>
+          <a:bodyPr wrap="square">
+            <a:spAutoFit/>
+          </a:bodyPr>
+          <a:lstStyle/>
+          <a:p>
+            <a:pPr>
+              <a:spcAft>
+                <a:spcPts val="300"/>
+              </a:spcAft>
+            </a:pPr>
+            <a:r>
+              <a:rPr sz="1200" b="1" i="1">
+                <a:solidFill>
+                  <a:srgbClr val="000000"/>
+                </a:solidFill>
+                <a:latin typeface="Times New Roman"/>
+              </a:rPr>
+              <a:t>Algorithm 8: </a:t>
+            </a:r>
+            <a:r>
+              <a:rPr sz="1200" b="1">
+                <a:solidFill>
+                  <a:srgbClr val="000000"/>
+                </a:solidFill>
+                <a:latin typeface="Times New Roman"/>
+              </a:rPr>
+              <a:t>Dynamic Threshold Adaptation via EMA Error Balancing</a:t>
+            </a:r>
+          </a:p>
+          <a:p>
+            <a:pPr>
+              <a:spcBef>
+                <a:spcPts val="0"/>
+              </a:spcBef>
+              <a:spcAft>
+                <a:spcPts val="100"/>
+              </a:spcAft>
+            </a:pPr>
+            <a:r>
+              <a:rPr sz="1000" b="1">
+                <a:solidFill>
+                  <a:srgbClr val="000000"/>
+                </a:solidFill>
+                <a:latin typeface="Times New Roman"/>
+              </a:rPr>
+              <a:t>Require:</a:t>
+            </a:r>
+            <a:r>
+              <a:rPr sz="1000" b="0">
+                <a:solidFill>
+                  <a:srgbClr val="000000"/>
+                </a:solidFill>
+                <a:latin typeface="Times New Roman"/>
+              </a:rPr>
+              <a:t> Current threshold τ_t ∈ [0.40, 0.70], recent FPR_t, FNR_t, EMA decay β=0.3</a:t>
+            </a:r>
+          </a:p>
+          <a:p>
+            <a:pPr>
+              <a:spcBef>
+                <a:spcPts val="0"/>
+              </a:spcBef>
+              <a:spcAft>
+                <a:spcPts val="100"/>
+              </a:spcAft>
+            </a:pPr>
+            <a:r>
+              <a:rPr sz="1000" b="1">
+                <a:solidFill>
+                  <a:srgbClr val="000000"/>
+                </a:solidFill>
+                <a:latin typeface="Times New Roman"/>
+              </a:rPr>
+              <a:t>Ensure:</a:t>
+            </a:r>
+            <a:r>
+              <a:rPr sz="1000" b="0">
+                <a:solidFill>
+                  <a:srgbClr val="000000"/>
+                </a:solidFill>
+                <a:latin typeface="Times New Roman"/>
+              </a:rPr>
+              <a:t> Updated threshold τ_{t+1} balancing false positives and false negatives</a:t>
+            </a:r>
+          </a:p>
+          <a:p>
+            <a:pPr>
+              <a:spcBef>
+                <a:spcPts val="0"/>
+              </a:spcBef>
+              <a:spcAft>
+                <a:spcPts val="100"/>
+              </a:spcAft>
+            </a:pPr>
+            <a:r>
+              <a:rPr sz="1000" b="0">
+                <a:solidFill>
+                  <a:srgbClr val="7F8C8D"/>
+                </a:solidFill>
+                <a:latin typeface="Consolas"/>
+              </a:rPr>
+              <a:t> 1:  </a:t>
+            </a:r>
+            <a:r>
+              <a:rPr sz="1000" b="1">
+                <a:solidFill>
+                  <a:srgbClr val="000000"/>
+                </a:solidFill>
+                <a:latin typeface="Times New Roman"/>
+              </a:rPr>
+              <a:t>for </a:t>
+            </a:r>
+            <a:r>
+              <a:rPr sz="1000" b="0">
+                <a:solidFill>
+                  <a:srgbClr val="000000"/>
+                </a:solidFill>
+                <a:latin typeface="Times New Roman"/>
+              </a:rPr>
+              <a:t>each evaluation win</a:t>
+            </a:r>
+            <a:r>
+              <a:rPr sz="1000" b="1">
+                <a:solidFill>
+                  <a:srgbClr val="000000"/>
+                </a:solidFill>
+                <a:latin typeface="Times New Roman"/>
+              </a:rPr>
+              <a:t>do</a:t>
+            </a:r>
+            <a:r>
+              <a:rPr sz="1000" b="0">
+                <a:solidFill>
+                  <a:srgbClr val="000000"/>
+                </a:solidFill>
+                <a:latin typeface="Times New Roman"/>
+              </a:rPr>
+              <a:t>w W_t </a:t>
+            </a:r>
+            <a:r>
+              <a:rPr sz="1000" b="1">
+                <a:solidFill>
+                  <a:srgbClr val="000000"/>
+                </a:solidFill>
+                <a:latin typeface="Times New Roman"/>
+              </a:rPr>
+              <a:t>do</a:t>
+            </a:r>
+          </a:p>
+          <a:p>
+            <a:pPr>
+              <a:spcBef>
+                <a:spcPts val="0"/>
+              </a:spcBef>
+              <a:spcAft>
+                <a:spcPts val="100"/>
+              </a:spcAft>
+            </a:pPr>
+            <a:r>
+              <a:rPr sz="1000" b="0">
+                <a:solidFill>
+                  <a:srgbClr val="7F8C8D"/>
+                </a:solidFill>
+                <a:latin typeface="Consolas"/>
+              </a:rPr>
+              <a:t> 2:      </a:t>
+            </a:r>
+            <a:r>
+              <a:rPr sz="1000" b="0">
+                <a:solidFill>
+                  <a:srgbClr val="000000"/>
+                </a:solidFill>
+                <a:latin typeface="Times New Roman"/>
+              </a:rPr>
+              <a:t>FPR_t ← FP_t / (FP_t + TN_t)  // false positive rate</a:t>
+            </a:r>
+          </a:p>
+          <a:p>
+            <a:pPr>
+              <a:spcBef>
+                <a:spcPts val="0"/>
+              </a:spcBef>
+              <a:spcAft>
+                <a:spcPts val="100"/>
+              </a:spcAft>
+            </a:pPr>
+            <a:r>
+              <a:rPr sz="1000" b="0">
+                <a:solidFill>
+                  <a:srgbClr val="7F8C8D"/>
+                </a:solidFill>
+                <a:latin typeface="Consolas"/>
+              </a:rPr>
+              <a:t> 3:      </a:t>
+            </a:r>
+            <a:r>
+              <a:rPr sz="1000" b="0">
+                <a:solidFill>
+                  <a:srgbClr val="000000"/>
+                </a:solidFill>
+                <a:latin typeface="Times New Roman"/>
+              </a:rPr>
+              <a:t>FNR_t ← FN_t / (FN_t + TP_t)  // false negative rate</a:t>
+            </a:r>
+          </a:p>
+          <a:p>
+            <a:pPr>
+              <a:spcBef>
+                <a:spcPts val="0"/>
+              </a:spcBef>
+              <a:spcAft>
+                <a:spcPts val="100"/>
+              </a:spcAft>
+            </a:pPr>
+            <a:r>
+              <a:rPr sz="1000" b="0">
+                <a:solidFill>
+                  <a:srgbClr val="7F8C8D"/>
+                </a:solidFill>
+                <a:latin typeface="Consolas"/>
+              </a:rPr>
+              <a:t> 4:      </a:t>
+            </a:r>
+            <a:r>
+              <a:rPr sz="1000" b="0">
+                <a:solidFill>
+                  <a:srgbClr val="000000"/>
+                </a:solidFill>
+                <a:latin typeface="Times New Roman"/>
+              </a:rPr>
+              <a:t>EMA_FPR ← β · FPR_t + (1 - β) · EMA_FPR  // exponential moving average</a:t>
+            </a:r>
+          </a:p>
+          <a:p>
+            <a:pPr>
+              <a:spcBef>
+                <a:spcPts val="0"/>
+              </a:spcBef>
+              <a:spcAft>
+                <a:spcPts val="100"/>
+              </a:spcAft>
+            </a:pPr>
+            <a:r>
+              <a:rPr sz="1000" b="0">
+                <a:solidFill>
+                  <a:srgbClr val="7F8C8D"/>
+                </a:solidFill>
+                <a:latin typeface="Consolas"/>
+              </a:rPr>
+              <a:t> 5:      </a:t>
+            </a:r>
+            <a:r>
+              <a:rPr sz="1000" b="0">
+                <a:solidFill>
+                  <a:srgbClr val="000000"/>
+                </a:solidFill>
+                <a:latin typeface="Times New Roman"/>
+              </a:rPr>
+              <a:t>EMA_FNR ← β · FNR_t + (1 - β) · EMA_FNR</a:t>
+            </a:r>
+          </a:p>
+          <a:p>
+            <a:pPr>
+              <a:spcBef>
+                <a:spcPts val="0"/>
+              </a:spcBef>
+              <a:spcAft>
+                <a:spcPts val="100"/>
+              </a:spcAft>
+            </a:pPr>
+            <a:r>
+              <a:rPr sz="1000" b="0">
+                <a:solidFill>
+                  <a:srgbClr val="7F8C8D"/>
+                </a:solidFill>
+                <a:latin typeface="Consolas"/>
+              </a:rPr>
+              <a:t> 6:      </a:t>
+            </a:r>
+            <a:r>
+              <a:rPr sz="1000" b="1">
+                <a:solidFill>
+                  <a:srgbClr val="000000"/>
+                </a:solidFill>
+                <a:latin typeface="Times New Roman"/>
+              </a:rPr>
+              <a:t>if </a:t>
+            </a:r>
+            <a:r>
+              <a:rPr sz="1000" b="0">
+                <a:solidFill>
+                  <a:srgbClr val="000000"/>
+                </a:solidFill>
+                <a:latin typeface="Times New Roman"/>
+              </a:rPr>
+              <a:t>EMA_FPR &gt; EMA_FNR </a:t>
+            </a:r>
+            <a:r>
+              <a:rPr sz="1000" b="1">
+                <a:solidFill>
+                  <a:srgbClr val="000000"/>
+                </a:solidFill>
+                <a:latin typeface="Times New Roman"/>
+              </a:rPr>
+              <a:t>then</a:t>
+            </a:r>
+          </a:p>
+          <a:p>
+            <a:pPr>
+              <a:spcBef>
+                <a:spcPts val="0"/>
+              </a:spcBef>
+              <a:spcAft>
+                <a:spcPts val="100"/>
+              </a:spcAft>
+            </a:pPr>
+            <a:r>
+              <a:rPr sz="1000" b="0">
+                <a:solidFill>
+                  <a:srgbClr val="7F8C8D"/>
+                </a:solidFill>
+                <a:latin typeface="Consolas"/>
+              </a:rPr>
+              <a:t> 7:          </a:t>
+            </a:r>
+            <a:r>
+              <a:rPr sz="1000" b="0">
+                <a:solidFill>
+                  <a:srgbClr val="000000"/>
+                </a:solidFill>
+                <a:latin typeface="Times New Roman"/>
+              </a:rPr>
+              <a:t>τ_{t+1} ← τ_t + 0.005  // too many false positives: raise threshold</a:t>
+            </a:r>
+          </a:p>
+          <a:p>
+            <a:pPr>
+              <a:spcBef>
+                <a:spcPts val="0"/>
+              </a:spcBef>
+              <a:spcAft>
+                <a:spcPts val="100"/>
+              </a:spcAft>
+            </a:pPr>
+            <a:r>
+              <a:rPr sz="1000" b="0">
+                <a:solidFill>
+                  <a:srgbClr val="7F8C8D"/>
+                </a:solidFill>
+                <a:latin typeface="Consolas"/>
+              </a:rPr>
+              <a:t> 8:      </a:t>
+            </a:r>
+            <a:r>
+              <a:rPr sz="1000" b="1">
+                <a:solidFill>
+                  <a:srgbClr val="000000"/>
+                </a:solidFill>
+                <a:latin typeface="Times New Roman"/>
+              </a:rPr>
+              <a:t>else</a:t>
+            </a:r>
+            <a:r>
+              <a:rPr sz="1000" b="0">
+                <a:solidFill>
+                  <a:srgbClr val="000000"/>
+                </a:solidFill>
+                <a:latin typeface="Times New Roman"/>
+              </a:rPr>
+              <a:t> </a:t>
+            </a:r>
+            <a:r>
+              <a:rPr sz="1000" b="1">
+                <a:solidFill>
+                  <a:srgbClr val="000000"/>
+                </a:solidFill>
+                <a:latin typeface="Times New Roman"/>
+              </a:rPr>
+              <a:t>if </a:t>
+            </a:r>
+            <a:r>
+              <a:rPr sz="1000" b="0">
+                <a:solidFill>
+                  <a:srgbClr val="000000"/>
+                </a:solidFill>
+                <a:latin typeface="Times New Roman"/>
+              </a:rPr>
+              <a:t>EMA_FNR &gt; EMA_FPR </a:t>
+            </a:r>
+            <a:r>
+              <a:rPr sz="1000" b="1">
+                <a:solidFill>
+                  <a:srgbClr val="000000"/>
+                </a:solidFill>
+                <a:latin typeface="Times New Roman"/>
+              </a:rPr>
+              <a:t>then</a:t>
+            </a:r>
+          </a:p>
+          <a:p>
+            <a:pPr>
+              <a:spcBef>
+                <a:spcPts val="0"/>
+              </a:spcBef>
+              <a:spcAft>
+                <a:spcPts val="100"/>
+              </a:spcAft>
+            </a:pPr>
+            <a:r>
+              <a:rPr sz="1000" b="0">
+                <a:solidFill>
+                  <a:srgbClr val="7F8C8D"/>
+                </a:solidFill>
+                <a:latin typeface="Consolas"/>
+              </a:rPr>
+              <a:t> 9:          </a:t>
+            </a:r>
+            <a:r>
+              <a:rPr sz="1000" b="0">
+                <a:solidFill>
+                  <a:srgbClr val="000000"/>
+                </a:solidFill>
+                <a:latin typeface="Times New Roman"/>
+              </a:rPr>
+              <a:t>τ_{t+1} ← τ_t - 0.005  // too many false negatives: lower threshold</a:t>
+            </a:r>
+          </a:p>
+          <a:p>
+            <a:pPr>
+              <a:spcBef>
+                <a:spcPts val="0"/>
+              </a:spcBef>
+              <a:spcAft>
+                <a:spcPts val="100"/>
+              </a:spcAft>
+            </a:pPr>
+            <a:r>
+              <a:rPr sz="1000" b="0">
+                <a:solidFill>
+                  <a:srgbClr val="7F8C8D"/>
+                </a:solidFill>
+                <a:latin typeface="Consolas"/>
+              </a:rPr>
+              <a:t>10:      </a:t>
+            </a:r>
+            <a:r>
+              <a:rPr sz="1000" b="1">
+                <a:solidFill>
+                  <a:srgbClr val="000000"/>
+                </a:solidFill>
+                <a:latin typeface="Times New Roman"/>
+              </a:rPr>
+              <a:t>else</a:t>
+            </a:r>
+          </a:p>
+          <a:p>
+            <a:pPr>
+              <a:spcBef>
+                <a:spcPts val="0"/>
+              </a:spcBef>
+              <a:spcAft>
+                <a:spcPts val="100"/>
+              </a:spcAft>
+            </a:pPr>
+            <a:r>
+              <a:rPr sz="1000" b="0">
+                <a:solidFill>
+                  <a:srgbClr val="7F8C8D"/>
+                </a:solidFill>
+                <a:latin typeface="Consolas"/>
+              </a:rPr>
+              <a:t>11:          </a:t>
+            </a:r>
+            <a:r>
+              <a:rPr sz="1000" b="0">
+                <a:solidFill>
+                  <a:srgbClr val="000000"/>
+                </a:solidFill>
+                <a:latin typeface="Times New Roman"/>
+              </a:rPr>
+              <a:t>τ_{t+1} ← τ_t  // balanced: maintain threshold</a:t>
+            </a:r>
+          </a:p>
+          <a:p>
+            <a:pPr>
+              <a:spcBef>
+                <a:spcPts val="0"/>
+              </a:spcBef>
+              <a:spcAft>
+                <a:spcPts val="100"/>
+              </a:spcAft>
+            </a:pPr>
+            <a:r>
+              <a:rPr sz="1000" b="0">
+                <a:solidFill>
+                  <a:srgbClr val="7F8C8D"/>
+                </a:solidFill>
+                <a:latin typeface="Consolas"/>
+              </a:rPr>
+              <a:t>12:      </a:t>
+            </a:r>
+            <a:r>
+              <a:rPr sz="1000" b="1">
+                <a:solidFill>
+                  <a:srgbClr val="000000"/>
+                </a:solidFill>
+                <a:latin typeface="Times New Roman"/>
+              </a:rPr>
+              <a:t>end if</a:t>
+            </a:r>
+          </a:p>
+          <a:p>
+            <a:pPr>
+              <a:spcBef>
+                <a:spcPts val="0"/>
+              </a:spcBef>
+              <a:spcAft>
+                <a:spcPts val="100"/>
+              </a:spcAft>
+            </a:pPr>
+            <a:r>
+              <a:rPr sz="1000" b="0">
+                <a:solidFill>
+                  <a:srgbClr val="7F8C8D"/>
+                </a:solidFill>
+                <a:latin typeface="Consolas"/>
+              </a:rPr>
+              <a:t>13:      </a:t>
+            </a:r>
+            <a:r>
+              <a:rPr sz="1000" b="0">
+                <a:solidFill>
+                  <a:srgbClr val="000000"/>
+                </a:solidFill>
+                <a:latin typeface="Times New Roman"/>
+              </a:rPr>
+              <a:t>τ_{t+1} ← clip(τ_{t+1}, 0.40, 0.70)</a:t>
+            </a:r>
+          </a:p>
+          <a:p>
+            <a:pPr>
+              <a:spcBef>
+                <a:spcPts val="0"/>
+              </a:spcBef>
+              <a:spcAft>
+                <a:spcPts val="100"/>
+              </a:spcAft>
+            </a:pPr>
+            <a:r>
+              <a:rPr sz="1000" b="0">
+                <a:solidFill>
+                  <a:srgbClr val="7F8C8D"/>
+                </a:solidFill>
+                <a:latin typeface="Consolas"/>
+              </a:rPr>
+              <a:t>14:  </a:t>
+            </a:r>
+            <a:r>
+              <a:rPr sz="1000" b="1">
+                <a:solidFill>
+                  <a:srgbClr val="000000"/>
+                </a:solidFill>
+                <a:latin typeface="Times New Roman"/>
+              </a:rPr>
+              <a:t>end for</a:t>
+            </a:r>
+          </a:p>
+          <a:p>
+            <a:pPr>
+              <a:spcBef>
+                <a:spcPts val="0"/>
+              </a:spcBef>
+              <a:spcAft>
+                <a:spcPts val="100"/>
+              </a:spcAft>
+            </a:pPr>
+            <a:r>
+              <a:rPr sz="1000" b="0">
+                <a:solidFill>
+                  <a:srgbClr val="7F8C8D"/>
+                </a:solidFill>
+                <a:latin typeface="Consolas"/>
+              </a:rPr>
+              <a:t>15:  </a:t>
+            </a:r>
+            <a:r>
+              <a:rPr sz="1000" b="1">
+                <a:solidFill>
+                  <a:srgbClr val="000000"/>
+                </a:solidFill>
+                <a:latin typeface="Times New Roman"/>
+              </a:rPr>
+              <a:t>return </a:t>
+            </a:r>
+            <a:r>
+              <a:rPr sz="1000" b="0">
+                <a:solidFill>
+                  <a:srgbClr val="000000"/>
+                </a:solidFill>
+                <a:latin typeface="Times New Roman"/>
+              </a:rPr>
+              <a:t>τ_{t+1}</a:t>
+            </a:r>
+          </a:p>
+        </p:txBody>
+      </p:sp>
+      <p:pic>
+        <p:nvPicPr>
+          <p:cNvPr id="5" name="Picture 4" descr="image.png"/>
+          <p:cNvPicPr>
+            <a:picLocks noChangeAspect="1"/>
+          </p:cNvPicPr>
+          <p:nvPr/>
+        </p:nvPicPr>
+        <p:blipFill>
+          <a:blip r:embed="rId2"/>
+          <a:stretch>
+            <a:fillRect/>
+          </a:stretch>
+        </p:blipFill>
+        <p:spPr>
+          <a:xfrm>
+            <a:off x="7498079" y="640080"/>
+            <a:ext cx="4114800" cy="1572462"/>
+          </a:xfrm>
+          <a:prstGeom prst="rect">
+            <a:avLst/>
+          </a:prstGeom>
+        </p:spPr>
+      </p:pic>
+      <p:sp>
+        <p:nvSpPr>
+          <p:cNvPr id="6" name="TextBox 5"/>
+          <p:cNvSpPr txBox="1"/>
+          <p:nvPr/>
+        </p:nvSpPr>
+        <p:spPr>
+          <a:xfrm>
+            <a:off x="7498079" y="2743200"/>
+            <a:ext cx="4389120" cy="2286000"/>
+          </a:xfrm>
+          <a:prstGeom prst="rect">
+            <a:avLst/>
+          </a:prstGeom>
+          <a:noFill/>
+        </p:spPr>
+        <p:txBody>
+          <a:bodyPr wrap="square">
+            <a:spAutoFit/>
+          </a:bodyPr>
+          <a:lstStyle/>
+          <a:p>
+            <a:pPr>
+              <a:spcAft>
+                <a:spcPts val="400"/>
+              </a:spcAft>
+              <a:defRPr sz="1100" b="0">
+                <a:solidFill>
+                  <a:srgbClr val="000000"/>
+                </a:solidFill>
+                <a:latin typeface="Calibri"/>
+              </a:defRPr>
+            </a:pPr>
+            <a:r>
+              <a:t>•  Continuously adjusts τ ∈ [0.40, 0.70] based on the balance between FPR and FNR using exponential moving average (EMA, β=0.3).</a:t>
+            </a:r>
+          </a:p>
+          <a:p>
+            <a:pPr>
+              <a:spcAft>
+                <a:spcPts val="400"/>
+              </a:spcAft>
+              <a:defRPr sz="1100" b="0">
+                <a:solidFill>
+                  <a:srgbClr val="000000"/>
+                </a:solidFill>
+                <a:latin typeface="Calibri"/>
+              </a:defRPr>
+            </a:pPr>
+            <a:r>
+              <a:t>•  When FPR dominates, threshold rises to reduce false alarms; when FNR dominates, it falls to catch more attacks—creating a self-correcting feedback loop.</a:t>
+            </a:r>
+          </a:p>
+          <a:p>
+            <a:pPr>
+              <a:spcAft>
+                <a:spcPts val="400"/>
+              </a:spcAft>
+              <a:defRPr sz="1100" b="0">
+                <a:solidFill>
+                  <a:srgbClr val="000000"/>
+                </a:solidFill>
+                <a:latin typeface="Calibri"/>
+              </a:defRPr>
+            </a:pPr>
+            <a:r>
+              <a:t>•  Sequential stage: threshold state depends on previous window's EMA values (temporal dependency).</a:t>
+            </a:r>
+          </a:p>
+          <a:p>
+            <a:pPr>
+              <a:spcAft>
+                <a:spcPts val="400"/>
+              </a:spcAft>
+              <a:defRPr sz="1100" b="0">
+                <a:solidFill>
+                  <a:srgbClr val="000000"/>
+                </a:solidFill>
+                <a:latin typeface="Calibri"/>
+              </a:defRPr>
+            </a:pPr>
+            <a:r>
+              <a:t>•  Hard bounds [0.40, 0.70] prevent threshold from becoming too permissive or too aggressive.</a:t>
+            </a:r>
+          </a:p>
+        </p:txBody>
+      </p:sp>
+      <p:sp>
+        <p:nvSpPr>
+          <p:cNvPr id="7" name="TextBox 6"/>
+          <p:cNvSpPr txBox="1"/>
+          <p:nvPr/>
+        </p:nvSpPr>
+        <p:spPr>
+          <a:xfrm>
+            <a:off x="274320" y="5486400"/>
+            <a:ext cx="11430000" cy="365760"/>
+          </a:xfrm>
+          <a:prstGeom prst="rect">
+            <a:avLst/>
+          </a:prstGeom>
+          <a:noFill/>
+        </p:spPr>
+        <p:txBody>
+          <a:bodyPr wrap="square">
+            <a:spAutoFit/>
+          </a:bodyPr>
+          <a:lstStyle/>
+          <a:p>
+            <a:pPr algn="ctr">
+              <a:defRPr sz="1300" b="1">
+                <a:solidFill>
+                  <a:srgbClr val="2980B9"/>
+                </a:solidFill>
+                <a:latin typeface="Calibri"/>
+              </a:defRPr>
+            </a:pPr>
+            <a:r>
+              <a:t>Output: τ_{t+1} → Used by Stage 8 for high-confidence direct classification</a:t>
+            </a:r>
+          </a:p>
+        </p:txBody>
+      </p:sp>
+    </p:spTree>
+  </p:cSld>
+  <p:clrMapOvr>
+    <a:masterClrMapping/>
+  </p:clrMapOvr>
+</p:sld>
+</file>
+
+<file path=ppt/slides/slide12.xml><?xml version="1.0" encoding="utf-8"?>
+<p:sld xmlns:a="http://schemas.openxmlformats.org/drawingml/2006/main" xmlns:p="http://schemas.openxmlformats.org/presentationml/2006/main" xmlns:r="http://schemas.openxmlformats.org/officeDocument/2006/relationships">
+  <p:cSld>
+    <p:bg>
+      <p:bgPr>
+        <a:solidFill>
+          <a:srgbClr val="FFFFFF"/>
+        </a:solidFill>
+        <a:effectLst/>
+      </p:bgPr>
+    </p:bg>
+    <p:spTree>
+      <p:nvGrpSpPr>
+        <p:cNvPr id="1" name=""/>
+        <p:cNvGrpSpPr/>
+        <p:nvPr/>
+      </p:nvGrpSpPr>
+      <p:grpSpPr/>
+      <p:sp>
+        <p:nvSpPr>
+          <p:cNvPr id="2" name="TextBox 1"/>
+          <p:cNvSpPr txBox="1"/>
+          <p:nvPr/>
+        </p:nvSpPr>
+        <p:spPr>
+          <a:xfrm>
+            <a:off x="274320" y="137160"/>
+            <a:ext cx="11430000" cy="457200"/>
+          </a:xfrm>
+          <a:prstGeom prst="rect">
+            <a:avLst/>
+          </a:prstGeom>
+          <a:noFill/>
+        </p:spPr>
+        <p:txBody>
+          <a:bodyPr wrap="square">
+            <a:spAutoFit/>
+          </a:bodyPr>
+          <a:lstStyle/>
+          <a:p>
+            <a:pPr algn="l">
+              <a:defRPr sz="2400" b="1">
+                <a:solidFill>
                   <a:srgbClr val="2C3E50"/>
                 </a:solidFill>
                 <a:latin typeface="Calibri"/>
               </a:defRPr>
             </a:pPr>
             <a:r>
-              <a:t>Stage 8: Final Classification Decision</a:t>
+              <a:t>Stage 8: Final Classification Decision  [⚡ Parallelizable per Flow]</a:t>
             </a:r>
           </a:p>
         </p:txBody>
@@ -6585,7 +7230,7 @@
                 </a:solidFill>
                 <a:latin typeface="Times New Roman"/>
               </a:rPr>
-              <a:t>Algorithm 8: </a:t>
+              <a:t>Algorithm 9: </a:t>
             </a:r>
             <a:r>
               <a:rPr sz="1200" b="1">
@@ -7263,7 +7908,7 @@
                 </a:solidFill>
                 <a:latin typeface="Times New Roman"/>
               </a:rPr>
-              <a:t>ŷ_i, confidence, audit_trail(p_i, s_i, C)</a:t>
+              <a:t>ŷ_i, confidence, audit_trail(p_i, s_i, C)  // ⚡ per-flow parallel</a:t>
             </a:r>
           </a:p>
         </p:txBody>
@@ -7326,7 +7971,7 @@
               </a:defRPr>
             </a:pPr>
             <a:r>
-              <a:t>•  Uses a three-tier decision logic: flows with high DT confidence (p ≥ τ or p ≤ 1−τ) are classified directly; uncertain flows in the middle range are deferred to the RL agent with Z3 verification.</a:t>
+              <a:t>•  Three-tier logic: high-confidence flows (p ≥ τ or p ≤ 1−τ) classified directly; uncertain flows deferred to RL+Z3 verification.</a:t>
             </a:r>
           </a:p>
           <a:p>
@@ -7342,7 +7987,7 @@
               </a:defRPr>
             </a:pPr>
             <a:r>
-              <a:t>•  The RL+Z3 path handles the hardest cases—ambiguous flows near the decision boundary—where the Q-learning policy and formal safety shield provide the most value.</a:t>
+              <a:t>•  Embarrassingly parallel: each flow's classification is independent—Q-table and constraint set are read-only at inference time.</a:t>
             </a:r>
           </a:p>
           <a:p>
@@ -7358,7 +8003,7 @@
               </a:defRPr>
             </a:pPr>
             <a:r>
-              <a:t>•  Every classification produces a full audit trail: DT probability, leaf state, Z3 constraint check result, and confidence level, enabling complete explainability.</a:t>
+              <a:t>•  Every classification produces a full audit trail: DT probability, leaf state, Z3 check result, and confidence level for complete explainability.</a:t>
             </a:r>
           </a:p>
           <a:p>
@@ -7374,7 +8019,7 @@
               </a:defRPr>
             </a:pPr>
             <a:r>
-              <a:t>•  This tiered approach reduces Z3 solver calls (~70% of flows are high-confidence), balancing verification overhead with classification accuracy.</a:t>
+              <a:t>•  Tiered approach reduces Z3 solver calls (~70% of flows are high-confidence), balancing verification overhead with throughput.</a:t>
             </a:r>
           </a:p>
         </p:txBody>
@@ -7423,7 +8068,7 @@
 </p:sld>
 </file>
 
-<file path=ppt/slides/slide12.xml><?xml version="1.0" encoding="utf-8"?>
+<file path=ppt/slides/slide13.xml><?xml version="1.0" encoding="utf-8"?>
 <p:sld xmlns:a="http://schemas.openxmlformats.org/drawingml/2006/main" xmlns:p="http://schemas.openxmlformats.org/presentationml/2006/main" xmlns:r="http://schemas.openxmlformats.org/officeDocument/2006/relationships">
   <p:cSld>
     <p:bg>
@@ -7472,6 +8117,860 @@
               </a:defRPr>
             </a:pPr>
             <a:r>
+              <a:t>Parallel Processing Architecture Across the ASRRL Pipeline</a:t>
+            </a:r>
+          </a:p>
+        </p:txBody>
+      </p:sp>
+      <p:sp>
+        <p:nvSpPr>
+          <p:cNvPr id="3" name="TextBox 2"/>
+          <p:cNvSpPr txBox="1"/>
+          <p:nvPr/>
+        </p:nvSpPr>
+        <p:spPr>
+          <a:xfrm>
+            <a:off x="274320" y="731520"/>
+            <a:ext cx="5486400" cy="365760"/>
+          </a:xfrm>
+          <a:prstGeom prst="rect">
+            <a:avLst/>
+          </a:prstGeom>
+          <a:noFill/>
+        </p:spPr>
+        <p:txBody>
+          <a:bodyPr wrap="square">
+            <a:spAutoFit/>
+          </a:bodyPr>
+          <a:lstStyle/>
+          <a:p>
+            <a:pPr algn="l">
+              <a:defRPr sz="1600" b="1">
+                <a:solidFill>
+                  <a:srgbClr val="1E8E3E"/>
+                </a:solidFill>
+                <a:latin typeface="Calibri"/>
+              </a:defRPr>
+            </a:pPr>
+            <a:r>
+              <a:t>⚡ Parallelizable Stages (Embarrassingly Parallel)</a:t>
+            </a:r>
+          </a:p>
+        </p:txBody>
+      </p:sp>
+      <p:sp>
+        <p:nvSpPr>
+          <p:cNvPr id="4" name="TextBox 3"/>
+          <p:cNvSpPr txBox="1"/>
+          <p:nvPr/>
+        </p:nvSpPr>
+        <p:spPr>
+          <a:xfrm>
+            <a:off x="274320" y="1097280"/>
+            <a:ext cx="5669280" cy="5029200"/>
+          </a:xfrm>
+          <a:prstGeom prst="rect">
+            <a:avLst/>
+          </a:prstGeom>
+          <a:noFill/>
+        </p:spPr>
+        <p:txBody>
+          <a:bodyPr wrap="square">
+            <a:spAutoFit/>
+          </a:bodyPr>
+          <a:lstStyle/>
+          <a:p>
+            <a:pPr>
+              <a:spcAft>
+                <a:spcPts val="200"/>
+              </a:spcAft>
+              <a:defRPr sz="1300" b="1">
+                <a:solidFill>
+                  <a:srgbClr val="1E8E3E"/>
+                </a:solidFill>
+                <a:latin typeface="Consolas"/>
+              </a:defRPr>
+            </a:pPr>
+            <a:r>
+              <a:t>Stage 0: PCAP Binary Preprocessing</a:t>
+            </a:r>
+          </a:p>
+          <a:p>
+            <a:pPr>
+              <a:spcAft>
+                <a:spcPts val="200"/>
+              </a:spcAft>
+              <a:defRPr sz="1100" b="0">
+                <a:solidFill>
+                  <a:srgbClr val="000000"/>
+                </a:solidFill>
+                <a:latin typeface="Consolas"/>
+              </a:defRPr>
+            </a:pPr>
+            <a:r>
+              <a:t>  Granularity: Per PCAP file / per time window</a:t>
+            </a:r>
+          </a:p>
+          <a:p>
+            <a:pPr>
+              <a:spcAft>
+                <a:spcPts val="200"/>
+              </a:spcAft>
+              <a:defRPr sz="1100" b="0">
+                <a:solidFill>
+                  <a:srgbClr val="000000"/>
+                </a:solidFill>
+                <a:latin typeface="Consolas"/>
+              </a:defRPr>
+            </a:pPr>
+            <a:r>
+              <a:t>  Strategy: Each capture file processed by independent worker</a:t>
+            </a:r>
+          </a:p>
+          <a:p>
+            <a:pPr>
+              <a:spcAft>
+                <a:spcPts val="200"/>
+              </a:spcAft>
+              <a:defRPr sz="1100" b="0">
+                <a:solidFill>
+                  <a:srgbClr val="7F8C8D"/>
+                </a:solidFill>
+                <a:latin typeface="Consolas"/>
+              </a:defRPr>
+            </a:pPr>
+            <a:r>
+              <a:t>  Speedup: ~Nx with N CPU cores (I/O bound)</a:t>
+            </a:r>
+          </a:p>
+          <a:p>
+            <a:pPr>
+              <a:spcAft>
+                <a:spcPts val="200"/>
+              </a:spcAft>
+              <a:defRPr sz="1100" b="0">
+                <a:solidFill>
+                  <a:srgbClr val="7F8C8D"/>
+                </a:solidFill>
+                <a:latin typeface="Consolas"/>
+              </a:defRPr>
+            </a:pPr>
+            <a:r>
+              <a:t>  Tool: CICFlowMeter instances or parallel Argus processes</a:t>
+            </a:r>
+          </a:p>
+          <a:p>
+            <a:pPr>
+              <a:spcAft>
+                <a:spcPts val="200"/>
+              </a:spcAft>
+              <a:defRPr sz="400" b="0">
+                <a:solidFill>
+                  <a:srgbClr val="000000"/>
+                </a:solidFill>
+                <a:latin typeface="Consolas"/>
+              </a:defRPr>
+            </a:pPr>
+          </a:p>
+          <a:p>
+            <a:pPr>
+              <a:spcAft>
+                <a:spcPts val="200"/>
+              </a:spcAft>
+              <a:defRPr sz="1300" b="1">
+                <a:solidFill>
+                  <a:srgbClr val="1E8E3E"/>
+                </a:solidFill>
+                <a:latin typeface="Consolas"/>
+              </a:defRPr>
+            </a:pPr>
+            <a:r>
+              <a:t>Stage 3: Z3 Constraint Extraction</a:t>
+            </a:r>
+          </a:p>
+          <a:p>
+            <a:pPr>
+              <a:spcAft>
+                <a:spcPts val="200"/>
+              </a:spcAft>
+              <a:defRPr sz="1100" b="0">
+                <a:solidFill>
+                  <a:srgbClr val="000000"/>
+                </a:solidFill>
+                <a:latin typeface="Consolas"/>
+              </a:defRPr>
+            </a:pPr>
+            <a:r>
+              <a:t>  Granularity: Per leaf path (L ≈ 60 independent paths)</a:t>
+            </a:r>
+          </a:p>
+          <a:p>
+            <a:pPr>
+              <a:spcAft>
+                <a:spcPts val="200"/>
+              </a:spcAft>
+              <a:defRPr sz="1100" b="0">
+                <a:solidFill>
+                  <a:srgbClr val="000000"/>
+                </a:solidFill>
+                <a:latin typeface="Consolas"/>
+              </a:defRPr>
+            </a:pPr>
+            <a:r>
+              <a:t>  Strategy: Extract each path in parallel; sequential merge + sat check</a:t>
+            </a:r>
+          </a:p>
+          <a:p>
+            <a:pPr>
+              <a:spcAft>
+                <a:spcPts val="200"/>
+              </a:spcAft>
+              <a:defRPr sz="1100" b="0">
+                <a:solidFill>
+                  <a:srgbClr val="7F8C8D"/>
+                </a:solidFill>
+                <a:latin typeface="Consolas"/>
+              </a:defRPr>
+            </a:pPr>
+            <a:r>
+              <a:t>  Speedup: ~min(L, N) with N cores</a:t>
+            </a:r>
+          </a:p>
+          <a:p>
+            <a:pPr>
+              <a:spcAft>
+                <a:spcPts val="200"/>
+              </a:spcAft>
+              <a:defRPr sz="1100" b="0">
+                <a:solidFill>
+                  <a:srgbClr val="7F8C8D"/>
+                </a:solidFill>
+                <a:latin typeface="Consolas"/>
+              </a:defRPr>
+            </a:pPr>
+            <a:r>
+              <a:t>  Note: Final satisfiability merge is sequential (consistency check)</a:t>
+            </a:r>
+          </a:p>
+          <a:p>
+            <a:pPr>
+              <a:spcAft>
+                <a:spcPts val="200"/>
+              </a:spcAft>
+              <a:defRPr sz="400" b="0">
+                <a:solidFill>
+                  <a:srgbClr val="000000"/>
+                </a:solidFill>
+                <a:latin typeface="Consolas"/>
+              </a:defRPr>
+            </a:pPr>
+          </a:p>
+          <a:p>
+            <a:pPr>
+              <a:spcAft>
+                <a:spcPts val="200"/>
+              </a:spcAft>
+              <a:defRPr sz="1300" b="1">
+                <a:solidFill>
+                  <a:srgbClr val="1E8E3E"/>
+                </a:solidFill>
+                <a:latin typeface="Consolas"/>
+              </a:defRPr>
+            </a:pPr>
+            <a:r>
+              <a:t>Stage 8: Final Classification (Inference)</a:t>
+            </a:r>
+          </a:p>
+          <a:p>
+            <a:pPr>
+              <a:spcAft>
+                <a:spcPts val="200"/>
+              </a:spcAft>
+              <a:defRPr sz="1100" b="0">
+                <a:solidFill>
+                  <a:srgbClr val="000000"/>
+                </a:solidFill>
+                <a:latin typeface="Consolas"/>
+              </a:defRPr>
+            </a:pPr>
+            <a:r>
+              <a:t>  Granularity: Per flow (each flow independently classified)</a:t>
+            </a:r>
+          </a:p>
+          <a:p>
+            <a:pPr>
+              <a:spcAft>
+                <a:spcPts val="200"/>
+              </a:spcAft>
+              <a:defRPr sz="1100" b="0">
+                <a:solidFill>
+                  <a:srgbClr val="000000"/>
+                </a:solidFill>
+                <a:latin typeface="Consolas"/>
+              </a:defRPr>
+            </a:pPr>
+            <a:r>
+              <a:t>  Strategy: Partition flow stream across N workers; read-only Q-table + C</a:t>
+            </a:r>
+          </a:p>
+          <a:p>
+            <a:pPr>
+              <a:spcAft>
+                <a:spcPts val="200"/>
+              </a:spcAft>
+              <a:defRPr sz="1100" b="0">
+                <a:solidFill>
+                  <a:srgbClr val="7F8C8D"/>
+                </a:solidFill>
+                <a:latin typeface="Consolas"/>
+              </a:defRPr>
+            </a:pPr>
+            <a:r>
+              <a:t>  Speedup: ~Nx with N cores (CPU bound per Z3 call)</a:t>
+            </a:r>
+          </a:p>
+          <a:p>
+            <a:pPr>
+              <a:spcAft>
+                <a:spcPts val="200"/>
+              </a:spcAft>
+              <a:defRPr sz="1100" b="0">
+                <a:solidFill>
+                  <a:srgbClr val="7F8C8D"/>
+                </a:solidFill>
+                <a:latin typeface="Consolas"/>
+              </a:defRPr>
+            </a:pPr>
+            <a:r>
+              <a:t>  Note: ~70% direct classification (no Z3 call); ~30% invoke solver</a:t>
+            </a:r>
+          </a:p>
+          <a:p>
+            <a:pPr>
+              <a:spcAft>
+                <a:spcPts val="200"/>
+              </a:spcAft>
+              <a:defRPr sz="400" b="0">
+                <a:solidFill>
+                  <a:srgbClr val="000000"/>
+                </a:solidFill>
+                <a:latin typeface="Consolas"/>
+              </a:defRPr>
+            </a:pPr>
+          </a:p>
+          <a:p>
+            <a:pPr>
+              <a:spcAft>
+                <a:spcPts val="200"/>
+              </a:spcAft>
+              <a:defRPr sz="1300" b="1">
+                <a:solidFill>
+                  <a:srgbClr val="1E8E3E"/>
+                </a:solidFill>
+                <a:latin typeface="Consolas"/>
+              </a:defRPr>
+            </a:pPr>
+            <a:r>
+              <a:t>Cross-Dataset: All 3 datasets processed independently</a:t>
+            </a:r>
+          </a:p>
+          <a:p>
+            <a:pPr>
+              <a:spcAft>
+                <a:spcPts val="200"/>
+              </a:spcAft>
+              <a:defRPr sz="1100" b="0">
+                <a:solidFill>
+                  <a:srgbClr val="000000"/>
+                </a:solidFill>
+                <a:latin typeface="Consolas"/>
+              </a:defRPr>
+            </a:pPr>
+            <a:r>
+              <a:t>  Strategy: 3 pipeline instances run in parallel (no shared state)</a:t>
+            </a:r>
+          </a:p>
+          <a:p>
+            <a:pPr>
+              <a:spcAft>
+                <a:spcPts val="200"/>
+              </a:spcAft>
+              <a:defRPr sz="1100" b="0">
+                <a:solidFill>
+                  <a:srgbClr val="7F8C8D"/>
+                </a:solidFill>
+                <a:latin typeface="Consolas"/>
+              </a:defRPr>
+            </a:pPr>
+            <a:r>
+              <a:t>  Speedup: 3x wall-clock time reduction</a:t>
+            </a:r>
+          </a:p>
+        </p:txBody>
+      </p:sp>
+      <p:sp>
+        <p:nvSpPr>
+          <p:cNvPr id="5" name="TextBox 4"/>
+          <p:cNvSpPr txBox="1"/>
+          <p:nvPr/>
+        </p:nvSpPr>
+        <p:spPr>
+          <a:xfrm>
+            <a:off x="6400800" y="731520"/>
+            <a:ext cx="5486400" cy="365760"/>
+          </a:xfrm>
+          <a:prstGeom prst="rect">
+            <a:avLst/>
+          </a:prstGeom>
+          <a:noFill/>
+        </p:spPr>
+        <p:txBody>
+          <a:bodyPr wrap="square">
+            <a:spAutoFit/>
+          </a:bodyPr>
+          <a:lstStyle/>
+          <a:p>
+            <a:pPr algn="l">
+              <a:defRPr sz="1600" b="1">
+                <a:solidFill>
+                  <a:srgbClr val="C0392B"/>
+                </a:solidFill>
+                <a:latin typeface="Calibri"/>
+              </a:defRPr>
+            </a:pPr>
+            <a:r>
+              <a:t>⏸ Sequential Bottlenecks</a:t>
+            </a:r>
+          </a:p>
+        </p:txBody>
+      </p:sp>
+      <p:sp>
+        <p:nvSpPr>
+          <p:cNvPr id="6" name="TextBox 5"/>
+          <p:cNvSpPr txBox="1"/>
+          <p:nvPr/>
+        </p:nvSpPr>
+        <p:spPr>
+          <a:xfrm>
+            <a:off x="6400800" y="1097280"/>
+            <a:ext cx="5486400" cy="5029200"/>
+          </a:xfrm>
+          <a:prstGeom prst="rect">
+            <a:avLst/>
+          </a:prstGeom>
+          <a:noFill/>
+        </p:spPr>
+        <p:txBody>
+          <a:bodyPr wrap="square">
+            <a:spAutoFit/>
+          </a:bodyPr>
+          <a:lstStyle/>
+          <a:p>
+            <a:pPr>
+              <a:spcAft>
+                <a:spcPts val="200"/>
+              </a:spcAft>
+              <a:defRPr sz="1300" b="1">
+                <a:solidFill>
+                  <a:srgbClr val="C0392B"/>
+                </a:solidFill>
+                <a:latin typeface="Consolas"/>
+              </a:defRPr>
+            </a:pPr>
+            <a:r>
+              <a:t>Stage 2: Decision Tree Training</a:t>
+            </a:r>
+          </a:p>
+          <a:p>
+            <a:pPr>
+              <a:spcAft>
+                <a:spcPts val="200"/>
+              </a:spcAft>
+              <a:defRPr sz="1100" b="0">
+                <a:solidFill>
+                  <a:srgbClr val="000000"/>
+                </a:solidFill>
+                <a:latin typeface="Consolas"/>
+              </a:defRPr>
+            </a:pPr>
+            <a:r>
+              <a:t>  Reason: CART greedy splits are data-dependent</a:t>
+            </a:r>
+          </a:p>
+          <a:p>
+            <a:pPr>
+              <a:spcAft>
+                <a:spcPts val="200"/>
+              </a:spcAft>
+              <a:defRPr sz="1100" b="0">
+                <a:solidFill>
+                  <a:srgbClr val="000000"/>
+                </a:solidFill>
+                <a:latin typeface="Consolas"/>
+              </a:defRPr>
+            </a:pPr>
+            <a:r>
+              <a:t>  Each split depends on the partition from</a:t>
+            </a:r>
+          </a:p>
+          <a:p>
+            <a:pPr>
+              <a:spcAft>
+                <a:spcPts val="200"/>
+              </a:spcAft>
+              <a:defRPr sz="1100" b="0">
+                <a:solidFill>
+                  <a:srgbClr val="000000"/>
+                </a:solidFill>
+                <a:latin typeface="Consolas"/>
+              </a:defRPr>
+            </a:pPr>
+            <a:r>
+              <a:t>  the previous split (inherently sequential).</a:t>
+            </a:r>
+          </a:p>
+          <a:p>
+            <a:pPr>
+              <a:spcAft>
+                <a:spcPts val="200"/>
+              </a:spcAft>
+              <a:defRPr sz="1100" b="0">
+                <a:solidFill>
+                  <a:srgbClr val="7F8C8D"/>
+                </a:solidFill>
+                <a:latin typeface="Consolas"/>
+              </a:defRPr>
+            </a:pPr>
+            <a:r>
+              <a:t>  Impact: Low (tree depth=6, trains in &lt;1 second)</a:t>
+            </a:r>
+          </a:p>
+          <a:p>
+            <a:pPr>
+              <a:spcAft>
+                <a:spcPts val="200"/>
+              </a:spcAft>
+              <a:defRPr sz="400" b="0">
+                <a:solidFill>
+                  <a:srgbClr val="000000"/>
+                </a:solidFill>
+                <a:latin typeface="Consolas"/>
+              </a:defRPr>
+            </a:pPr>
+          </a:p>
+          <a:p>
+            <a:pPr>
+              <a:spcAft>
+                <a:spcPts val="200"/>
+              </a:spcAft>
+              <a:defRPr sz="1300" b="1">
+                <a:solidFill>
+                  <a:srgbClr val="C0392B"/>
+                </a:solidFill>
+                <a:latin typeface="Consolas"/>
+              </a:defRPr>
+            </a:pPr>
+            <a:r>
+              <a:t>Stage 4: Q-Learning Training (within episode)</a:t>
+            </a:r>
+          </a:p>
+          <a:p>
+            <a:pPr>
+              <a:spcAft>
+                <a:spcPts val="200"/>
+              </a:spcAft>
+              <a:defRPr sz="1100" b="0">
+                <a:solidFill>
+                  <a:srgbClr val="000000"/>
+                </a:solidFill>
+                <a:latin typeface="Consolas"/>
+              </a:defRPr>
+            </a:pPr>
+            <a:r>
+              <a:t>  Reason: Q-table updates are sequential</a:t>
+            </a:r>
+          </a:p>
+          <a:p>
+            <a:pPr>
+              <a:spcAft>
+                <a:spcPts val="200"/>
+              </a:spcAft>
+              <a:defRPr sz="1100" b="0">
+                <a:solidFill>
+                  <a:srgbClr val="000000"/>
+                </a:solidFill>
+                <a:latin typeface="Consolas"/>
+              </a:defRPr>
+            </a:pPr>
+            <a:r>
+              <a:t>  (each update depends on current Q-values).</a:t>
+            </a:r>
+          </a:p>
+          <a:p>
+            <a:pPr>
+              <a:spcAft>
+                <a:spcPts val="200"/>
+              </a:spcAft>
+              <a:defRPr sz="1100" b="0">
+                <a:solidFill>
+                  <a:srgbClr val="7F8C8D"/>
+                </a:solidFill>
+                <a:latin typeface="Consolas"/>
+              </a:defRPr>
+            </a:pPr>
+            <a:r>
+              <a:t>  Mitigation: Cross-dataset parallelism (3 Q-tables)</a:t>
+            </a:r>
+          </a:p>
+          <a:p>
+            <a:pPr>
+              <a:spcAft>
+                <a:spcPts val="200"/>
+              </a:spcAft>
+              <a:defRPr sz="400" b="0">
+                <a:solidFill>
+                  <a:srgbClr val="000000"/>
+                </a:solidFill>
+                <a:latin typeface="Consolas"/>
+              </a:defRPr>
+            </a:pPr>
+          </a:p>
+          <a:p>
+            <a:pPr>
+              <a:spcAft>
+                <a:spcPts val="200"/>
+              </a:spcAft>
+              <a:defRPr sz="1300" b="1">
+                <a:solidFill>
+                  <a:srgbClr val="C0392B"/>
+                </a:solidFill>
+                <a:latin typeface="Consolas"/>
+              </a:defRPr>
+            </a:pPr>
+            <a:r>
+              <a:t>Stage 5: DBSCAN Clustering</a:t>
+            </a:r>
+          </a:p>
+          <a:p>
+            <a:pPr>
+              <a:spcAft>
+                <a:spcPts val="200"/>
+              </a:spcAft>
+              <a:defRPr sz="1100" b="0">
+                <a:solidFill>
+                  <a:srgbClr val="000000"/>
+                </a:solidFill>
+                <a:latin typeface="Consolas"/>
+              </a:defRPr>
+            </a:pPr>
+            <a:r>
+              <a:t>  Reason: Core/border/noise classification is</a:t>
+            </a:r>
+          </a:p>
+          <a:p>
+            <a:pPr>
+              <a:spcAft>
+                <a:spcPts val="200"/>
+              </a:spcAft>
+              <a:defRPr sz="1100" b="0">
+                <a:solidFill>
+                  <a:srgbClr val="000000"/>
+                </a:solidFill>
+                <a:latin typeface="Consolas"/>
+              </a:defRPr>
+            </a:pPr>
+            <a:r>
+              <a:t>  sequential (neighbor queries depend on prior labels).</a:t>
+            </a:r>
+          </a:p>
+          <a:p>
+            <a:pPr>
+              <a:spcAft>
+                <a:spcPts val="200"/>
+              </a:spcAft>
+              <a:defRPr sz="1100" b="0">
+                <a:solidFill>
+                  <a:srgbClr val="7F8C8D"/>
+                </a:solidFill>
+                <a:latin typeface="Consolas"/>
+              </a:defRPr>
+            </a:pPr>
+            <a:r>
+              <a:t>  Impact: Low (runs on small subset: misclassified only)</a:t>
+            </a:r>
+          </a:p>
+          <a:p>
+            <a:pPr>
+              <a:spcAft>
+                <a:spcPts val="200"/>
+              </a:spcAft>
+              <a:defRPr sz="400" b="0">
+                <a:solidFill>
+                  <a:srgbClr val="000000"/>
+                </a:solidFill>
+                <a:latin typeface="Consolas"/>
+              </a:defRPr>
+            </a:pPr>
+          </a:p>
+          <a:p>
+            <a:pPr>
+              <a:spcAft>
+                <a:spcPts val="200"/>
+              </a:spcAft>
+              <a:defRPr sz="1300" b="1">
+                <a:solidFill>
+                  <a:srgbClr val="C0392B"/>
+                </a:solidFill>
+                <a:latin typeface="Consolas"/>
+              </a:defRPr>
+            </a:pPr>
+            <a:r>
+              <a:t>Stages 6-7: Buffer &amp; Threshold Adaptation</a:t>
+            </a:r>
+          </a:p>
+          <a:p>
+            <a:pPr>
+              <a:spcAft>
+                <a:spcPts val="200"/>
+              </a:spcAft>
+              <a:defRPr sz="1100" b="0">
+                <a:solidFill>
+                  <a:srgbClr val="000000"/>
+                </a:solidFill>
+                <a:latin typeface="Consolas"/>
+              </a:defRPr>
+            </a:pPr>
+            <a:r>
+              <a:t>  Reason: Temporal dependency — each window's state</a:t>
+            </a:r>
+          </a:p>
+          <a:p>
+            <a:pPr>
+              <a:spcAft>
+                <a:spcPts val="200"/>
+              </a:spcAft>
+              <a:defRPr sz="1100" b="0">
+                <a:solidFill>
+                  <a:srgbClr val="000000"/>
+                </a:solidFill>
+                <a:latin typeface="Consolas"/>
+              </a:defRPr>
+            </a:pPr>
+            <a:r>
+              <a:t>  depends on the previous window's EMA / buffer size.</a:t>
+            </a:r>
+          </a:p>
+          <a:p>
+            <a:pPr>
+              <a:spcAft>
+                <a:spcPts val="200"/>
+              </a:spcAft>
+              <a:defRPr sz="1100" b="0">
+                <a:solidFill>
+                  <a:srgbClr val="7F8C8D"/>
+                </a:solidFill>
+                <a:latin typeface="Consolas"/>
+              </a:defRPr>
+            </a:pPr>
+            <a:r>
+              <a:t>  Mitigation: Independent per-stream/per-sensor buffers</a:t>
+            </a:r>
+          </a:p>
+        </p:txBody>
+      </p:sp>
+      <p:sp>
+        <p:nvSpPr>
+          <p:cNvPr id="7" name="TextBox 6"/>
+          <p:cNvSpPr txBox="1"/>
+          <p:nvPr/>
+        </p:nvSpPr>
+        <p:spPr>
+          <a:xfrm>
+            <a:off x="274320" y="6217920"/>
+            <a:ext cx="11430000" cy="457200"/>
+          </a:xfrm>
+          <a:prstGeom prst="rect">
+            <a:avLst/>
+          </a:prstGeom>
+          <a:noFill/>
+        </p:spPr>
+        <p:txBody>
+          <a:bodyPr wrap="square">
+            <a:spAutoFit/>
+          </a:bodyPr>
+          <a:lstStyle/>
+          <a:p>
+            <a:pPr algn="ctr">
+              <a:defRPr sz="1200" b="1">
+                <a:solidFill>
+                  <a:srgbClr val="003C71"/>
+                </a:solidFill>
+                <a:latin typeface="Calibri"/>
+              </a:defRPr>
+            </a:pPr>
+            <a:r>
+              <a:t>Training Phase: Stages 0–5 (mostly sequential except Stage 0 &amp; 3)  |  Inference Phase: Stage 8 (fully parallel per flow)  |  Adaptation: Stages 6–7 (sequential per stream, parallel across streams)</a:t>
+            </a:r>
+          </a:p>
+        </p:txBody>
+      </p:sp>
+    </p:spTree>
+  </p:cSld>
+  <p:clrMapOvr>
+    <a:masterClrMapping/>
+  </p:clrMapOvr>
+</p:sld>
+</file>
+
+<file path=ppt/slides/slide14.xml><?xml version="1.0" encoding="utf-8"?>
+<p:sld xmlns:a="http://schemas.openxmlformats.org/drawingml/2006/main" xmlns:p="http://schemas.openxmlformats.org/presentationml/2006/main" xmlns:r="http://schemas.openxmlformats.org/officeDocument/2006/relationships">
+  <p:cSld>
+    <p:bg>
+      <p:bgPr>
+        <a:solidFill>
+          <a:srgbClr val="FFFFFF"/>
+        </a:solidFill>
+        <a:effectLst/>
+      </p:bgPr>
+    </p:bg>
+    <p:spTree>
+      <p:nvGrpSpPr>
+        <p:cNvPr id="1" name=""/>
+        <p:cNvGrpSpPr/>
+        <p:nvPr/>
+      </p:nvGrpSpPr>
+      <p:grpSpPr/>
+      <p:sp>
+        <p:nvSpPr>
+          <p:cNvPr id="2" name="TextBox 1"/>
+          <p:cNvSpPr txBox="1"/>
+          <p:nvPr/>
+        </p:nvSpPr>
+        <p:spPr>
+          <a:xfrm>
+            <a:off x="274320" y="137160"/>
+            <a:ext cx="11430000" cy="457200"/>
+          </a:xfrm>
+          <a:prstGeom prst="rect">
+            <a:avLst/>
+          </a:prstGeom>
+          <a:noFill/>
+        </p:spPr>
+        <p:txBody>
+          <a:bodyPr wrap="square">
+            <a:spAutoFit/>
+          </a:bodyPr>
+          <a:lstStyle/>
+          <a:p>
+            <a:pPr algn="ctr">
+              <a:defRPr sz="2600" b="1">
+                <a:solidFill>
+                  <a:srgbClr val="003C71"/>
+                </a:solidFill>
+                <a:latin typeface="Calibri"/>
+              </a:defRPr>
+            </a:pPr>
+            <a:r>
               <a:t>Experimental Results — ASRRL Dynamic vs. Static Baselines</a:t>
             </a:r>
           </a:p>
@@ -7912,7 +9411,7 @@
               </a:defRPr>
             </a:pPr>
             <a:r>
-              <a:t>dynamic adaptation (buffer+threshold), and zero-day detection that static classifiers lack.</a:t>
+              <a:t>dynamic adaptation (buffer+threshold), zero-day detection, and parallel inference scalability.</a:t>
             </a:r>
           </a:p>
         </p:txBody>
@@ -7951,7 +9450,7 @@
         </p:nvSpPr>
         <p:spPr>
           <a:xfrm>
-            <a:off x="457200" y="182880"/>
+            <a:off x="457200" y="137160"/>
             <a:ext cx="10972800" cy="548640"/>
           </a:xfrm>
           <a:prstGeom prst="rect">
@@ -7974,7 +9473,7 @@
               </a:defRPr>
             </a:pPr>
             <a:r>
-              <a:t>ASRRL Architecture — End-to-End Pipeline</a:t>
+              <a:t>ASRRL Architecture — 9-Stage Pipeline with Parallel Processing</a:t>
             </a:r>
           </a:p>
         </p:txBody>
@@ -7987,8 +9486,108 @@
         </p:nvSpPr>
         <p:spPr>
           <a:xfrm>
-            <a:off x="365760" y="1005840"/>
-            <a:ext cx="1234440" cy="777240"/>
+            <a:off x="228600" y="914400"/>
+            <a:ext cx="1691640" cy="777240"/>
+          </a:xfrm>
+          <a:prstGeom prst="roundRect">
+            <a:avLst/>
+          </a:prstGeom>
+          <a:solidFill>
+            <a:srgbClr val="7B4B2A"/>
+          </a:solidFill>
+          <a:ln>
+            <a:noFill/>
+          </a:ln>
+        </p:spPr>
+        <p:style>
+          <a:lnRef idx="1">
+            <a:schemeClr val="accent1"/>
+          </a:lnRef>
+          <a:fillRef idx="3">
+            <a:schemeClr val="accent1"/>
+          </a:fillRef>
+          <a:effectRef idx="2">
+            <a:schemeClr val="accent1"/>
+          </a:effectRef>
+          <a:fontRef idx="minor">
+            <a:schemeClr val="lt1"/>
+          </a:fontRef>
+        </p:style>
+        <p:txBody>
+          <a:bodyPr rtlCol="0" anchor="ctr" wrap="square"/>
+          <a:lstStyle/>
+          <a:p>
+            <a:pPr algn="ctr">
+              <a:defRPr sz="900" b="1">
+                <a:solidFill>
+                  <a:srgbClr val="FFFFFF"/>
+                </a:solidFill>
+                <a:latin typeface="Calibri"/>
+              </a:defRPr>
+            </a:pPr>
+            <a:r>
+              <a:t>0. PCAP Binary</a:t>
+            </a:r>
+            <a:br/>
+            <a:r>
+              <a:t>Preprocessing</a:t>
+            </a:r>
+          </a:p>
+        </p:txBody>
+      </p:sp>
+      <p:sp>
+        <p:nvSpPr>
+          <p:cNvPr id="4" name="Right Arrow 3"/>
+          <p:cNvSpPr/>
+          <p:nvPr/>
+        </p:nvSpPr>
+        <p:spPr>
+          <a:xfrm>
+            <a:off x="1929384" y="1143000"/>
+            <a:ext cx="173736" cy="320040"/>
+          </a:xfrm>
+          <a:prstGeom prst="rightArrow">
+            <a:avLst/>
+          </a:prstGeom>
+          <a:solidFill>
+            <a:srgbClr val="2980B9"/>
+          </a:solidFill>
+          <a:ln>
+            <a:noFill/>
+          </a:ln>
+        </p:spPr>
+        <p:style>
+          <a:lnRef idx="1">
+            <a:schemeClr val="accent1"/>
+          </a:lnRef>
+          <a:fillRef idx="3">
+            <a:schemeClr val="accent1"/>
+          </a:fillRef>
+          <a:effectRef idx="2">
+            <a:schemeClr val="accent1"/>
+          </a:effectRef>
+          <a:fontRef idx="minor">
+            <a:schemeClr val="lt1"/>
+          </a:fontRef>
+        </p:style>
+        <p:txBody>
+          <a:bodyPr rtlCol="0" anchor="ctr"/>
+          <a:lstStyle/>
+          <a:p>
+            <a:pPr algn="ctr"/>
+          </a:p>
+        </p:txBody>
+      </p:sp>
+      <p:sp>
+        <p:nvSpPr>
+          <p:cNvPr id="5" name="Rounded Rectangle 4"/>
+          <p:cNvSpPr/>
+          <p:nvPr/>
+        </p:nvSpPr>
+        <p:spPr>
+          <a:xfrm>
+            <a:off x="2121408" y="914400"/>
+            <a:ext cx="1691640" cy="777240"/>
           </a:xfrm>
           <a:prstGeom prst="roundRect">
             <a:avLst/>
@@ -8027,25 +9626,25 @@
               </a:defRPr>
             </a:pPr>
             <a:r>
-              <a:t>1. Data Ingestion</a:t>
+              <a:t>1. Feature Extract</a:t>
             </a:r>
             <a:br/>
             <a:r>
-              <a:t>&amp; Preprocessing</a:t>
+              <a:t>&amp; Normalization</a:t>
             </a:r>
           </a:p>
         </p:txBody>
       </p:sp>
       <p:sp>
         <p:nvSpPr>
-          <p:cNvPr id="4" name="Right Arrow 3"/>
+          <p:cNvPr id="6" name="Right Arrow 5"/>
           <p:cNvSpPr/>
           <p:nvPr/>
         </p:nvSpPr>
         <p:spPr>
           <a:xfrm>
-            <a:off x="1618488" y="1234440"/>
-            <a:ext cx="182880" cy="320040"/>
+            <a:off x="3822192" y="1143000"/>
+            <a:ext cx="173736" cy="320040"/>
           </a:xfrm>
           <a:prstGeom prst="rightArrow">
             <a:avLst/>
@@ -8081,14 +9680,14 @@
       </p:sp>
       <p:sp>
         <p:nvSpPr>
-          <p:cNvPr id="5" name="Rounded Rectangle 4"/>
+          <p:cNvPr id="7" name="Rounded Rectangle 6"/>
           <p:cNvSpPr/>
           <p:nvPr/>
         </p:nvSpPr>
         <p:spPr>
           <a:xfrm>
-            <a:off x="1828800" y="1005840"/>
-            <a:ext cx="1234440" cy="777240"/>
+            <a:off x="4014216" y="914400"/>
+            <a:ext cx="1691640" cy="777240"/>
           </a:xfrm>
           <a:prstGeom prst="roundRect">
             <a:avLst/>
@@ -8138,14 +9737,14 @@
       </p:sp>
       <p:sp>
         <p:nvSpPr>
-          <p:cNvPr id="6" name="Right Arrow 5"/>
+          <p:cNvPr id="8" name="Right Arrow 7"/>
           <p:cNvSpPr/>
           <p:nvPr/>
         </p:nvSpPr>
         <p:spPr>
           <a:xfrm>
-            <a:off x="3081528" y="1234440"/>
-            <a:ext cx="182880" cy="320040"/>
+            <a:off x="5715000" y="1143000"/>
+            <a:ext cx="173736" cy="320040"/>
           </a:xfrm>
           <a:prstGeom prst="rightArrow">
             <a:avLst/>
@@ -8181,14 +9780,14 @@
       </p:sp>
       <p:sp>
         <p:nvSpPr>
-          <p:cNvPr id="7" name="Rounded Rectangle 6"/>
+          <p:cNvPr id="9" name="Rounded Rectangle 8"/>
           <p:cNvSpPr/>
           <p:nvPr/>
         </p:nvSpPr>
         <p:spPr>
           <a:xfrm>
-            <a:off x="3291840" y="1005840"/>
-            <a:ext cx="1234440" cy="777240"/>
+            <a:off x="5907024" y="914400"/>
+            <a:ext cx="1691640" cy="777240"/>
           </a:xfrm>
           <a:prstGeom prst="roundRect">
             <a:avLst/>
@@ -8238,14 +9837,14 @@
       </p:sp>
       <p:sp>
         <p:nvSpPr>
-          <p:cNvPr id="8" name="Right Arrow 7"/>
+          <p:cNvPr id="10" name="Right Arrow 9"/>
           <p:cNvSpPr/>
           <p:nvPr/>
         </p:nvSpPr>
         <p:spPr>
           <a:xfrm>
-            <a:off x="4544568" y="1234440"/>
-            <a:ext cx="182880" cy="320040"/>
+            <a:off x="7607808" y="1143000"/>
+            <a:ext cx="173736" cy="320040"/>
           </a:xfrm>
           <a:prstGeom prst="rightArrow">
             <a:avLst/>
@@ -8281,14 +9880,14 @@
       </p:sp>
       <p:sp>
         <p:nvSpPr>
-          <p:cNvPr id="9" name="Rounded Rectangle 8"/>
+          <p:cNvPr id="11" name="Rounded Rectangle 10"/>
           <p:cNvSpPr/>
           <p:nvPr/>
         </p:nvSpPr>
         <p:spPr>
           <a:xfrm>
-            <a:off x="4754880" y="1005840"/>
-            <a:ext cx="1234440" cy="777240"/>
+            <a:off x="7799832" y="914400"/>
+            <a:ext cx="1691640" cy="777240"/>
           </a:xfrm>
           <a:prstGeom prst="roundRect">
             <a:avLst/>
@@ -8338,14 +9937,71 @@
       </p:sp>
       <p:sp>
         <p:nvSpPr>
-          <p:cNvPr id="10" name="Right Arrow 9"/>
+          <p:cNvPr id="12" name="Rounded Rectangle 11"/>
           <p:cNvSpPr/>
           <p:nvPr/>
         </p:nvSpPr>
         <p:spPr>
           <a:xfrm>
-            <a:off x="6007608" y="1234440"/>
-            <a:ext cx="182880" cy="320040"/>
+            <a:off x="2121408" y="1920240"/>
+            <a:ext cx="1691640" cy="777240"/>
+          </a:xfrm>
+          <a:prstGeom prst="roundRect">
+            <a:avLst/>
+          </a:prstGeom>
+          <a:solidFill>
+            <a:srgbClr val="C0392B"/>
+          </a:solidFill>
+          <a:ln>
+            <a:noFill/>
+          </a:ln>
+        </p:spPr>
+        <p:style>
+          <a:lnRef idx="1">
+            <a:schemeClr val="accent1"/>
+          </a:lnRef>
+          <a:fillRef idx="3">
+            <a:schemeClr val="accent1"/>
+          </a:fillRef>
+          <a:effectRef idx="2">
+            <a:schemeClr val="accent1"/>
+          </a:effectRef>
+          <a:fontRef idx="minor">
+            <a:schemeClr val="lt1"/>
+          </a:fontRef>
+        </p:style>
+        <p:txBody>
+          <a:bodyPr rtlCol="0" anchor="ctr" wrap="square"/>
+          <a:lstStyle/>
+          <a:p>
+            <a:pPr algn="ctr">
+              <a:defRPr sz="900" b="1">
+                <a:solidFill>
+                  <a:srgbClr val="FFFFFF"/>
+                </a:solidFill>
+                <a:latin typeface="Calibri"/>
+              </a:defRPr>
+            </a:pPr>
+            <a:r>
+              <a:t>5. DBSCAN Novel</a:t>
+            </a:r>
+            <a:br/>
+            <a:r>
+              <a:t>Pattern Detection</a:t>
+            </a:r>
+          </a:p>
+        </p:txBody>
+      </p:sp>
+      <p:sp>
+        <p:nvSpPr>
+          <p:cNvPr id="13" name="Right Arrow 12"/>
+          <p:cNvSpPr/>
+          <p:nvPr/>
+        </p:nvSpPr>
+        <p:spPr>
+          <a:xfrm>
+            <a:off x="3822192" y="2148840"/>
+            <a:ext cx="173736" cy="320040"/>
           </a:xfrm>
           <a:prstGeom prst="rightArrow">
             <a:avLst/>
@@ -8381,20 +10037,20 @@
       </p:sp>
       <p:sp>
         <p:nvSpPr>
-          <p:cNvPr id="11" name="Rounded Rectangle 10"/>
+          <p:cNvPr id="14" name="Rounded Rectangle 13"/>
           <p:cNvSpPr/>
           <p:nvPr/>
         </p:nvSpPr>
         <p:spPr>
           <a:xfrm>
-            <a:off x="6217920" y="1005840"/>
-            <a:ext cx="1234440" cy="777240"/>
+            <a:off x="4014216" y="1920240"/>
+            <a:ext cx="1691640" cy="777240"/>
           </a:xfrm>
           <a:prstGeom prst="roundRect">
             <a:avLst/>
           </a:prstGeom>
           <a:solidFill>
-            <a:srgbClr val="C0392B"/>
+            <a:srgbClr val="2980B9"/>
           </a:solidFill>
           <a:ln>
             <a:noFill/>
@@ -8427,25 +10083,25 @@
               </a:defRPr>
             </a:pPr>
             <a:r>
-              <a:t>5. DBSCAN Novel</a:t>
+              <a:t>6. Adaptive Buffer</a:t>
             </a:r>
             <a:br/>
             <a:r>
-              <a:t>Pattern Detection</a:t>
+              <a:t>Management</a:t>
             </a:r>
           </a:p>
         </p:txBody>
       </p:sp>
       <p:sp>
         <p:nvSpPr>
-          <p:cNvPr id="12" name="Right Arrow 11"/>
+          <p:cNvPr id="15" name="Right Arrow 14"/>
           <p:cNvSpPr/>
           <p:nvPr/>
         </p:nvSpPr>
         <p:spPr>
           <a:xfrm>
-            <a:off x="7470648" y="1234440"/>
-            <a:ext cx="182880" cy="320040"/>
+            <a:off x="5715000" y="2148840"/>
+            <a:ext cx="173736" cy="320040"/>
           </a:xfrm>
           <a:prstGeom prst="rightArrow">
             <a:avLst/>
@@ -8481,20 +10137,20 @@
       </p:sp>
       <p:sp>
         <p:nvSpPr>
-          <p:cNvPr id="13" name="Rounded Rectangle 12"/>
+          <p:cNvPr id="16" name="Rounded Rectangle 15"/>
           <p:cNvSpPr/>
           <p:nvPr/>
         </p:nvSpPr>
         <p:spPr>
           <a:xfrm>
-            <a:off x="7680960" y="1005840"/>
-            <a:ext cx="1234440" cy="777240"/>
+            <a:off x="5907024" y="1920240"/>
+            <a:ext cx="1691640" cy="777240"/>
           </a:xfrm>
           <a:prstGeom prst="roundRect">
             <a:avLst/>
           </a:prstGeom>
           <a:solidFill>
-            <a:srgbClr val="2980B9"/>
+            <a:srgbClr val="16A085"/>
           </a:solidFill>
           <a:ln>
             <a:noFill/>
@@ -8527,25 +10183,25 @@
               </a:defRPr>
             </a:pPr>
             <a:r>
-              <a:t>6. Adaptive Buffer</a:t>
+              <a:t>7. Dynamic Threshold</a:t>
             </a:r>
             <a:br/>
             <a:r>
-              <a:t>Management</a:t>
+              <a:t>Adaptation</a:t>
             </a:r>
           </a:p>
         </p:txBody>
       </p:sp>
       <p:sp>
         <p:nvSpPr>
-          <p:cNvPr id="14" name="Right Arrow 13"/>
+          <p:cNvPr id="17" name="Right Arrow 16"/>
           <p:cNvSpPr/>
           <p:nvPr/>
         </p:nvSpPr>
         <p:spPr>
           <a:xfrm>
-            <a:off x="8933688" y="1234440"/>
-            <a:ext cx="182880" cy="320040"/>
+            <a:off x="7607808" y="2148840"/>
+            <a:ext cx="173736" cy="320040"/>
           </a:xfrm>
           <a:prstGeom prst="rightArrow">
             <a:avLst/>
@@ -8581,114 +10237,14 @@
       </p:sp>
       <p:sp>
         <p:nvSpPr>
-          <p:cNvPr id="15" name="Rounded Rectangle 14"/>
+          <p:cNvPr id="18" name="Rounded Rectangle 17"/>
           <p:cNvSpPr/>
           <p:nvPr/>
         </p:nvSpPr>
         <p:spPr>
           <a:xfrm>
-            <a:off x="9144000" y="1005840"/>
-            <a:ext cx="1234440" cy="777240"/>
-          </a:xfrm>
-          <a:prstGeom prst="roundRect">
-            <a:avLst/>
-          </a:prstGeom>
-          <a:solidFill>
-            <a:srgbClr val="16A085"/>
-          </a:solidFill>
-          <a:ln>
-            <a:noFill/>
-          </a:ln>
-        </p:spPr>
-        <p:style>
-          <a:lnRef idx="1">
-            <a:schemeClr val="accent1"/>
-          </a:lnRef>
-          <a:fillRef idx="3">
-            <a:schemeClr val="accent1"/>
-          </a:fillRef>
-          <a:effectRef idx="2">
-            <a:schemeClr val="accent1"/>
-          </a:effectRef>
-          <a:fontRef idx="minor">
-            <a:schemeClr val="lt1"/>
-          </a:fontRef>
-        </p:style>
-        <p:txBody>
-          <a:bodyPr rtlCol="0" anchor="ctr" wrap="square"/>
-          <a:lstStyle/>
-          <a:p>
-            <a:pPr algn="ctr">
-              <a:defRPr sz="900" b="1">
-                <a:solidFill>
-                  <a:srgbClr val="FFFFFF"/>
-                </a:solidFill>
-                <a:latin typeface="Calibri"/>
-              </a:defRPr>
-            </a:pPr>
-            <a:r>
-              <a:t>7. Dynamic Threshold</a:t>
-            </a:r>
-            <a:br/>
-            <a:r>
-              <a:t>Adaptation</a:t>
-            </a:r>
-          </a:p>
-        </p:txBody>
-      </p:sp>
-      <p:sp>
-        <p:nvSpPr>
-          <p:cNvPr id="16" name="Right Arrow 15"/>
-          <p:cNvSpPr/>
-          <p:nvPr/>
-        </p:nvSpPr>
-        <p:spPr>
-          <a:xfrm>
-            <a:off x="10396728" y="1234440"/>
-            <a:ext cx="182880" cy="320040"/>
-          </a:xfrm>
-          <a:prstGeom prst="rightArrow">
-            <a:avLst/>
-          </a:prstGeom>
-          <a:solidFill>
-            <a:srgbClr val="2980B9"/>
-          </a:solidFill>
-          <a:ln>
-            <a:noFill/>
-          </a:ln>
-        </p:spPr>
-        <p:style>
-          <a:lnRef idx="1">
-            <a:schemeClr val="accent1"/>
-          </a:lnRef>
-          <a:fillRef idx="3">
-            <a:schemeClr val="accent1"/>
-          </a:fillRef>
-          <a:effectRef idx="2">
-            <a:schemeClr val="accent1"/>
-          </a:effectRef>
-          <a:fontRef idx="minor">
-            <a:schemeClr val="lt1"/>
-          </a:fontRef>
-        </p:style>
-        <p:txBody>
-          <a:bodyPr rtlCol="0" anchor="ctr"/>
-          <a:lstStyle/>
-          <a:p>
-            <a:pPr algn="ctr"/>
-          </a:p>
-        </p:txBody>
-      </p:sp>
-      <p:sp>
-        <p:nvSpPr>
-          <p:cNvPr id="17" name="Rounded Rectangle 16"/>
-          <p:cNvSpPr/>
-          <p:nvPr/>
-        </p:nvSpPr>
-        <p:spPr>
-          <a:xfrm>
-            <a:off x="10607040" y="1005840"/>
-            <a:ext cx="1234440" cy="777240"/>
+            <a:off x="7799832" y="1920240"/>
+            <a:ext cx="1691640" cy="777240"/>
           </a:xfrm>
           <a:prstGeom prst="roundRect">
             <a:avLst/>
@@ -8738,13 +10294,92 @@
       </p:sp>
       <p:sp>
         <p:nvSpPr>
-          <p:cNvPr id="18" name="TextBox 17"/>
+          <p:cNvPr id="19" name="Down Arrow 18"/>
+          <p:cNvSpPr/>
+          <p:nvPr/>
+        </p:nvSpPr>
+        <p:spPr>
+          <a:xfrm>
+            <a:off x="2875788" y="1709928"/>
+            <a:ext cx="182880" cy="201168"/>
+          </a:xfrm>
+          <a:prstGeom prst="downArrow">
+            <a:avLst/>
+          </a:prstGeom>
+          <a:solidFill>
+            <a:srgbClr val="2980B9"/>
+          </a:solidFill>
+          <a:ln>
+            <a:noFill/>
+          </a:ln>
+        </p:spPr>
+        <p:style>
+          <a:lnRef idx="1">
+            <a:schemeClr val="accent1"/>
+          </a:lnRef>
+          <a:fillRef idx="3">
+            <a:schemeClr val="accent1"/>
+          </a:fillRef>
+          <a:effectRef idx="2">
+            <a:schemeClr val="accent1"/>
+          </a:effectRef>
+          <a:fontRef idx="minor">
+            <a:schemeClr val="lt1"/>
+          </a:fontRef>
+        </p:style>
+        <p:txBody>
+          <a:bodyPr rtlCol="0" anchor="ctr"/>
+          <a:lstStyle/>
+          <a:p>
+            <a:pPr algn="ctr"/>
+          </a:p>
+        </p:txBody>
+      </p:sp>
+      <p:sp>
+        <p:nvSpPr>
+          <p:cNvPr id="20" name="TextBox 19"/>
           <p:cNvSpPr txBox="1"/>
           <p:nvPr/>
         </p:nvSpPr>
         <p:spPr>
           <a:xfrm>
-            <a:off x="274320" y="2011680"/>
+            <a:off x="182880" y="2880360"/>
+            <a:ext cx="11704320" cy="320040"/>
+          </a:xfrm>
+          <a:prstGeom prst="rect">
+            <a:avLst/>
+          </a:prstGeom>
+          <a:noFill/>
+        </p:spPr>
+        <p:txBody>
+          <a:bodyPr wrap="square">
+            <a:spAutoFit/>
+          </a:bodyPr>
+          <a:lstStyle/>
+          <a:p>
+            <a:pPr algn="ctr">
+              <a:defRPr sz="1200" b="1">
+                <a:solidFill>
+                  <a:srgbClr val="F39C12"/>
+                </a:solidFill>
+                <a:latin typeface="Calibri"/>
+              </a:defRPr>
+            </a:pPr>
+            <a:r>
+              <a:t>⚡ Parallel Processing Stages:  Stage 0 (per-PCAP)  |  Stage 3 (per-leaf path)  |  Stage 8 (per-flow)  |  Cross-dataset (all 3 datasets independently)</a:t>
+            </a:r>
+          </a:p>
+        </p:txBody>
+      </p:sp>
+      <p:sp>
+        <p:nvSpPr>
+          <p:cNvPr id="21" name="TextBox 20"/>
+          <p:cNvSpPr txBox="1"/>
+          <p:nvPr/>
+        </p:nvSpPr>
+        <p:spPr>
+          <a:xfrm>
+            <a:off x="274320" y="3291840"/>
             <a:ext cx="11430000" cy="365760"/>
           </a:xfrm>
           <a:prstGeom prst="rect">
@@ -8759,7 +10394,7 @@
           <a:lstStyle/>
           <a:p>
             <a:pPr algn="ctr">
-              <a:defRPr sz="1300" b="1">
+              <a:defRPr sz="1200" b="1">
                 <a:solidFill>
                   <a:srgbClr val="003C71"/>
                 </a:solidFill>
@@ -8774,13 +10409,13 @@
       </p:sp>
       <p:sp>
         <p:nvSpPr>
-          <p:cNvPr id="19" name="TextBox 18"/>
+          <p:cNvPr id="22" name="TextBox 21"/>
           <p:cNvSpPr txBox="1"/>
           <p:nvPr/>
         </p:nvSpPr>
         <p:spPr>
           <a:xfrm>
-            <a:off x="274320" y="2560320"/>
+            <a:off x="274320" y="3749039"/>
             <a:ext cx="11430000" cy="320040"/>
           </a:xfrm>
           <a:prstGeom prst="rect">
@@ -8795,7 +10430,7 @@
           <a:lstStyle/>
           <a:p>
             <a:pPr algn="l">
-              <a:defRPr sz="1500" b="1">
+              <a:defRPr sz="1400" b="1">
                 <a:solidFill>
                   <a:srgbClr val="003C71"/>
                 </a:solidFill>
@@ -8810,14 +10445,14 @@
       </p:sp>
       <p:sp>
         <p:nvSpPr>
-          <p:cNvPr id="20" name="TextBox 19"/>
+          <p:cNvPr id="23" name="TextBox 22"/>
           <p:cNvSpPr txBox="1"/>
           <p:nvPr/>
         </p:nvSpPr>
         <p:spPr>
           <a:xfrm>
-            <a:off x="365760" y="2926080"/>
-            <a:ext cx="11430000" cy="3657600"/>
+            <a:off x="365760" y="4114800"/>
+            <a:ext cx="11430000" cy="2743200"/>
           </a:xfrm>
           <a:prstGeom prst="rect">
             <a:avLst/>
@@ -8834,7 +10469,23 @@
               <a:spcAft>
                 <a:spcPts val="200"/>
               </a:spcAft>
-              <a:defRPr sz="1000" b="0">
+              <a:defRPr sz="900" b="0">
+                <a:solidFill>
+                  <a:srgbClr val="000000"/>
+                </a:solidFill>
+                <a:latin typeface="Consolas"/>
+              </a:defRPr>
+            </a:pPr>
+            <a:r>
+              <a:t>Stage 0:  Binary PCAP packets  →  CICFlowMeter/Argus  →  5-tuple flow aggregation  →  CSV (49–80+ columns per flow)</a:t>
+            </a:r>
+          </a:p>
+          <a:p>
+            <a:pPr>
+              <a:spcAft>
+                <a:spcPts val="200"/>
+              </a:spcAft>
+              <a:defRPr sz="900" b="0">
                 <a:solidFill>
                   <a:srgbClr val="000000"/>
                 </a:solidFill>
@@ -8850,7 +10501,7 @@
               <a:spcAft>
                 <a:spcPts val="200"/>
               </a:spcAft>
-              <a:defRPr sz="1000" b="0">
+              <a:defRPr sz="900" b="0">
                 <a:solidFill>
                   <a:srgbClr val="000000"/>
                 </a:solidFill>
@@ -8866,15 +10517,15 @@
               <a:spcAft>
                 <a:spcPts val="200"/>
               </a:spcAft>
-              <a:defRPr sz="1000" b="0">
-                <a:solidFill>
-                  <a:srgbClr val="000000"/>
-                </a:solidFill>
-                <a:latin typeface="Consolas"/>
-              </a:defRPr>
-            </a:pPr>
-            <a:r>
-              <a:t>Stage 3:  DT paths (root → leaf) → Z3 Implies(∧ (f_j op θ_j), action=class)  →  constraint set C = {φ_1,...,φ_L}</a:t>
+              <a:defRPr sz="900" b="0">
+                <a:solidFill>
+                  <a:srgbClr val="000000"/>
+                </a:solidFill>
+                <a:latin typeface="Consolas"/>
+              </a:defRPr>
+            </a:pPr>
+            <a:r>
+              <a:t>Stage 3:  DT paths (root → leaf) → Z3 Implies(∧ (f_j op θ_j), action=class)  →  constraint set C = {φ_1,...,φ_L}  [⚡ parallel per leaf]</a:t>
             </a:r>
           </a:p>
           <a:p>
@@ -8882,7 +10533,7 @@
               <a:spcAft>
                 <a:spcPts val="200"/>
               </a:spcAft>
-              <a:defRPr sz="1000" b="0">
+              <a:defRPr sz="900" b="0">
                 <a:solidFill>
                   <a:srgbClr val="000000"/>
                 </a:solidFill>
@@ -8898,7 +10549,7 @@
               <a:spcAft>
                 <a:spcPts val="200"/>
               </a:spcAft>
-              <a:defRPr sz="1000" b="0">
+              <a:defRPr sz="900" b="0">
                 <a:solidFill>
                   <a:srgbClr val="000000"/>
                 </a:solidFill>
@@ -8914,7 +10565,7 @@
               <a:spcAft>
                 <a:spcPts val="200"/>
               </a:spcAft>
-              <a:defRPr sz="1000" b="0">
+              <a:defRPr sz="900" b="0">
                 <a:solidFill>
                   <a:srgbClr val="000000"/>
                 </a:solidFill>
@@ -8930,7 +10581,7 @@
               <a:spcAft>
                 <a:spcPts val="200"/>
               </a:spcAft>
-              <a:defRPr sz="1000" b="0">
+              <a:defRPr sz="900" b="0">
                 <a:solidFill>
                   <a:srgbClr val="000000"/>
                 </a:solidFill>
@@ -8946,15 +10597,15 @@
               <a:spcAft>
                 <a:spcPts val="200"/>
               </a:spcAft>
-              <a:defRPr sz="1000" b="0">
-                <a:solidFill>
-                  <a:srgbClr val="000000"/>
-                </a:solidFill>
-                <a:latin typeface="Consolas"/>
-              </a:defRPr>
-            </a:pPr>
-            <a:r>
-              <a:t>Stage 8:  p_i ≥ τ → ATTACK;  p_i ≤ 1-τ → BENIGN;  else → RL+Z3 shield → ŷ_i ∈ {0,1}</a:t>
+              <a:defRPr sz="900" b="0">
+                <a:solidFill>
+                  <a:srgbClr val="000000"/>
+                </a:solidFill>
+                <a:latin typeface="Consolas"/>
+              </a:defRPr>
+            </a:pPr>
+            <a:r>
+              <a:t>Stage 8:  p_i ≥ τ → ATTACK;  p_i ≤ 1-τ → BENIGN;  else → RL+Z3 shield → ŷ_i ∈ {0,1}  [⚡ parallel per flow]</a:t>
             </a:r>
           </a:p>
         </p:txBody>
@@ -9161,6 +10812,51 @@
               <a:spcAft>
                 <a:spcPts val="200"/>
               </a:spcAft>
+              <a:defRPr sz="1000" b="1">
+                <a:solidFill>
+                  <a:srgbClr val="7B4B2A"/>
+                </a:solidFill>
+                <a:latin typeface="Consolas"/>
+              </a:defRPr>
+            </a:pPr>
+            <a:r>
+              <a:t>PCAP Source: IXIA PerfectStorm tool</a:t>
+            </a:r>
+          </a:p>
+          <a:p>
+            <a:pPr>
+              <a:spcAft>
+                <a:spcPts val="200"/>
+              </a:spcAft>
+              <a:defRPr sz="1000" b="1">
+                <a:solidFill>
+                  <a:srgbClr val="7B4B2A"/>
+                </a:solidFill>
+                <a:latin typeface="Consolas"/>
+              </a:defRPr>
+            </a:pPr>
+            <a:r>
+              <a:t>Flow Tool: Argus + Bro-IDS</a:t>
+            </a:r>
+          </a:p>
+          <a:p>
+            <a:pPr>
+              <a:spcAft>
+                <a:spcPts val="200"/>
+              </a:spcAft>
+              <a:defRPr sz="400" b="0">
+                <a:solidFill>
+                  <a:srgbClr val="000000"/>
+                </a:solidFill>
+                <a:latin typeface="Consolas"/>
+              </a:defRPr>
+            </a:pPr>
+          </a:p>
+          <a:p>
+            <a:pPr>
+              <a:spcAft>
+                <a:spcPts val="200"/>
+              </a:spcAft>
               <a:defRPr sz="1100" b="1">
                 <a:solidFill>
                   <a:srgbClr val="003C71"/>
@@ -9503,6 +11199,51 @@
               <a:spcAft>
                 <a:spcPts val="200"/>
               </a:spcAft>
+              <a:defRPr sz="1000" b="1">
+                <a:solidFill>
+                  <a:srgbClr val="7B4B2A"/>
+                </a:solidFill>
+                <a:latin typeface="Consolas"/>
+              </a:defRPr>
+            </a:pPr>
+            <a:r>
+              <a:t>PCAP Source: AWS infrastructure (10 days)</a:t>
+            </a:r>
+          </a:p>
+          <a:p>
+            <a:pPr>
+              <a:spcAft>
+                <a:spcPts val="200"/>
+              </a:spcAft>
+              <a:defRPr sz="1000" b="1">
+                <a:solidFill>
+                  <a:srgbClr val="7B4B2A"/>
+                </a:solidFill>
+                <a:latin typeface="Consolas"/>
+              </a:defRPr>
+            </a:pPr>
+            <a:r>
+              <a:t>Flow Tool: CICFlowMeter</a:t>
+            </a:r>
+          </a:p>
+          <a:p>
+            <a:pPr>
+              <a:spcAft>
+                <a:spcPts val="200"/>
+              </a:spcAft>
+              <a:defRPr sz="400" b="0">
+                <a:solidFill>
+                  <a:srgbClr val="000000"/>
+                </a:solidFill>
+                <a:latin typeface="Consolas"/>
+              </a:defRPr>
+            </a:pPr>
+          </a:p>
+          <a:p>
+            <a:pPr>
+              <a:spcAft>
+                <a:spcPts val="200"/>
+              </a:spcAft>
               <a:defRPr sz="1100" b="1">
                 <a:solidFill>
                   <a:srgbClr val="003C71"/>
@@ -9845,6 +11586,51 @@
               <a:spcAft>
                 <a:spcPts val="200"/>
               </a:spcAft>
+              <a:defRPr sz="1000" b="1">
+                <a:solidFill>
+                  <a:srgbClr val="7B4B2A"/>
+                </a:solidFill>
+                <a:latin typeface="Consolas"/>
+              </a:defRPr>
+            </a:pPr>
+            <a:r>
+              <a:t>PCAP Source: CIC lab network (5 days)</a:t>
+            </a:r>
+          </a:p>
+          <a:p>
+            <a:pPr>
+              <a:spcAft>
+                <a:spcPts val="200"/>
+              </a:spcAft>
+              <a:defRPr sz="1000" b="1">
+                <a:solidFill>
+                  <a:srgbClr val="7B4B2A"/>
+                </a:solidFill>
+                <a:latin typeface="Consolas"/>
+              </a:defRPr>
+            </a:pPr>
+            <a:r>
+              <a:t>Flow Tool: CICFlowMeter</a:t>
+            </a:r>
+          </a:p>
+          <a:p>
+            <a:pPr>
+              <a:spcAft>
+                <a:spcPts val="200"/>
+              </a:spcAft>
+              <a:defRPr sz="400" b="0">
+                <a:solidFill>
+                  <a:srgbClr val="000000"/>
+                </a:solidFill>
+                <a:latin typeface="Consolas"/>
+              </a:defRPr>
+            </a:pPr>
+          </a:p>
+          <a:p>
+            <a:pPr>
+              <a:spcAft>
+                <a:spcPts val="200"/>
+              </a:spcAft>
               <a:defRPr sz="1100" b="1">
                 <a:solidFill>
                   <a:srgbClr val="003C71"/>
@@ -10134,13 +11920,1253 @@
             <a:pPr algn="l">
               <a:defRPr sz="2400" b="1">
                 <a:solidFill>
+                  <a:srgbClr val="7B4B2A"/>
+                </a:solidFill>
+                <a:latin typeface="Calibri"/>
+              </a:defRPr>
+            </a:pPr>
+            <a:r>
+              <a:t>Stage 0: PCAP Binary Preprocessing &amp; Flow Aggregation  [⚡ Parallelizable]</a:t>
+            </a:r>
+          </a:p>
+        </p:txBody>
+      </p:sp>
+      <p:sp>
+        <p:nvSpPr>
+          <p:cNvPr id="3" name="Rectangle 2"/>
+          <p:cNvSpPr/>
+          <p:nvPr/>
+        </p:nvSpPr>
+        <p:spPr>
+          <a:xfrm>
+            <a:off x="274320" y="640080"/>
+            <a:ext cx="7132320" cy="5303520"/>
+          </a:xfrm>
+          <a:prstGeom prst="rect">
+            <a:avLst/>
+          </a:prstGeom>
+          <a:solidFill>
+            <a:srgbClr val="F7F9FB"/>
+          </a:solidFill>
+          <a:ln w="19050">
+            <a:solidFill>
+              <a:srgbClr val="34495E"/>
+            </a:solidFill>
+          </a:ln>
+        </p:spPr>
+        <p:style>
+          <a:lnRef idx="1">
+            <a:schemeClr val="accent1"/>
+          </a:lnRef>
+          <a:fillRef idx="3">
+            <a:schemeClr val="accent1"/>
+          </a:fillRef>
+          <a:effectRef idx="2">
+            <a:schemeClr val="accent1"/>
+          </a:effectRef>
+          <a:fontRef idx="minor">
+            <a:schemeClr val="lt1"/>
+          </a:fontRef>
+        </p:style>
+        <p:txBody>
+          <a:bodyPr rtlCol="0" anchor="ctr"/>
+          <a:lstStyle/>
+          <a:p>
+            <a:pPr algn="ctr"/>
+          </a:p>
+        </p:txBody>
+      </p:sp>
+      <p:sp>
+        <p:nvSpPr>
+          <p:cNvPr id="4" name="TextBox 3"/>
+          <p:cNvSpPr txBox="1"/>
+          <p:nvPr/>
+        </p:nvSpPr>
+        <p:spPr>
+          <a:xfrm>
+            <a:off x="411480" y="685800"/>
+            <a:ext cx="6858000" cy="5212080"/>
+          </a:xfrm>
+          <a:prstGeom prst="rect">
+            <a:avLst/>
+          </a:prstGeom>
+          <a:noFill/>
+        </p:spPr>
+        <p:txBody>
+          <a:bodyPr wrap="square">
+            <a:spAutoFit/>
+          </a:bodyPr>
+          <a:lstStyle/>
+          <a:p>
+            <a:pPr>
+              <a:spcAft>
+                <a:spcPts val="300"/>
+              </a:spcAft>
+            </a:pPr>
+            <a:r>
+              <a:rPr sz="1200" b="1" i="1">
+                <a:solidFill>
+                  <a:srgbClr val="000000"/>
+                </a:solidFill>
+                <a:latin typeface="Times New Roman"/>
+              </a:rPr>
+              <a:t>Algorithm 1: </a:t>
+            </a:r>
+            <a:r>
+              <a:rPr sz="1200" b="1">
+                <a:solidFill>
+                  <a:srgbClr val="000000"/>
+                </a:solidFill>
+                <a:latin typeface="Times New Roman"/>
+              </a:rPr>
+              <a:t>PCAP Binary Preprocessing &amp; Flow Aggregation</a:t>
+            </a:r>
+          </a:p>
+          <a:p>
+            <a:pPr>
+              <a:spcBef>
+                <a:spcPts val="0"/>
+              </a:spcBef>
+              <a:spcAft>
+                <a:spcPts val="100"/>
+              </a:spcAft>
+            </a:pPr>
+            <a:r>
+              <a:rPr sz="1000" b="1">
+                <a:solidFill>
+                  <a:srgbClr val="000000"/>
+                </a:solidFill>
+                <a:latin typeface="Times New Roman"/>
+              </a:rPr>
+              <a:t>Require:</a:t>
+            </a:r>
+            <a:r>
+              <a:rPr sz="1000" b="0">
+                <a:solidFill>
+                  <a:srgbClr val="000000"/>
+                </a:solidFill>
+                <a:latin typeface="Times New Roman"/>
+              </a:rPr>
+              <a:t> Raw binary PCAP file(s) P = {p_1, ..., p_N}</a:t>
+            </a:r>
+          </a:p>
+          <a:p>
+            <a:pPr>
+              <a:spcBef>
+                <a:spcPts val="0"/>
+              </a:spcBef>
+              <a:spcAft>
+                <a:spcPts val="100"/>
+              </a:spcAft>
+            </a:pPr>
+            <a:r>
+              <a:rPr sz="1000" b="1">
+                <a:solidFill>
+                  <a:srgbClr val="000000"/>
+                </a:solidFill>
+                <a:latin typeface="Times New Roman"/>
+              </a:rPr>
+              <a:t>Ensure:</a:t>
+            </a:r>
+            <a:r>
+              <a:rPr sz="1000" b="0">
+                <a:solidFill>
+                  <a:srgbClr val="000000"/>
+                </a:solidFill>
+                <a:latin typeface="Times New Roman"/>
+              </a:rPr>
+              <a:t> Flow-level CSV with F features per flow (F=49 for UNSW, F=80+ for CIC)</a:t>
+            </a:r>
+          </a:p>
+          <a:p>
+            <a:pPr>
+              <a:spcBef>
+                <a:spcPts val="0"/>
+              </a:spcBef>
+              <a:spcAft>
+                <a:spcPts val="100"/>
+              </a:spcAft>
+            </a:pPr>
+            <a:r>
+              <a:rPr sz="1000" b="0">
+                <a:solidFill>
+                  <a:srgbClr val="7F8C8D"/>
+                </a:solidFill>
+                <a:latin typeface="Consolas"/>
+              </a:rPr>
+              <a:t> 1:  </a:t>
+            </a:r>
+            <a:r>
+              <a:rPr sz="1000" b="1">
+                <a:solidFill>
+                  <a:srgbClr val="000000"/>
+                </a:solidFill>
+                <a:latin typeface="Times New Roman"/>
+              </a:rPr>
+              <a:t>for </a:t>
+            </a:r>
+            <a:r>
+              <a:rPr sz="1000" b="0">
+                <a:solidFill>
+                  <a:srgbClr val="000000"/>
+                </a:solidFill>
+                <a:latin typeface="Times New Roman"/>
+              </a:rPr>
+              <a:t>each PCAP file p_k ∈ P </a:t>
+            </a:r>
+            <a:r>
+              <a:rPr sz="1000" b="1">
+                <a:solidFill>
+                  <a:srgbClr val="000000"/>
+                </a:solidFill>
+                <a:latin typeface="Times New Roman"/>
+              </a:rPr>
+              <a:t>do</a:t>
+            </a:r>
+            <a:r>
+              <a:rPr sz="1000" b="0">
+                <a:solidFill>
+                  <a:srgbClr val="000000"/>
+                </a:solidFill>
+                <a:latin typeface="Times New Roman"/>
+              </a:rPr>
+              <a:t>  // ⚡ parallelizable per file</a:t>
+            </a:r>
+          </a:p>
+          <a:p>
+            <a:pPr>
+              <a:spcBef>
+                <a:spcPts val="0"/>
+              </a:spcBef>
+              <a:spcAft>
+                <a:spcPts val="100"/>
+              </a:spcAft>
+            </a:pPr>
+            <a:r>
+              <a:rPr sz="1000" b="0">
+                <a:solidFill>
+                  <a:srgbClr val="7F8C8D"/>
+                </a:solidFill>
+                <a:latin typeface="Consolas"/>
+              </a:rPr>
+              <a:t> 2:      </a:t>
+            </a:r>
+            <a:r>
+              <a:rPr sz="1000" b="1">
+                <a:solidFill>
+                  <a:srgbClr val="000000"/>
+                </a:solidFill>
+                <a:latin typeface="Times New Roman"/>
+              </a:rPr>
+              <a:t>for </a:t>
+            </a:r>
+            <a:r>
+              <a:rPr sz="1000" b="0">
+                <a:solidFill>
+                  <a:srgbClr val="000000"/>
+                </a:solidFill>
+                <a:latin typeface="Times New Roman"/>
+              </a:rPr>
+              <a:t>each raw packet pkt ∈ p_k </a:t>
+            </a:r>
+            <a:r>
+              <a:rPr sz="1000" b="1">
+                <a:solidFill>
+                  <a:srgbClr val="000000"/>
+                </a:solidFill>
+                <a:latin typeface="Times New Roman"/>
+              </a:rPr>
+              <a:t>do</a:t>
+            </a:r>
+          </a:p>
+          <a:p>
+            <a:pPr>
+              <a:spcBef>
+                <a:spcPts val="0"/>
+              </a:spcBef>
+              <a:spcAft>
+                <a:spcPts val="100"/>
+              </a:spcAft>
+            </a:pPr>
+            <a:r>
+              <a:rPr sz="1000" b="0">
+                <a:solidFill>
+                  <a:srgbClr val="7F8C8D"/>
+                </a:solidFill>
+                <a:latin typeface="Consolas"/>
+              </a:rPr>
+              <a:t> 3:          </a:t>
+            </a:r>
+            <a:r>
+              <a:rPr sz="1000" b="0">
+                <a:solidFill>
+                  <a:srgbClr val="000000"/>
+                </a:solidFill>
+                <a:latin typeface="Times New Roman"/>
+              </a:rPr>
+              <a:t>Parse binary headers: Ethernet → IP → TCP/UDP/ICMP</a:t>
+            </a:r>
+          </a:p>
+          <a:p>
+            <a:pPr>
+              <a:spcBef>
+                <a:spcPts val="0"/>
+              </a:spcBef>
+              <a:spcAft>
+                <a:spcPts val="100"/>
+              </a:spcAft>
+            </a:pPr>
+            <a:r>
+              <a:rPr sz="1000" b="0">
+                <a:solidFill>
+                  <a:srgbClr val="7F8C8D"/>
+                </a:solidFill>
+                <a:latin typeface="Consolas"/>
+              </a:rPr>
+              <a:t> 4:          </a:t>
+            </a:r>
+            <a:r>
+              <a:rPr sz="1000" b="0">
+                <a:solidFill>
+                  <a:srgbClr val="000000"/>
+                </a:solidFill>
+                <a:latin typeface="Times New Roman"/>
+              </a:rPr>
+              <a:t>Extract 5-tuple: key ← (src_ip, dst_ip, src_port, dst_port, proto)</a:t>
+            </a:r>
+          </a:p>
+          <a:p>
+            <a:pPr>
+              <a:spcBef>
+                <a:spcPts val="0"/>
+              </a:spcBef>
+              <a:spcAft>
+                <a:spcPts val="100"/>
+              </a:spcAft>
+            </a:pPr>
+            <a:r>
+              <a:rPr sz="1000" b="0">
+                <a:solidFill>
+                  <a:srgbClr val="7F8C8D"/>
+                </a:solidFill>
+                <a:latin typeface="Consolas"/>
+              </a:rPr>
+              <a:t> 5:          </a:t>
+            </a:r>
+            <a:r>
+              <a:rPr sz="1000" b="1">
+                <a:solidFill>
+                  <a:srgbClr val="000000"/>
+                </a:solidFill>
+                <a:latin typeface="Times New Roman"/>
+              </a:rPr>
+              <a:t>if </a:t>
+            </a:r>
+            <a:r>
+              <a:rPr sz="1000" b="0">
+                <a:solidFill>
+                  <a:srgbClr val="000000"/>
+                </a:solidFill>
+                <a:latin typeface="Times New Roman"/>
+              </a:rPr>
+              <a:t>key ∈ active_flows </a:t>
+            </a:r>
+            <a:r>
+              <a:rPr sz="1000" b="1">
+                <a:solidFill>
+                  <a:srgbClr val="000000"/>
+                </a:solidFill>
+                <a:latin typeface="Times New Roman"/>
+              </a:rPr>
+              <a:t>then</a:t>
+            </a:r>
+          </a:p>
+          <a:p>
+            <a:pPr>
+              <a:spcBef>
+                <a:spcPts val="0"/>
+              </a:spcBef>
+              <a:spcAft>
+                <a:spcPts val="100"/>
+              </a:spcAft>
+            </a:pPr>
+            <a:r>
+              <a:rPr sz="1000" b="0">
+                <a:solidFill>
+                  <a:srgbClr val="7F8C8D"/>
+                </a:solidFill>
+                <a:latin typeface="Consolas"/>
+              </a:rPr>
+              <a:t> 6:              </a:t>
+            </a:r>
+            <a:r>
+              <a:rPr sz="1000" b="0">
+                <a:solidFill>
+                  <a:srgbClr val="000000"/>
+                </a:solidFill>
+                <a:latin typeface="Times New Roman"/>
+              </a:rPr>
+              <a:t>active_flows[key].append(pkt)  // add to existing flow</a:t>
+            </a:r>
+          </a:p>
+          <a:p>
+            <a:pPr>
+              <a:spcBef>
+                <a:spcPts val="0"/>
+              </a:spcBef>
+              <a:spcAft>
+                <a:spcPts val="100"/>
+              </a:spcAft>
+            </a:pPr>
+            <a:r>
+              <a:rPr sz="1000" b="0">
+                <a:solidFill>
+                  <a:srgbClr val="7F8C8D"/>
+                </a:solidFill>
+                <a:latin typeface="Consolas"/>
+              </a:rPr>
+              <a:t> 7:          </a:t>
+            </a:r>
+            <a:r>
+              <a:rPr sz="1000" b="1">
+                <a:solidFill>
+                  <a:srgbClr val="000000"/>
+                </a:solidFill>
+                <a:latin typeface="Times New Roman"/>
+              </a:rPr>
+              <a:t>else</a:t>
+            </a:r>
+          </a:p>
+          <a:p>
+            <a:pPr>
+              <a:spcBef>
+                <a:spcPts val="0"/>
+              </a:spcBef>
+              <a:spcAft>
+                <a:spcPts val="100"/>
+              </a:spcAft>
+            </a:pPr>
+            <a:r>
+              <a:rPr sz="1000" b="0">
+                <a:solidFill>
+                  <a:srgbClr val="7F8C8D"/>
+                </a:solidFill>
+                <a:latin typeface="Consolas"/>
+              </a:rPr>
+              <a:t> 8:              </a:t>
+            </a:r>
+            <a:r>
+              <a:rPr sz="1000" b="0">
+                <a:solidFill>
+                  <a:srgbClr val="000000"/>
+                </a:solidFill>
+                <a:latin typeface="Times New Roman"/>
+              </a:rPr>
+              <a:t>active_flows[key] ← new_flow(pkt)  // start new flow</a:t>
+            </a:r>
+          </a:p>
+          <a:p>
+            <a:pPr>
+              <a:spcBef>
+                <a:spcPts val="0"/>
+              </a:spcBef>
+              <a:spcAft>
+                <a:spcPts val="100"/>
+              </a:spcAft>
+            </a:pPr>
+            <a:r>
+              <a:rPr sz="1000" b="0">
+                <a:solidFill>
+                  <a:srgbClr val="7F8C8D"/>
+                </a:solidFill>
+                <a:latin typeface="Consolas"/>
+              </a:rPr>
+              <a:t> 9:          </a:t>
+            </a:r>
+            <a:r>
+              <a:rPr sz="1000" b="1">
+                <a:solidFill>
+                  <a:srgbClr val="000000"/>
+                </a:solidFill>
+                <a:latin typeface="Times New Roman"/>
+              </a:rPr>
+              <a:t>end if</a:t>
+            </a:r>
+          </a:p>
+          <a:p>
+            <a:pPr>
+              <a:spcBef>
+                <a:spcPts val="0"/>
+              </a:spcBef>
+              <a:spcAft>
+                <a:spcPts val="100"/>
+              </a:spcAft>
+            </a:pPr>
+            <a:r>
+              <a:rPr sz="1000" b="0">
+                <a:solidFill>
+                  <a:srgbClr val="7F8C8D"/>
+                </a:solidFill>
+                <a:latin typeface="Consolas"/>
+              </a:rPr>
+              <a:t>10:      </a:t>
+            </a:r>
+            <a:r>
+              <a:rPr sz="1000" b="1">
+                <a:solidFill>
+                  <a:srgbClr val="000000"/>
+                </a:solidFill>
+                <a:latin typeface="Times New Roman"/>
+              </a:rPr>
+              <a:t>end for</a:t>
+            </a:r>
+          </a:p>
+          <a:p>
+            <a:pPr>
+              <a:spcBef>
+                <a:spcPts val="0"/>
+              </a:spcBef>
+              <a:spcAft>
+                <a:spcPts val="100"/>
+              </a:spcAft>
+            </a:pPr>
+            <a:r>
+              <a:rPr sz="1000" b="0">
+                <a:solidFill>
+                  <a:srgbClr val="7F8C8D"/>
+                </a:solidFill>
+                <a:latin typeface="Consolas"/>
+              </a:rPr>
+              <a:t>11:      </a:t>
+            </a:r>
+            <a:r>
+              <a:rPr sz="1000" b="1">
+                <a:solidFill>
+                  <a:srgbClr val="000000"/>
+                </a:solidFill>
+                <a:latin typeface="Times New Roman"/>
+              </a:rPr>
+              <a:t>for </a:t>
+            </a:r>
+            <a:r>
+              <a:rPr sz="1000" b="0">
+                <a:solidFill>
+                  <a:srgbClr val="000000"/>
+                </a:solidFill>
+                <a:latin typeface="Times New Roman"/>
+              </a:rPr>
+              <a:t>each flow f ∈ active_flows </a:t>
+            </a:r>
+            <a:r>
+              <a:rPr sz="1000" b="1">
+                <a:solidFill>
+                  <a:srgbClr val="000000"/>
+                </a:solidFill>
+                <a:latin typeface="Times New Roman"/>
+              </a:rPr>
+              <a:t>do</a:t>
+            </a:r>
+          </a:p>
+          <a:p>
+            <a:pPr>
+              <a:spcBef>
+                <a:spcPts val="0"/>
+              </a:spcBef>
+              <a:spcAft>
+                <a:spcPts val="100"/>
+              </a:spcAft>
+            </a:pPr>
+            <a:r>
+              <a:rPr sz="1000" b="0">
+                <a:solidFill>
+                  <a:srgbClr val="7F8C8D"/>
+                </a:solidFill>
+                <a:latin typeface="Consolas"/>
+              </a:rPr>
+              <a:t>12:          </a:t>
+            </a:r>
+            <a:r>
+              <a:rPr sz="1000" b="1">
+                <a:solidFill>
+                  <a:srgbClr val="000000"/>
+                </a:solidFill>
+                <a:latin typeface="Times New Roman"/>
+              </a:rPr>
+              <a:t>if </a:t>
+            </a:r>
+            <a:r>
+              <a:rPr sz="1000" b="0">
+                <a:solidFill>
+                  <a:srgbClr val="000000"/>
+                </a:solidFill>
+                <a:latin typeface="Times New Roman"/>
+              </a:rPr>
+              <a:t>idle_time(f) &gt; T_idle or active_time(f) &gt; T_active </a:t>
+            </a:r>
+            <a:r>
+              <a:rPr sz="1000" b="1">
+                <a:solidFill>
+                  <a:srgbClr val="000000"/>
+                </a:solidFill>
+                <a:latin typeface="Times New Roman"/>
+              </a:rPr>
+              <a:t>then</a:t>
+            </a:r>
+          </a:p>
+          <a:p>
+            <a:pPr>
+              <a:spcBef>
+                <a:spcPts val="0"/>
+              </a:spcBef>
+              <a:spcAft>
+                <a:spcPts val="100"/>
+              </a:spcAft>
+            </a:pPr>
+            <a:r>
+              <a:rPr sz="1000" b="0">
+                <a:solidFill>
+                  <a:srgbClr val="7F8C8D"/>
+                </a:solidFill>
+                <a:latin typeface="Consolas"/>
+              </a:rPr>
+              <a:t>13:              </a:t>
+            </a:r>
+            <a:r>
+              <a:rPr sz="1000" b="0">
+                <a:solidFill>
+                  <a:srgbClr val="000000"/>
+                </a:solidFill>
+                <a:latin typeface="Times New Roman"/>
+              </a:rPr>
+              <a:t>Terminate flow and compute statistical features:</a:t>
+            </a:r>
+          </a:p>
+          <a:p>
+            <a:pPr>
+              <a:spcBef>
+                <a:spcPts val="0"/>
+              </a:spcBef>
+              <a:spcAft>
+                <a:spcPts val="100"/>
+              </a:spcAft>
+            </a:pPr>
+            <a:r>
+              <a:rPr sz="1000" b="0">
+                <a:solidFill>
+                  <a:srgbClr val="7F8C8D"/>
+                </a:solidFill>
+                <a:latin typeface="Consolas"/>
+              </a:rPr>
+              <a:t>14:              </a:t>
+            </a:r>
+            <a:r>
+              <a:rPr sz="1000" b="0">
+                <a:solidFill>
+                  <a:srgbClr val="000000"/>
+                </a:solidFill>
+                <a:latin typeface="Times New Roman"/>
+              </a:rPr>
+              <a:t>  duration, pkt_count, byte_count, pkt_rate, byte_rate,</a:t>
+            </a:r>
+          </a:p>
+          <a:p>
+            <a:pPr>
+              <a:spcBef>
+                <a:spcPts val="0"/>
+              </a:spcBef>
+              <a:spcAft>
+                <a:spcPts val="100"/>
+              </a:spcAft>
+            </a:pPr>
+            <a:r>
+              <a:rPr sz="1000" b="0">
+                <a:solidFill>
+                  <a:srgbClr val="7F8C8D"/>
+                </a:solidFill>
+                <a:latin typeface="Consolas"/>
+              </a:rPr>
+              <a:t>15:              </a:t>
+            </a:r>
+            <a:r>
+              <a:rPr sz="1000" b="0">
+                <a:solidFill>
+                  <a:srgbClr val="000000"/>
+                </a:solidFill>
+                <a:latin typeface="Times New Roman"/>
+              </a:rPr>
+              <a:t>  fwd/bwd ratios, IAT stats (mean, std, min, max),</a:t>
+            </a:r>
+          </a:p>
+          <a:p>
+            <a:pPr>
+              <a:spcBef>
+                <a:spcPts val="0"/>
+              </a:spcBef>
+              <a:spcAft>
+                <a:spcPts val="100"/>
+              </a:spcAft>
+            </a:pPr>
+            <a:r>
+              <a:rPr sz="1000" b="0">
+                <a:solidFill>
+                  <a:srgbClr val="7F8C8D"/>
+                </a:solidFill>
+                <a:latin typeface="Consolas"/>
+              </a:rPr>
+              <a:t>16:              </a:t>
+            </a:r>
+            <a:r>
+              <a:rPr sz="1000" b="0">
+                <a:solidFill>
+                  <a:srgbClr val="000000"/>
+                </a:solidFill>
+                <a:latin typeface="Times New Roman"/>
+              </a:rPr>
+              <a:t>  TCP flags, payload size stats, ...</a:t>
+            </a:r>
+          </a:p>
+          <a:p>
+            <a:pPr>
+              <a:spcBef>
+                <a:spcPts val="0"/>
+              </a:spcBef>
+              <a:spcAft>
+                <a:spcPts val="100"/>
+              </a:spcAft>
+            </a:pPr>
+            <a:r>
+              <a:rPr sz="1000" b="0">
+                <a:solidFill>
+                  <a:srgbClr val="7F8C8D"/>
+                </a:solidFill>
+                <a:latin typeface="Consolas"/>
+              </a:rPr>
+              <a:t>17:          </a:t>
+            </a:r>
+            <a:r>
+              <a:rPr sz="1000" b="1">
+                <a:solidFill>
+                  <a:srgbClr val="000000"/>
+                </a:solidFill>
+                <a:latin typeface="Times New Roman"/>
+              </a:rPr>
+              <a:t>end if</a:t>
+            </a:r>
+          </a:p>
+          <a:p>
+            <a:pPr>
+              <a:spcBef>
+                <a:spcPts val="0"/>
+              </a:spcBef>
+              <a:spcAft>
+                <a:spcPts val="100"/>
+              </a:spcAft>
+            </a:pPr>
+            <a:r>
+              <a:rPr sz="1000" b="0">
+                <a:solidFill>
+                  <a:srgbClr val="7F8C8D"/>
+                </a:solidFill>
+                <a:latin typeface="Consolas"/>
+              </a:rPr>
+              <a:t>18:      </a:t>
+            </a:r>
+            <a:r>
+              <a:rPr sz="1000" b="1">
+                <a:solidFill>
+                  <a:srgbClr val="000000"/>
+                </a:solidFill>
+                <a:latin typeface="Times New Roman"/>
+              </a:rPr>
+              <a:t>end for</a:t>
+            </a:r>
+          </a:p>
+          <a:p>
+            <a:pPr>
+              <a:spcBef>
+                <a:spcPts val="0"/>
+              </a:spcBef>
+              <a:spcAft>
+                <a:spcPts val="100"/>
+              </a:spcAft>
+            </a:pPr>
+            <a:r>
+              <a:rPr sz="1000" b="0">
+                <a:solidFill>
+                  <a:srgbClr val="7F8C8D"/>
+                </a:solidFill>
+                <a:latin typeface="Consolas"/>
+              </a:rPr>
+              <a:t>19:      </a:t>
+            </a:r>
+            <a:r>
+              <a:rPr sz="1000" b="0">
+                <a:solidFill>
+                  <a:srgbClr val="000000"/>
+                </a:solidFill>
+                <a:latin typeface="Times New Roman"/>
+              </a:rPr>
+              <a:t>Export terminated flows as CSV rows with F feature columns</a:t>
+            </a:r>
+          </a:p>
+          <a:p>
+            <a:pPr>
+              <a:spcBef>
+                <a:spcPts val="0"/>
+              </a:spcBef>
+              <a:spcAft>
+                <a:spcPts val="100"/>
+              </a:spcAft>
+            </a:pPr>
+            <a:r>
+              <a:rPr sz="1000" b="0">
+                <a:solidFill>
+                  <a:srgbClr val="7F8C8D"/>
+                </a:solidFill>
+                <a:latin typeface="Consolas"/>
+              </a:rPr>
+              <a:t>20:  </a:t>
+            </a:r>
+            <a:r>
+              <a:rPr sz="1000" b="1">
+                <a:solidFill>
+                  <a:srgbClr val="000000"/>
+                </a:solidFill>
+                <a:latin typeface="Times New Roman"/>
+              </a:rPr>
+              <a:t>end for</a:t>
+            </a:r>
+          </a:p>
+          <a:p>
+            <a:pPr>
+              <a:spcBef>
+                <a:spcPts val="0"/>
+              </a:spcBef>
+              <a:spcAft>
+                <a:spcPts val="100"/>
+              </a:spcAft>
+            </a:pPr>
+            <a:r>
+              <a:rPr sz="1000" b="0">
+                <a:solidFill>
+                  <a:srgbClr val="7F8C8D"/>
+                </a:solidFill>
+                <a:latin typeface="Consolas"/>
+              </a:rPr>
+              <a:t>21:  </a:t>
+            </a:r>
+            <a:r>
+              <a:rPr sz="1000" b="1">
+                <a:solidFill>
+                  <a:srgbClr val="000000"/>
+                </a:solidFill>
+                <a:latin typeface="Times New Roman"/>
+              </a:rPr>
+              <a:t>return </a:t>
+            </a:r>
+            <a:r>
+              <a:rPr sz="1000" b="0">
+                <a:solidFill>
+                  <a:srgbClr val="000000"/>
+                </a:solidFill>
+                <a:latin typeface="Times New Roman"/>
+              </a:rPr>
+              <a:t>Merged CSV: D_raw with n flows × F features</a:t>
+            </a:r>
+          </a:p>
+        </p:txBody>
+      </p:sp>
+      <p:pic>
+        <p:nvPicPr>
+          <p:cNvPr id="5" name="Picture 4" descr="image.png"/>
+          <p:cNvPicPr>
+            <a:picLocks noChangeAspect="1"/>
+          </p:cNvPicPr>
+          <p:nvPr/>
+        </p:nvPicPr>
+        <p:blipFill>
+          <a:blip r:embed="rId2"/>
+          <a:stretch>
+            <a:fillRect/>
+          </a:stretch>
+        </p:blipFill>
+        <p:spPr>
+          <a:xfrm>
+            <a:off x="7589520" y="640080"/>
+            <a:ext cx="4114800" cy="1297417"/>
+          </a:xfrm>
+          <a:prstGeom prst="rect">
+            <a:avLst/>
+          </a:prstGeom>
+        </p:spPr>
+      </p:pic>
+      <p:sp>
+        <p:nvSpPr>
+          <p:cNvPr id="6" name="TextBox 5"/>
+          <p:cNvSpPr txBox="1"/>
+          <p:nvPr/>
+        </p:nvSpPr>
+        <p:spPr>
+          <a:xfrm>
+            <a:off x="7589520" y="2286000"/>
+            <a:ext cx="4114800" cy="3200400"/>
+          </a:xfrm>
+          <a:prstGeom prst="rect">
+            <a:avLst/>
+          </a:prstGeom>
+          <a:noFill/>
+        </p:spPr>
+        <p:txBody>
+          <a:bodyPr wrap="square">
+            <a:spAutoFit/>
+          </a:bodyPr>
+          <a:lstStyle/>
+          <a:p>
+            <a:pPr>
+              <a:spcAft>
+                <a:spcPts val="200"/>
+              </a:spcAft>
+              <a:defRPr sz="1200" b="1">
+                <a:solidFill>
+                  <a:srgbClr val="7B4B2A"/>
+                </a:solidFill>
+                <a:latin typeface="Consolas"/>
+              </a:defRPr>
+            </a:pPr>
+            <a:r>
+              <a:t>Flow Extraction Tools per Dataset:</a:t>
+            </a:r>
+          </a:p>
+          <a:p>
+            <a:pPr>
+              <a:spcAft>
+                <a:spcPts val="200"/>
+              </a:spcAft>
+              <a:defRPr sz="400" b="0">
+                <a:solidFill>
+                  <a:srgbClr val="000000"/>
+                </a:solidFill>
+                <a:latin typeface="Consolas"/>
+              </a:defRPr>
+            </a:pPr>
+          </a:p>
+          <a:p>
+            <a:pPr>
+              <a:spcAft>
+                <a:spcPts val="200"/>
+              </a:spcAft>
+              <a:defRPr sz="1100" b="1">
+                <a:solidFill>
+                  <a:srgbClr val="000000"/>
+                </a:solidFill>
+                <a:latin typeface="Consolas"/>
+              </a:defRPr>
+            </a:pPr>
+            <a:r>
+              <a:t>UNSW-NB15:</a:t>
+            </a:r>
+          </a:p>
+          <a:p>
+            <a:pPr>
+              <a:spcAft>
+                <a:spcPts val="200"/>
+              </a:spcAft>
+              <a:defRPr sz="1000" b="0">
+                <a:solidFill>
+                  <a:srgbClr val="7F8C8D"/>
+                </a:solidFill>
+                <a:latin typeface="Consolas"/>
+              </a:defRPr>
+            </a:pPr>
+            <a:r>
+              <a:t>  PCAP → Argus + Bro-IDS → 49-column CSV</a:t>
+            </a:r>
+          </a:p>
+          <a:p>
+            <a:pPr>
+              <a:spcAft>
+                <a:spcPts val="200"/>
+              </a:spcAft>
+              <a:defRPr sz="1000" b="0">
+                <a:solidFill>
+                  <a:srgbClr val="7F8C8D"/>
+                </a:solidFill>
+                <a:latin typeface="Consolas"/>
+              </a:defRPr>
+            </a:pPr>
+            <a:r>
+              <a:t>  Captures: IXIA PerfectStorm traffic gen</a:t>
+            </a:r>
+          </a:p>
+          <a:p>
+            <a:pPr>
+              <a:spcAft>
+                <a:spcPts val="200"/>
+              </a:spcAft>
+              <a:defRPr sz="400" b="0">
+                <a:solidFill>
+                  <a:srgbClr val="000000"/>
+                </a:solidFill>
+                <a:latin typeface="Consolas"/>
+              </a:defRPr>
+            </a:pPr>
+          </a:p>
+          <a:p>
+            <a:pPr>
+              <a:spcAft>
+                <a:spcPts val="200"/>
+              </a:spcAft>
+              <a:defRPr sz="1100" b="1">
+                <a:solidFill>
+                  <a:srgbClr val="000000"/>
+                </a:solidFill>
+                <a:latin typeface="Consolas"/>
+              </a:defRPr>
+            </a:pPr>
+            <a:r>
+              <a:t>CSE-CIC-IDS-2018:</a:t>
+            </a:r>
+          </a:p>
+          <a:p>
+            <a:pPr>
+              <a:spcAft>
+                <a:spcPts val="200"/>
+              </a:spcAft>
+              <a:defRPr sz="1000" b="0">
+                <a:solidFill>
+                  <a:srgbClr val="7F8C8D"/>
+                </a:solidFill>
+                <a:latin typeface="Consolas"/>
+              </a:defRPr>
+            </a:pPr>
+            <a:r>
+              <a:t>  PCAP → CICFlowMeter v4 → 80+ column CSV</a:t>
+            </a:r>
+          </a:p>
+          <a:p>
+            <a:pPr>
+              <a:spcAft>
+                <a:spcPts val="200"/>
+              </a:spcAft>
+              <a:defRPr sz="1000" b="0">
+                <a:solidFill>
+                  <a:srgbClr val="7F8C8D"/>
+                </a:solidFill>
+                <a:latin typeface="Consolas"/>
+              </a:defRPr>
+            </a:pPr>
+            <a:r>
+              <a:t>  Captures: AWS infrastructure, 10-day run</a:t>
+            </a:r>
+          </a:p>
+          <a:p>
+            <a:pPr>
+              <a:spcAft>
+                <a:spcPts val="200"/>
+              </a:spcAft>
+              <a:defRPr sz="400" b="0">
+                <a:solidFill>
+                  <a:srgbClr val="000000"/>
+                </a:solidFill>
+                <a:latin typeface="Consolas"/>
+              </a:defRPr>
+            </a:pPr>
+          </a:p>
+          <a:p>
+            <a:pPr>
+              <a:spcAft>
+                <a:spcPts val="200"/>
+              </a:spcAft>
+              <a:defRPr sz="1100" b="1">
+                <a:solidFill>
+                  <a:srgbClr val="000000"/>
+                </a:solidFill>
+                <a:latin typeface="Consolas"/>
+              </a:defRPr>
+            </a:pPr>
+            <a:r>
+              <a:t>CIC-IDS2017:</a:t>
+            </a:r>
+          </a:p>
+          <a:p>
+            <a:pPr>
+              <a:spcAft>
+                <a:spcPts val="200"/>
+              </a:spcAft>
+              <a:defRPr sz="1000" b="0">
+                <a:solidFill>
+                  <a:srgbClr val="7F8C8D"/>
+                </a:solidFill>
+                <a:latin typeface="Consolas"/>
+              </a:defRPr>
+            </a:pPr>
+            <a:r>
+              <a:t>  PCAP → CICFlowMeter v3 → 80+ column CSV</a:t>
+            </a:r>
+          </a:p>
+          <a:p>
+            <a:pPr>
+              <a:spcAft>
+                <a:spcPts val="200"/>
+              </a:spcAft>
+              <a:defRPr sz="1000" b="0">
+                <a:solidFill>
+                  <a:srgbClr val="7F8C8D"/>
+                </a:solidFill>
+                <a:latin typeface="Consolas"/>
+              </a:defRPr>
+            </a:pPr>
+            <a:r>
+              <a:t>  Captures: CIC lab B-Profile, 5-day run</a:t>
+            </a:r>
+          </a:p>
+        </p:txBody>
+      </p:sp>
+      <p:sp>
+        <p:nvSpPr>
+          <p:cNvPr id="7" name="TextBox 6"/>
+          <p:cNvSpPr txBox="1"/>
+          <p:nvPr/>
+        </p:nvSpPr>
+        <p:spPr>
+          <a:xfrm>
+            <a:off x="274320" y="6035040"/>
+            <a:ext cx="11430000" cy="731520"/>
+          </a:xfrm>
+          <a:prstGeom prst="rect">
+            <a:avLst/>
+          </a:prstGeom>
+          <a:noFill/>
+        </p:spPr>
+        <p:txBody>
+          <a:bodyPr wrap="square">
+            <a:spAutoFit/>
+          </a:bodyPr>
+          <a:lstStyle/>
+          <a:p>
+            <a:pPr>
+              <a:spcAft>
+                <a:spcPts val="400"/>
+              </a:spcAft>
+              <a:defRPr sz="1000" b="0">
+                <a:solidFill>
+                  <a:srgbClr val="000000"/>
+                </a:solidFill>
+                <a:latin typeface="Calibri"/>
+              </a:defRPr>
+            </a:pPr>
+            <a:r>
+              <a:t>•  Raw PCAP files contain binary packet data (Ethernet/IP/TCP headers + payload); packets are grouped into bidirectional flows using 5-tuple keys and timeout-based termination.</a:t>
+            </a:r>
+          </a:p>
+          <a:p>
+            <a:pPr>
+              <a:spcAft>
+                <a:spcPts val="400"/>
+              </a:spcAft>
+              <a:defRPr sz="1000" b="0">
+                <a:solidFill>
+                  <a:srgbClr val="000000"/>
+                </a:solidFill>
+                <a:latin typeface="Calibri"/>
+              </a:defRPr>
+            </a:pPr>
+            <a:r>
+              <a:t>•  CICFlowMeter (CIC datasets) and Argus/Bro (UNSW-NB15) compute flow-level statistics: duration, packet/byte rates, inter-arrival time distributions, TCP flag counts, and payload size statistics.</a:t>
+            </a:r>
+          </a:p>
+          <a:p>
+            <a:pPr>
+              <a:spcAft>
+                <a:spcPts val="400"/>
+              </a:spcAft>
+              <a:defRPr sz="1000" b="0">
+                <a:solidFill>
+                  <a:srgbClr val="000000"/>
+                </a:solidFill>
+                <a:latin typeface="Calibri"/>
+              </a:defRPr>
+            </a:pPr>
+            <a:r>
+              <a:t>•  Each PCAP file is processed independently, enabling embarrassingly parallel preprocessing across multiple capture files or time windows.</a:t>
+            </a:r>
+          </a:p>
+          <a:p>
+            <a:pPr>
+              <a:spcAft>
+                <a:spcPts val="400"/>
+              </a:spcAft>
+              <a:defRPr sz="1000" b="0">
+                <a:solidFill>
+                  <a:srgbClr val="000000"/>
+                </a:solidFill>
+                <a:latin typeface="Calibri"/>
+              </a:defRPr>
+            </a:pPr>
+            <a:r>
+              <a:t>•  Output: one CSV row per flow with 49–80+ raw features, which Stage 1 then maps to the standardized 7-feature schema.</a:t>
+            </a:r>
+          </a:p>
+        </p:txBody>
+      </p:sp>
+    </p:spTree>
+  </p:cSld>
+  <p:clrMapOvr>
+    <a:masterClrMapping/>
+  </p:clrMapOvr>
+</p:sld>
+</file>
+
+<file path=ppt/slides/slide5.xml><?xml version="1.0" encoding="utf-8"?>
+<p:sld xmlns:a="http://schemas.openxmlformats.org/drawingml/2006/main" xmlns:p="http://schemas.openxmlformats.org/presentationml/2006/main" xmlns:r="http://schemas.openxmlformats.org/officeDocument/2006/relationships">
+  <p:cSld>
+    <p:bg>
+      <p:bgPr>
+        <a:solidFill>
+          <a:srgbClr val="FFFFFF"/>
+        </a:solidFill>
+        <a:effectLst/>
+      </p:bgPr>
+    </p:bg>
+    <p:spTree>
+      <p:nvGrpSpPr>
+        <p:cNvPr id="1" name=""/>
+        <p:cNvGrpSpPr/>
+        <p:nvPr/>
+      </p:nvGrpSpPr>
+      <p:grpSpPr/>
+      <p:sp>
+        <p:nvSpPr>
+          <p:cNvPr id="2" name="TextBox 1"/>
+          <p:cNvSpPr txBox="1"/>
+          <p:nvPr/>
+        </p:nvSpPr>
+        <p:spPr>
+          <a:xfrm>
+            <a:off x="274320" y="137160"/>
+            <a:ext cx="11430000" cy="457200"/>
+          </a:xfrm>
+          <a:prstGeom prst="rect">
+            <a:avLst/>
+          </a:prstGeom>
+          <a:noFill/>
+        </p:spPr>
+        <p:txBody>
+          <a:bodyPr wrap="square">
+            <a:spAutoFit/>
+          </a:bodyPr>
+          <a:lstStyle/>
+          <a:p>
+            <a:pPr algn="l">
+              <a:defRPr sz="2400" b="1">
+                <a:solidFill>
                   <a:srgbClr val="003C71"/>
                 </a:solidFill>
                 <a:latin typeface="Calibri"/>
               </a:defRPr>
             </a:pPr>
             <a:r>
-              <a:t>Stage 1: Data Ingestion &amp; StandardScaler Normalization</a:t>
+              <a:t>Stage 1: Feature Extraction &amp; StandardScaler Normalization</a:t>
             </a:r>
           </a:p>
         </p:txBody>
@@ -10224,7 +13250,7 @@
                 </a:solidFill>
                 <a:latin typeface="Times New Roman"/>
               </a:rPr>
-              <a:t>Algorithm 1: </a:t>
+              <a:t>Algorithm 2: </a:t>
             </a:r>
             <a:r>
               <a:rPr sz="1200" b="1">
@@ -10261,7 +13287,7 @@
                 </a:solidFill>
                 <a:latin typeface="Times New Roman"/>
               </a:rPr>
-              <a:t> Raw dataset D_k, k ∈ {UNSW-NB15, CSE-CIC-2018, CIC-IDS2017}</a:t>
+              <a:t> Raw CSV D_raw from Stage 0, k ∈ {UNSW, CSE, CIC2017}</a:t>
             </a:r>
           </a:p>
           <a:p>
@@ -10843,7 +13869,7 @@
               </a:defRPr>
             </a:pPr>
             <a:r>
-              <a:t>•  Maps heterogeneous raw features from each dataset into a unified 7-dimensional representation: [flow_duration, pkt_rate, byte_rate, entropy, port_cat, size_cat, protocol].</a:t>
+              <a:t>•  Maps the 49–80+ raw CSV columns from Stage 0 into a unified 7-dimensional representation: [flow_duration, pkt_rate, byte_rate, entropy, port_cat, size_cat, protocol].</a:t>
             </a:r>
           </a:p>
           <a:p>
@@ -10940,7 +13966,7 @@
 </p:sld>
 </file>
 
-<file path=ppt/slides/slide5.xml><?xml version="1.0" encoding="utf-8"?>
+<file path=ppt/slides/slide6.xml><?xml version="1.0" encoding="utf-8"?>
 <p:sld xmlns:a="http://schemas.openxmlformats.org/drawingml/2006/main" xmlns:p="http://schemas.openxmlformats.org/presentationml/2006/main" xmlns:r="http://schemas.openxmlformats.org/officeDocument/2006/relationships">
   <p:cSld>
     <p:bg>
@@ -11073,7 +14099,7 @@
                 </a:solidFill>
                 <a:latin typeface="Times New Roman"/>
               </a:rPr>
-              <a:t>Algorithm 2: </a:t>
+              <a:t>Algorithm 3: </a:t>
             </a:r>
             <a:r>
               <a:rPr sz="1200" b="1">
@@ -11817,7 +14843,7 @@
 </p:sld>
 </file>
 
-<file path=ppt/slides/slide6.xml><?xml version="1.0" encoding="utf-8"?>
+<file path=ppt/slides/slide7.xml><?xml version="1.0" encoding="utf-8"?>
 <p:sld xmlns:a="http://schemas.openxmlformats.org/drawingml/2006/main" xmlns:p="http://schemas.openxmlformats.org/presentationml/2006/main" xmlns:r="http://schemas.openxmlformats.org/officeDocument/2006/relationships">
   <p:cSld>
     <p:bg>
@@ -11866,7 +14892,7 @@
               </a:defRPr>
             </a:pPr>
             <a:r>
-              <a:t>Stage 3: Z3 SMT Constraint Extraction from Decision Tree</a:t>
+              <a:t>Stage 3: Z3 SMT Constraint Extraction  [⚡ Parallelizable per Leaf Path]</a:t>
             </a:r>
           </a:p>
         </p:txBody>
@@ -11950,7 +14976,7 @@
                 </a:solidFill>
                 <a:latin typeface="Times New Roman"/>
               </a:rPr>
-              <a:t>Algorithm 3: </a:t>
+              <a:t>Algorithm 4: </a:t>
             </a:r>
             <a:r>
               <a:rPr sz="1200" b="1">
@@ -12043,7 +15069,7 @@
                 </a:solidFill>
                 <a:latin typeface="Times New Roman"/>
               </a:rPr>
-              <a:t>C ← ∅, solver ← Z3.Solver()</a:t>
+              <a:t>C ← ∅</a:t>
             </a:r>
           </a:p>
           <a:p>
@@ -12090,6 +15116,15 @@
                 <a:latin typeface="Times New Roman"/>
               </a:rPr>
               <a:t>do</a:t>
+            </a:r>
+            <a:r>
+              <a:rPr sz="1000" b="0">
+                <a:solidFill>
+                  <a:srgbClr val="000000"/>
+                </a:solidFill>
+                <a:latin typeface="Times New Roman"/>
+              </a:rPr>
+              <a:t>  // ⚡ parallelizable per leaf</a:t>
             </a:r>
           </a:p>
           <a:p>
@@ -12651,7 +15686,7 @@
               </a:defRPr>
             </a:pPr>
             <a:r>
-              <a:t>•  Each constraint φ_l states: if the conjunction of feature conditions along path π_l is true, then the action must equal the leaf's predicted class.</a:t>
+              <a:t>•  Each constraint φ_l states: if the conjunction of feature conditions along path π_l holds, then the action must equal the leaf's predicted class.</a:t>
             </a:r>
           </a:p>
           <a:p>
@@ -12667,7 +15702,7 @@
               </a:defRPr>
             </a:pPr>
             <a:r>
-              <a:t>•  A satisfiability check ensures each new constraint is consistent with the existing set—inconsistent constraints are rejected to maintain logical soundness.</a:t>
+              <a:t>•  Leaf paths are independent—each can be extracted in parallel across CPU cores, with a final sequential merge and satisfiability check.</a:t>
             </a:r>
           </a:p>
           <a:p>
@@ -12719,7 +15754,7 @@
               </a:defRPr>
             </a:pPr>
             <a:r>
-              <a:t>Output: Constraint set C → Used by Stage 4 (Q-Learning safety shield) and updated by Stage 5 (DBSCAN novel patterns)</a:t>
+              <a:t>Output: Constraint set C → Used by Stage 4 (Q-Learning safety shield) and updated by Stage 5 (DBSCAN)</a:t>
             </a:r>
           </a:p>
         </p:txBody>
@@ -12732,7 +15767,7 @@
 </p:sld>
 </file>
 
-<file path=ppt/slides/slide7.xml><?xml version="1.0" encoding="utf-8"?>
+<file path=ppt/slides/slide8.xml><?xml version="1.0" encoding="utf-8"?>
 <p:sld xmlns:a="http://schemas.openxmlformats.org/drawingml/2006/main" xmlns:p="http://schemas.openxmlformats.org/presentationml/2006/main" xmlns:r="http://schemas.openxmlformats.org/officeDocument/2006/relationships">
   <p:cSld>
     <p:bg>
@@ -12865,7 +15900,7 @@
                 </a:solidFill>
                 <a:latin typeface="Times New Roman"/>
               </a:rPr>
-              <a:t>Algorithm 4: </a:t>
+              <a:t>Algorithm 5: </a:t>
             </a:r>
             <a:r>
               <a:rPr sz="1200" b="1">
@@ -13771,7 +16806,7 @@
               </a:defRPr>
             </a:pPr>
             <a:r>
-              <a:t>•  A tabular Q-learning agent uses DT leaf IDs as discrete states and {ALLOW=0, BLOCK=1} as actions, learning from an asymmetric reward: FN penalty (−3) exceeds FP penalty (−1) to prioritize attack detection.</a:t>
+              <a:t>•  A tabular Q-learning agent uses DT leaf IDs as discrete states and {ALLOW=0, BLOCK=1} as actions, learning from asymmetric rewards: FN penalty (−3) exceeds FP penalty (−1) to prioritize attack detection.</a:t>
             </a:r>
           </a:p>
           <a:p>
@@ -13787,7 +16822,7 @@
               </a:defRPr>
             </a:pPr>
             <a:r>
-              <a:t>•  Every proposed action is verified against the Z3 constraint set before execution—if the action is unsafe (unsat), the safety shield overrides it with the alternative action.</a:t>
+              <a:t>•  Every proposed action is verified against the Z3 constraint set—if unsafe (unsat), the safety shield overrides it with the alternative action.</a:t>
             </a:r>
           </a:p>
           <a:p>
@@ -13803,7 +16838,7 @@
               </a:defRPr>
             </a:pPr>
             <a:r>
-              <a:t>•  Epsilon-greedy exploration (ε=0.20, decay=0.999) balances discovering new policies with exploiting learned Q-values; a +0.5 shield bonus incentivizes Z3-consistent behavior.</a:t>
+              <a:t>•  Epsilon-greedy exploration (ε=0.20, decay=0.999) balances discovery with exploitation; a +0.5 shield bonus incentivizes Z3-consistent behavior.</a:t>
             </a:r>
           </a:p>
           <a:p>
@@ -13819,7 +16854,7 @@
               </a:defRPr>
             </a:pPr>
             <a:r>
-              <a:t>•  The Q-table converges to a policy that improves on the static DT baseline while maintaining formal safety guarantees from the constraint set.</a:t>
+              <a:t>•  Sequential bottleneck: Q-table updates within each episode are sequential (shared state), but episodes across datasets run in parallel.</a:t>
             </a:r>
           </a:p>
         </p:txBody>
@@ -13832,7 +16867,7 @@
 </p:sld>
 </file>
 
-<file path=ppt/slides/slide8.xml><?xml version="1.0" encoding="utf-8"?>
+<file path=ppt/slides/slide9.xml><?xml version="1.0" encoding="utf-8"?>
 <p:sld xmlns:a="http://schemas.openxmlformats.org/drawingml/2006/main" xmlns:p="http://schemas.openxmlformats.org/presentationml/2006/main" xmlns:r="http://schemas.openxmlformats.org/officeDocument/2006/relationships">
   <p:cSld>
     <p:bg>
@@ -13965,7 +17000,7 @@
                 </a:solidFill>
                 <a:latin typeface="Times New Roman"/>
               </a:rPr>
-              <a:t>Algorithm 5: </a:t>
+              <a:t>Algorithm 6: </a:t>
             </a:r>
             <a:r>
               <a:rPr sz="1200" b="1">
@@ -14649,7 +17684,7 @@
               </a:defRPr>
             </a:pPr>
             <a:r>
-              <a:t>•  Collects misclassified flows (where ŷ_i ≠ y_i) into a buffer and applies DBSCAN density-based clustering (ε=1.5, minPts=5) to discover previously unseen attack patterns.</a:t>
+              <a:t>•  Collects misclassified flows and applies DBSCAN density-based clustering (ε=1.5, minPts=5) to discover previously unseen attack patterns.</a:t>
             </a:r>
           </a:p>
           <a:p>
@@ -14665,7 +17700,7 @@
               </a:defRPr>
             </a:pPr>
             <a:r>
-              <a:t>•  Each discovered cluster is converted into a new Z3 constraint using the centroid ± 2σ range per feature, then added to the constraint set after satisfiability verification.</a:t>
+              <a:t>•  Each cluster is converted into a Z3 constraint using centroid ± 2σ per feature, then added after satisfiability verification.</a:t>
             </a:r>
           </a:p>
           <a:p>
@@ -14681,7 +17716,7 @@
               </a:defRPr>
             </a:pPr>
             <a:r>
-              <a:t>•  Noise points (not in any cluster) are discarded—only dense, coherent groups of misclassified flows generate new constraints, reducing false pattern creation.</a:t>
+              <a:t>•  Noise points (not in any cluster) are discarded—only dense groups generate new constraints, reducing false pattern creation.</a:t>
             </a:r>
           </a:p>
           <a:p>
@@ -14697,7 +17732,7 @@
               </a:defRPr>
             </a:pPr>
             <a:r>
-              <a:t>•  This enables zero-day attack detection: novel attacks that the DT never saw in training are discovered at runtime and formally incorporated into the safety shield.</a:t>
+              <a:t>•  Enables zero-day detection: novel attacks not seen in training are discovered at runtime and formally incorporated into the safety shield.</a:t>
             </a:r>
           </a:p>
         </p:txBody>
@@ -14733,938 +17768,7 @@
               </a:defRPr>
             </a:pPr>
             <a:r>
-              <a:t>Output: C' = C ∪ C_novel → Feedback loop: updated constraints improve Stage 4 (Q-Learning) safety shield</a:t>
-            </a:r>
-          </a:p>
-        </p:txBody>
-      </p:sp>
-    </p:spTree>
-  </p:cSld>
-  <p:clrMapOvr>
-    <a:masterClrMapping/>
-  </p:clrMapOvr>
-</p:sld>
-</file>
-
-<file path=ppt/slides/slide9.xml><?xml version="1.0" encoding="utf-8"?>
-<p:sld xmlns:a="http://schemas.openxmlformats.org/drawingml/2006/main" xmlns:p="http://schemas.openxmlformats.org/presentationml/2006/main" xmlns:r="http://schemas.openxmlformats.org/officeDocument/2006/relationships">
-  <p:cSld>
-    <p:bg>
-      <p:bgPr>
-        <a:solidFill>
-          <a:srgbClr val="FFFFFF"/>
-        </a:solidFill>
-        <a:effectLst/>
-      </p:bgPr>
-    </p:bg>
-    <p:spTree>
-      <p:nvGrpSpPr>
-        <p:cNvPr id="1" name=""/>
-        <p:cNvGrpSpPr/>
-        <p:nvPr/>
-      </p:nvGrpSpPr>
-      <p:grpSpPr/>
-      <p:sp>
-        <p:nvSpPr>
-          <p:cNvPr id="2" name="TextBox 1"/>
-          <p:cNvSpPr txBox="1"/>
-          <p:nvPr/>
-        </p:nvSpPr>
-        <p:spPr>
-          <a:xfrm>
-            <a:off x="274320" y="137160"/>
-            <a:ext cx="11430000" cy="457200"/>
-          </a:xfrm>
-          <a:prstGeom prst="rect">
-            <a:avLst/>
-          </a:prstGeom>
-          <a:noFill/>
-        </p:spPr>
-        <p:txBody>
-          <a:bodyPr wrap="square">
-            <a:spAutoFit/>
-          </a:bodyPr>
-          <a:lstStyle/>
-          <a:p>
-            <a:pPr algn="l">
-              <a:defRPr sz="2400" b="1">
-                <a:solidFill>
-                  <a:srgbClr val="2980B9"/>
-                </a:solidFill>
-                <a:latin typeface="Calibri"/>
-              </a:defRPr>
-            </a:pPr>
-            <a:r>
-              <a:t>Stage 6: Adaptive Buffer Management</a:t>
-            </a:r>
-          </a:p>
-        </p:txBody>
-      </p:sp>
-      <p:sp>
-        <p:nvSpPr>
-          <p:cNvPr id="3" name="Rectangle 2"/>
-          <p:cNvSpPr/>
-          <p:nvPr/>
-        </p:nvSpPr>
-        <p:spPr>
-          <a:xfrm>
-            <a:off x="274320" y="640080"/>
-            <a:ext cx="6858000" cy="4572000"/>
-          </a:xfrm>
-          <a:prstGeom prst="rect">
-            <a:avLst/>
-          </a:prstGeom>
-          <a:solidFill>
-            <a:srgbClr val="F7F9FB"/>
-          </a:solidFill>
-          <a:ln w="19050">
-            <a:solidFill>
-              <a:srgbClr val="34495E"/>
-            </a:solidFill>
-          </a:ln>
-        </p:spPr>
-        <p:style>
-          <a:lnRef idx="1">
-            <a:schemeClr val="accent1"/>
-          </a:lnRef>
-          <a:fillRef idx="3">
-            <a:schemeClr val="accent1"/>
-          </a:fillRef>
-          <a:effectRef idx="2">
-            <a:schemeClr val="accent1"/>
-          </a:effectRef>
-          <a:fontRef idx="minor">
-            <a:schemeClr val="lt1"/>
-          </a:fontRef>
-        </p:style>
-        <p:txBody>
-          <a:bodyPr rtlCol="0" anchor="ctr"/>
-          <a:lstStyle/>
-          <a:p>
-            <a:pPr algn="ctr"/>
-          </a:p>
-        </p:txBody>
-      </p:sp>
-      <p:sp>
-        <p:nvSpPr>
-          <p:cNvPr id="4" name="TextBox 3"/>
-          <p:cNvSpPr txBox="1"/>
-          <p:nvPr/>
-        </p:nvSpPr>
-        <p:spPr>
-          <a:xfrm>
-            <a:off x="411480" y="685800"/>
-            <a:ext cx="6583680" cy="4480560"/>
-          </a:xfrm>
-          <a:prstGeom prst="rect">
-            <a:avLst/>
-          </a:prstGeom>
-          <a:noFill/>
-        </p:spPr>
-        <p:txBody>
-          <a:bodyPr wrap="square">
-            <a:spAutoFit/>
-          </a:bodyPr>
-          <a:lstStyle/>
-          <a:p>
-            <a:pPr>
-              <a:spcAft>
-                <a:spcPts val="300"/>
-              </a:spcAft>
-            </a:pPr>
-            <a:r>
-              <a:rPr sz="1200" b="1" i="1">
-                <a:solidFill>
-                  <a:srgbClr val="000000"/>
-                </a:solidFill>
-                <a:latin typeface="Times New Roman"/>
-              </a:rPr>
-              <a:t>Algorithm 6: </a:t>
-            </a:r>
-            <a:r>
-              <a:rPr sz="1200" b="1">
-                <a:solidFill>
-                  <a:srgbClr val="000000"/>
-                </a:solidFill>
-                <a:latin typeface="Times New Roman"/>
-              </a:rPr>
-              <a:t>Adaptive Buffer Resizing</a:t>
-            </a:r>
-          </a:p>
-          <a:p>
-            <a:pPr>
-              <a:spcBef>
-                <a:spcPts val="0"/>
-              </a:spcBef>
-              <a:spcAft>
-                <a:spcPts val="100"/>
-              </a:spcAft>
-            </a:pPr>
-            <a:r>
-              <a:rPr sz="1000" b="1">
-                <a:solidFill>
-                  <a:srgbClr val="000000"/>
-                </a:solidFill>
-                <a:latin typeface="Times New Roman"/>
-              </a:rPr>
-              <a:t>Require:</a:t>
-            </a:r>
-            <a:r>
-              <a:rPr sz="1000" b="0">
-                <a:solidFill>
-                  <a:srgbClr val="000000"/>
-                </a:solidFill>
-                <a:latin typeface="Times New Roman"/>
-              </a:rPr>
-              <a:t> Flow stream F, current buffer B_t with size |B_t|, bounds [10, 200]</a:t>
-            </a:r>
-          </a:p>
-          <a:p>
-            <a:pPr>
-              <a:spcBef>
-                <a:spcPts val="0"/>
-              </a:spcBef>
-              <a:spcAft>
-                <a:spcPts val="100"/>
-              </a:spcAft>
-            </a:pPr>
-            <a:r>
-              <a:rPr sz="1000" b="1">
-                <a:solidFill>
-                  <a:srgbClr val="000000"/>
-                </a:solidFill>
-                <a:latin typeface="Times New Roman"/>
-              </a:rPr>
-              <a:t>Ensure:</a:t>
-            </a:r>
-            <a:r>
-              <a:rPr sz="1000" b="0">
-                <a:solidFill>
-                  <a:srgbClr val="000000"/>
-                </a:solidFill>
-                <a:latin typeface="Times New Roman"/>
-              </a:rPr>
-              <a:t> Resized buffer B_{t+1} adapted to traffic volatility</a:t>
-            </a:r>
-          </a:p>
-          <a:p>
-            <a:pPr>
-              <a:spcBef>
-                <a:spcPts val="0"/>
-              </a:spcBef>
-              <a:spcAft>
-                <a:spcPts val="100"/>
-              </a:spcAft>
-            </a:pPr>
-            <a:r>
-              <a:rPr sz="1000" b="0">
-                <a:solidFill>
-                  <a:srgbClr val="7F8C8D"/>
-                </a:solidFill>
-                <a:latin typeface="Consolas"/>
-              </a:rPr>
-              <a:t> 1:  </a:t>
-            </a:r>
-            <a:r>
-              <a:rPr sz="1000" b="1">
-                <a:solidFill>
-                  <a:srgbClr val="000000"/>
-                </a:solidFill>
-                <a:latin typeface="Times New Roman"/>
-              </a:rPr>
-              <a:t>for </a:t>
-            </a:r>
-            <a:r>
-              <a:rPr sz="1000" b="0">
-                <a:solidFill>
-                  <a:srgbClr val="000000"/>
-                </a:solidFill>
-                <a:latin typeface="Times New Roman"/>
-              </a:rPr>
-              <a:t>each time win</a:t>
-            </a:r>
-            <a:r>
-              <a:rPr sz="1000" b="1">
-                <a:solidFill>
-                  <a:srgbClr val="000000"/>
-                </a:solidFill>
-                <a:latin typeface="Times New Roman"/>
-              </a:rPr>
-              <a:t>do</a:t>
-            </a:r>
-            <a:r>
-              <a:rPr sz="1000" b="0">
-                <a:solidFill>
-                  <a:srgbClr val="000000"/>
-                </a:solidFill>
-                <a:latin typeface="Times New Roman"/>
-              </a:rPr>
-              <a:t>w W_t of flows </a:t>
-            </a:r>
-            <a:r>
-              <a:rPr sz="1000" b="1">
-                <a:solidFill>
-                  <a:srgbClr val="000000"/>
-                </a:solidFill>
-                <a:latin typeface="Times New Roman"/>
-              </a:rPr>
-              <a:t>do</a:t>
-            </a:r>
-          </a:p>
-          <a:p>
-            <a:pPr>
-              <a:spcBef>
-                <a:spcPts val="0"/>
-              </a:spcBef>
-              <a:spcAft>
-                <a:spcPts val="100"/>
-              </a:spcAft>
-            </a:pPr>
-            <a:r>
-              <a:rPr sz="1000" b="0">
-                <a:solidFill>
-                  <a:srgbClr val="7F8C8D"/>
-                </a:solidFill>
-                <a:latin typeface="Consolas"/>
-              </a:rPr>
-              <a:t> 2:      </a:t>
-            </a:r>
-            <a:r>
-              <a:rPr sz="1000" b="0">
-                <a:solidFill>
-                  <a:srgbClr val="000000"/>
-                </a:solidFill>
-                <a:latin typeface="Times New Roman"/>
-              </a:rPr>
-              <a:t>B_t.append(flows in W_t)  // sliding win</a:t>
-            </a:r>
-            <a:r>
-              <a:rPr sz="1000" b="1">
-                <a:solidFill>
-                  <a:srgbClr val="000000"/>
-                </a:solidFill>
-                <a:latin typeface="Times New Roman"/>
-              </a:rPr>
-              <a:t>do</a:t>
-            </a:r>
-            <a:r>
-              <a:rPr sz="1000" b="0">
-                <a:solidFill>
-                  <a:srgbClr val="000000"/>
-                </a:solidFill>
-                <a:latin typeface="Times New Roman"/>
-              </a:rPr>
-              <a:t>w buffer</a:t>
-            </a:r>
-          </a:p>
-          <a:p>
-            <a:pPr>
-              <a:spcBef>
-                <a:spcPts val="0"/>
-              </a:spcBef>
-              <a:spcAft>
-                <a:spcPts val="100"/>
-              </a:spcAft>
-            </a:pPr>
-            <a:r>
-              <a:rPr sz="1000" b="0">
-                <a:solidFill>
-                  <a:srgbClr val="7F8C8D"/>
-                </a:solidFill>
-                <a:latin typeface="Consolas"/>
-              </a:rPr>
-              <a:t> 3:      </a:t>
-            </a:r>
-            <a:r>
-              <a:rPr sz="1000" b="0">
-                <a:solidFill>
-                  <a:srgbClr val="000000"/>
-                </a:solidFill>
-                <a:latin typeface="Times New Roman"/>
-              </a:rPr>
-              <a:t>σ_ent ← std({entropy(x) : x ∈ B_t})  // entropy volatility</a:t>
-            </a:r>
-          </a:p>
-          <a:p>
-            <a:pPr>
-              <a:spcBef>
-                <a:spcPts val="0"/>
-              </a:spcBef>
-              <a:spcAft>
-                <a:spcPts val="100"/>
-              </a:spcAft>
-            </a:pPr>
-            <a:r>
-              <a:rPr sz="1000" b="0">
-                <a:solidFill>
-                  <a:srgbClr val="7F8C8D"/>
-                </a:solidFill>
-                <a:latin typeface="Consolas"/>
-              </a:rPr>
-              <a:t> 4:      </a:t>
-            </a:r>
-            <a:r>
-              <a:rPr sz="1000" b="0">
-                <a:solidFill>
-                  <a:srgbClr val="000000"/>
-                </a:solidFill>
-                <a:latin typeface="Times New Roman"/>
-              </a:rPr>
-              <a:t>σ²_bytes ← var({byte_rate(x) : x ∈ B_t})  // byte rate variance</a:t>
-            </a:r>
-          </a:p>
-          <a:p>
-            <a:pPr>
-              <a:spcBef>
-                <a:spcPts val="0"/>
-              </a:spcBef>
-              <a:spcAft>
-                <a:spcPts val="100"/>
-              </a:spcAft>
-            </a:pPr>
-            <a:r>
-              <a:rPr sz="1000" b="0">
-                <a:solidFill>
-                  <a:srgbClr val="7F8C8D"/>
-                </a:solidFill>
-                <a:latin typeface="Consolas"/>
-              </a:rPr>
-              <a:t> 5:      </a:t>
-            </a:r>
-            <a:r>
-              <a:rPr sz="1000" b="0">
-                <a:solidFill>
-                  <a:srgbClr val="000000"/>
-                </a:solidFill>
-                <a:latin typeface="Times New Roman"/>
-              </a:rPr>
-              <a:t>volatility ← σ_ent + σ²_bytes / max(σ²_bytes)</a:t>
-            </a:r>
-          </a:p>
-          <a:p>
-            <a:pPr>
-              <a:spcBef>
-                <a:spcPts val="0"/>
-              </a:spcBef>
-              <a:spcAft>
-                <a:spcPts val="100"/>
-              </a:spcAft>
-            </a:pPr>
-            <a:r>
-              <a:rPr sz="1000" b="0">
-                <a:solidFill>
-                  <a:srgbClr val="7F8C8D"/>
-                </a:solidFill>
-                <a:latin typeface="Consolas"/>
-              </a:rPr>
-              <a:t> 6:      </a:t>
-            </a:r>
-            <a:r>
-              <a:rPr sz="1000" b="1">
-                <a:solidFill>
-                  <a:srgbClr val="000000"/>
-                </a:solidFill>
-                <a:latin typeface="Times New Roman"/>
-              </a:rPr>
-              <a:t>if </a:t>
-            </a:r>
-            <a:r>
-              <a:rPr sz="1000" b="0">
-                <a:solidFill>
-                  <a:srgbClr val="000000"/>
-                </a:solidFill>
-                <a:latin typeface="Times New Roman"/>
-              </a:rPr>
-              <a:t>volatility &gt; high_threshold </a:t>
-            </a:r>
-            <a:r>
-              <a:rPr sz="1000" b="1">
-                <a:solidFill>
-                  <a:srgbClr val="000000"/>
-                </a:solidFill>
-                <a:latin typeface="Times New Roman"/>
-              </a:rPr>
-              <a:t>then</a:t>
-            </a:r>
-          </a:p>
-          <a:p>
-            <a:pPr>
-              <a:spcBef>
-                <a:spcPts val="0"/>
-              </a:spcBef>
-              <a:spcAft>
-                <a:spcPts val="100"/>
-              </a:spcAft>
-            </a:pPr>
-            <a:r>
-              <a:rPr sz="1000" b="0">
-                <a:solidFill>
-                  <a:srgbClr val="7F8C8D"/>
-                </a:solidFill>
-                <a:latin typeface="Consolas"/>
-              </a:rPr>
-              <a:t> 7:          </a:t>
-            </a:r>
-            <a:r>
-              <a:rPr sz="1000" b="0">
-                <a:solidFill>
-                  <a:srgbClr val="000000"/>
-                </a:solidFill>
-                <a:latin typeface="Times New Roman"/>
-              </a:rPr>
-              <a:t>Δ ← +10  // high volatility: grow buffer </a:t>
-            </a:r>
-            <a:r>
-              <a:rPr sz="1000" b="1">
-                <a:solidFill>
-                  <a:srgbClr val="000000"/>
-                </a:solidFill>
-                <a:latin typeface="Times New Roman"/>
-              </a:rPr>
-              <a:t>for </a:t>
-            </a:r>
-            <a:r>
-              <a:rPr sz="1000" b="0">
-                <a:solidFill>
-                  <a:srgbClr val="000000"/>
-                </a:solidFill>
-                <a:latin typeface="Times New Roman"/>
-              </a:rPr>
-              <a:t>more context</a:t>
-            </a:r>
-          </a:p>
-          <a:p>
-            <a:pPr>
-              <a:spcBef>
-                <a:spcPts val="0"/>
-              </a:spcBef>
-              <a:spcAft>
-                <a:spcPts val="100"/>
-              </a:spcAft>
-            </a:pPr>
-            <a:r>
-              <a:rPr sz="1000" b="0">
-                <a:solidFill>
-                  <a:srgbClr val="7F8C8D"/>
-                </a:solidFill>
-                <a:latin typeface="Consolas"/>
-              </a:rPr>
-              <a:t> 8:      </a:t>
-            </a:r>
-            <a:r>
-              <a:rPr sz="1000" b="1">
-                <a:solidFill>
-                  <a:srgbClr val="000000"/>
-                </a:solidFill>
-                <a:latin typeface="Times New Roman"/>
-              </a:rPr>
-              <a:t>else</a:t>
-            </a:r>
-            <a:r>
-              <a:rPr sz="1000" b="0">
-                <a:solidFill>
-                  <a:srgbClr val="000000"/>
-                </a:solidFill>
-                <a:latin typeface="Times New Roman"/>
-              </a:rPr>
-              <a:t> </a:t>
-            </a:r>
-            <a:r>
-              <a:rPr sz="1000" b="1">
-                <a:solidFill>
-                  <a:srgbClr val="000000"/>
-                </a:solidFill>
-                <a:latin typeface="Times New Roman"/>
-              </a:rPr>
-              <a:t>if </a:t>
-            </a:r>
-            <a:r>
-              <a:rPr sz="1000" b="0">
-                <a:solidFill>
-                  <a:srgbClr val="000000"/>
-                </a:solidFill>
-                <a:latin typeface="Times New Roman"/>
-              </a:rPr>
-              <a:t>volatility &lt; low_threshold </a:t>
-            </a:r>
-            <a:r>
-              <a:rPr sz="1000" b="1">
-                <a:solidFill>
-                  <a:srgbClr val="000000"/>
-                </a:solidFill>
-                <a:latin typeface="Times New Roman"/>
-              </a:rPr>
-              <a:t>then</a:t>
-            </a:r>
-          </a:p>
-          <a:p>
-            <a:pPr>
-              <a:spcBef>
-                <a:spcPts val="0"/>
-              </a:spcBef>
-              <a:spcAft>
-                <a:spcPts val="100"/>
-              </a:spcAft>
-            </a:pPr>
-            <a:r>
-              <a:rPr sz="1000" b="0">
-                <a:solidFill>
-                  <a:srgbClr val="7F8C8D"/>
-                </a:solidFill>
-                <a:latin typeface="Consolas"/>
-              </a:rPr>
-              <a:t> 9:          </a:t>
-            </a:r>
-            <a:r>
-              <a:rPr sz="1000" b="0">
-                <a:solidFill>
-                  <a:srgbClr val="000000"/>
-                </a:solidFill>
-                <a:latin typeface="Times New Roman"/>
-              </a:rPr>
-              <a:t>Δ ← -5  // low volatility: shrink buffer </a:t>
-            </a:r>
-            <a:r>
-              <a:rPr sz="1000" b="1">
-                <a:solidFill>
-                  <a:srgbClr val="000000"/>
-                </a:solidFill>
-                <a:latin typeface="Times New Roman"/>
-              </a:rPr>
-              <a:t>for </a:t>
-            </a:r>
-            <a:r>
-              <a:rPr sz="1000" b="0">
-                <a:solidFill>
-                  <a:srgbClr val="000000"/>
-                </a:solidFill>
-                <a:latin typeface="Times New Roman"/>
-              </a:rPr>
-              <a:t>faster response</a:t>
-            </a:r>
-          </a:p>
-          <a:p>
-            <a:pPr>
-              <a:spcBef>
-                <a:spcPts val="0"/>
-              </a:spcBef>
-              <a:spcAft>
-                <a:spcPts val="100"/>
-              </a:spcAft>
-            </a:pPr>
-            <a:r>
-              <a:rPr sz="1000" b="0">
-                <a:solidFill>
-                  <a:srgbClr val="7F8C8D"/>
-                </a:solidFill>
-                <a:latin typeface="Consolas"/>
-              </a:rPr>
-              <a:t>10:      </a:t>
-            </a:r>
-            <a:r>
-              <a:rPr sz="1000" b="1">
-                <a:solidFill>
-                  <a:srgbClr val="000000"/>
-                </a:solidFill>
-                <a:latin typeface="Times New Roman"/>
-              </a:rPr>
-              <a:t>else</a:t>
-            </a:r>
-          </a:p>
-          <a:p>
-            <a:pPr>
-              <a:spcBef>
-                <a:spcPts val="0"/>
-              </a:spcBef>
-              <a:spcAft>
-                <a:spcPts val="100"/>
-              </a:spcAft>
-            </a:pPr>
-            <a:r>
-              <a:rPr sz="1000" b="0">
-                <a:solidFill>
-                  <a:srgbClr val="7F8C8D"/>
-                </a:solidFill>
-                <a:latin typeface="Consolas"/>
-              </a:rPr>
-              <a:t>11:          </a:t>
-            </a:r>
-            <a:r>
-              <a:rPr sz="1000" b="0">
-                <a:solidFill>
-                  <a:srgbClr val="000000"/>
-                </a:solidFill>
-                <a:latin typeface="Times New Roman"/>
-              </a:rPr>
-              <a:t>Δ ← 0  // stable: maintain current size</a:t>
-            </a:r>
-          </a:p>
-          <a:p>
-            <a:pPr>
-              <a:spcBef>
-                <a:spcPts val="0"/>
-              </a:spcBef>
-              <a:spcAft>
-                <a:spcPts val="100"/>
-              </a:spcAft>
-            </a:pPr>
-            <a:r>
-              <a:rPr sz="1000" b="0">
-                <a:solidFill>
-                  <a:srgbClr val="7F8C8D"/>
-                </a:solidFill>
-                <a:latin typeface="Consolas"/>
-              </a:rPr>
-              <a:t>12:      </a:t>
-            </a:r>
-            <a:r>
-              <a:rPr sz="1000" b="1">
-                <a:solidFill>
-                  <a:srgbClr val="000000"/>
-                </a:solidFill>
-                <a:latin typeface="Times New Roman"/>
-              </a:rPr>
-              <a:t>end if</a:t>
-            </a:r>
-          </a:p>
-          <a:p>
-            <a:pPr>
-              <a:spcBef>
-                <a:spcPts val="0"/>
-              </a:spcBef>
-              <a:spcAft>
-                <a:spcPts val="100"/>
-              </a:spcAft>
-            </a:pPr>
-            <a:r>
-              <a:rPr sz="1000" b="0">
-                <a:solidFill>
-                  <a:srgbClr val="7F8C8D"/>
-                </a:solidFill>
-                <a:latin typeface="Consolas"/>
-              </a:rPr>
-              <a:t>13:      </a:t>
-            </a:r>
-            <a:r>
-              <a:rPr sz="1000" b="0">
-                <a:solidFill>
-                  <a:srgbClr val="000000"/>
-                </a:solidFill>
-                <a:latin typeface="Times New Roman"/>
-              </a:rPr>
-              <a:t>|B_{t+1}| ← clip(|B_t| + Δ, 10, 200)</a:t>
-            </a:r>
-          </a:p>
-          <a:p>
-            <a:pPr>
-              <a:spcBef>
-                <a:spcPts val="0"/>
-              </a:spcBef>
-              <a:spcAft>
-                <a:spcPts val="100"/>
-              </a:spcAft>
-            </a:pPr>
-            <a:r>
-              <a:rPr sz="1000" b="0">
-                <a:solidFill>
-                  <a:srgbClr val="7F8C8D"/>
-                </a:solidFill>
-                <a:latin typeface="Consolas"/>
-              </a:rPr>
-              <a:t>14:  </a:t>
-            </a:r>
-            <a:r>
-              <a:rPr sz="1000" b="1">
-                <a:solidFill>
-                  <a:srgbClr val="000000"/>
-                </a:solidFill>
-                <a:latin typeface="Times New Roman"/>
-              </a:rPr>
-              <a:t>end for</a:t>
-            </a:r>
-          </a:p>
-          <a:p>
-            <a:pPr>
-              <a:spcBef>
-                <a:spcPts val="0"/>
-              </a:spcBef>
-              <a:spcAft>
-                <a:spcPts val="100"/>
-              </a:spcAft>
-            </a:pPr>
-            <a:r>
-              <a:rPr sz="1000" b="0">
-                <a:solidFill>
-                  <a:srgbClr val="7F8C8D"/>
-                </a:solidFill>
-                <a:latin typeface="Consolas"/>
-              </a:rPr>
-              <a:t>15:  </a:t>
-            </a:r>
-            <a:r>
-              <a:rPr sz="1000" b="1">
-                <a:solidFill>
-                  <a:srgbClr val="000000"/>
-                </a:solidFill>
-                <a:latin typeface="Times New Roman"/>
-              </a:rPr>
-              <a:t>return </a:t>
-            </a:r>
-            <a:r>
-              <a:rPr sz="1000" b="0">
-                <a:solidFill>
-                  <a:srgbClr val="000000"/>
-                </a:solidFill>
-                <a:latin typeface="Times New Roman"/>
-              </a:rPr>
-              <a:t>B_{t+1}</a:t>
-            </a:r>
-          </a:p>
-        </p:txBody>
-      </p:sp>
-      <p:pic>
-        <p:nvPicPr>
-          <p:cNvPr id="5" name="Picture 4" descr="image.png"/>
-          <p:cNvPicPr>
-            <a:picLocks noChangeAspect="1"/>
-          </p:cNvPicPr>
-          <p:nvPr/>
-        </p:nvPicPr>
-        <p:blipFill>
-          <a:blip r:embed="rId2"/>
-          <a:stretch>
-            <a:fillRect/>
-          </a:stretch>
-        </p:blipFill>
-        <p:spPr>
-          <a:xfrm>
-            <a:off x="7498079" y="640080"/>
-            <a:ext cx="4114800" cy="1968447"/>
-          </a:xfrm>
-          <a:prstGeom prst="rect">
-            <a:avLst/>
-          </a:prstGeom>
-        </p:spPr>
-      </p:pic>
-      <p:sp>
-        <p:nvSpPr>
-          <p:cNvPr id="6" name="TextBox 5"/>
-          <p:cNvSpPr txBox="1"/>
-          <p:nvPr/>
-        </p:nvSpPr>
-        <p:spPr>
-          <a:xfrm>
-            <a:off x="7498079" y="2743200"/>
-            <a:ext cx="4389120" cy="2286000"/>
-          </a:xfrm>
-          <a:prstGeom prst="rect">
-            <a:avLst/>
-          </a:prstGeom>
-          <a:noFill/>
-        </p:spPr>
-        <p:txBody>
-          <a:bodyPr wrap="square">
-            <a:spAutoFit/>
-          </a:bodyPr>
-          <a:lstStyle/>
-          <a:p>
-            <a:pPr>
-              <a:spcAft>
-                <a:spcPts val="400"/>
-              </a:spcAft>
-              <a:defRPr sz="1100" b="0">
-                <a:solidFill>
-                  <a:srgbClr val="000000"/>
-                </a:solidFill>
-                <a:latin typeface="Calibri"/>
-              </a:defRPr>
-            </a:pPr>
-            <a:r>
-              <a:t>•  Dynamically resizes the flow buffer (10–200 flows) based on traffic volatility measured by entropy standard deviation and byte rate variance within the current window.</a:t>
-            </a:r>
-          </a:p>
-          <a:p>
-            <a:pPr>
-              <a:spcAft>
-                <a:spcPts val="400"/>
-              </a:spcAft>
-              <a:defRPr sz="1100" b="0">
-                <a:solidFill>
-                  <a:srgbClr val="000000"/>
-                </a:solidFill>
-                <a:latin typeface="Calibri"/>
-              </a:defRPr>
-            </a:pPr>
-            <a:r>
-              <a:t>•  High volatility (e.g., mixed attack/benign bursts) triggers buffer growth (+10) to accumulate more context for accurate classification decisions.</a:t>
-            </a:r>
-          </a:p>
-          <a:p>
-            <a:pPr>
-              <a:spcAft>
-                <a:spcPts val="400"/>
-              </a:spcAft>
-              <a:defRPr sz="1100" b="0">
-                <a:solidFill>
-                  <a:srgbClr val="000000"/>
-                </a:solidFill>
-                <a:latin typeface="Calibri"/>
-              </a:defRPr>
-            </a:pPr>
-            <a:r>
-              <a:t>•  Low volatility (e.g., sustained benign traffic) triggers buffer shrinkage (−5) to reduce latency and memory footprint for faster real-time response.</a:t>
-            </a:r>
-          </a:p>
-          <a:p>
-            <a:pPr>
-              <a:spcAft>
-                <a:spcPts val="400"/>
-              </a:spcAft>
-              <a:defRPr sz="1100" b="0">
-                <a:solidFill>
-                  <a:srgbClr val="000000"/>
-                </a:solidFill>
-                <a:latin typeface="Calibri"/>
-              </a:defRPr>
-            </a:pPr>
-            <a:r>
-              <a:t>•  Asymmetric growth/shrink rates (+10/−5) create a conservative bias—the system is quicker to accumulate evidence than to discard it.</a:t>
-            </a:r>
-          </a:p>
-        </p:txBody>
-      </p:sp>
-      <p:sp>
-        <p:nvSpPr>
-          <p:cNvPr id="7" name="TextBox 6"/>
-          <p:cNvSpPr txBox="1"/>
-          <p:nvPr/>
-        </p:nvSpPr>
-        <p:spPr>
-          <a:xfrm>
-            <a:off x="274320" y="5486400"/>
-            <a:ext cx="11430000" cy="365760"/>
-          </a:xfrm>
-          <a:prstGeom prst="rect">
-            <a:avLst/>
-          </a:prstGeom>
-          <a:noFill/>
-        </p:spPr>
-        <p:txBody>
-          <a:bodyPr wrap="square">
-            <a:spAutoFit/>
-          </a:bodyPr>
-          <a:lstStyle/>
-          <a:p>
-            <a:pPr algn="ctr">
-              <a:defRPr sz="1300" b="1">
-                <a:solidFill>
-                  <a:srgbClr val="2980B9"/>
-                </a:solidFill>
-                <a:latin typeface="Calibri"/>
-              </a:defRPr>
-            </a:pPr>
-            <a:r>
-              <a:t>Output: Adapted buffer size |B_{t+1}| → Used by Stage 7 and Stage 8 for windowed classification</a:t>
+              <a:t>Output: C' = C ∪ C_novel → Feedback loop: updated constraints improve Stage 4 safety shield</a:t>
             </a:r>
           </a:p>
         </p:txBody>

--- a/ASRRL_Methodology.pptx
+++ b/ASRRL_Methodology.pptx
@@ -5625,7 +5625,7 @@
                 </a:solidFill>
                 <a:latin typeface="Times New Roman"/>
               </a:rPr>
-              <a:t>σ_ent ← std({entropy(x) : x ∈ B_t})  // entropy volatility</a:t>
+              <a:t>σ_var ← std({variability(x) : x ∈ B_t})  // traffic variability volatility</a:t>
             </a:r>
           </a:p>
           <a:p>
@@ -6123,7 +6123,7 @@
               </a:defRPr>
             </a:pPr>
             <a:r>
-              <a:t>•  Dynamically resizes the flow buffer (10–200 flows) based on traffic volatility measured by entropy std and byte rate variance.</a:t>
+              <a:t>•  Dynamically resizes the flow buffer (10–200 flows) based on traffic volatility measured by variability proxy std and byte rate variance.</a:t>
             </a:r>
           </a:p>
           <a:p>
@@ -10493,7 +10493,7 @@
               </a:defRPr>
             </a:pPr>
             <a:r>
-              <a:t>Stage 1:  Raw columns (dur, rate, sbytes, ...)  →  x_i = [flow_duration, pkt_rate, byte_rate, entropy, port_cat, size_cat, protocol] ∈ R^7</a:t>
+              <a:t>Stage 1:  Raw columns (dur, rate, sbytes, ...)  →  x_i = [flow_duration, pkt_rate, byte_rate, entropy*, port_cat, size_cat, protocol] ∈ R^7</a:t>
             </a:r>
           </a:p>
           <a:p>
@@ -10573,7 +10573,7 @@
               </a:defRPr>
             </a:pPr>
             <a:r>
-              <a:t>Stage 6:  σ_entropy, σ²_bytes of window W_t → |B_{t+1}| = clip(|B_t| ± Δ, 10, 200)</a:t>
+              <a:t>Stage 6:  σ_variability, σ²_bytes of window W_t → |B_{t+1}| = clip(|B_t| ± Δ, 10, 200)</a:t>
             </a:r>
           </a:p>
           <a:p>
@@ -10929,7 +10929,7 @@
               </a:defRPr>
             </a:pPr>
             <a:r>
-              <a:t>  entropy       = normalize(ct_srv_src, [0,1])</a:t>
+              <a:t>  entropy*      = normalize(ct_srv_src, [0,1])</a:t>
             </a:r>
           </a:p>
           <a:p>
@@ -11316,7 +11316,7 @@
               </a:defRPr>
             </a:pPr>
             <a:r>
-              <a:t>  entropy       = quantile_norm(Fwd IAT Std)</a:t>
+              <a:t>  entropy*      = quantile_norm(Fwd IAT Std)</a:t>
             </a:r>
           </a:p>
           <a:p>
@@ -11703,7 +11703,7 @@
               </a:defRPr>
             </a:pPr>
             <a:r>
-              <a:t>  entropy       = quantile_norm(Fwd IAT Std)</a:t>
+              <a:t>  entropy*      = quantile_norm(Fwd IAT Std)</a:t>
             </a:r>
           </a:p>
           <a:p>
@@ -11836,6 +11836,42 @@
       <p:sp>
         <p:nvSpPr>
           <p:cNvPr id="9" name="TextBox 8"/>
+          <p:cNvSpPr txBox="1"/>
+          <p:nvPr/>
+        </p:nvSpPr>
+        <p:spPr>
+          <a:xfrm>
+            <a:off x="274320" y="5852160"/>
+            <a:ext cx="11430000" cy="274320"/>
+          </a:xfrm>
+          <a:prstGeom prst="rect">
+            <a:avLst/>
+          </a:prstGeom>
+          <a:noFill/>
+        </p:spPr>
+        <p:txBody>
+          <a:bodyPr wrap="square">
+            <a:spAutoFit/>
+          </a:bodyPr>
+          <a:lstStyle/>
+          <a:p>
+            <a:pPr algn="l">
+              <a:defRPr sz="1000" b="0">
+                <a:solidFill>
+                  <a:srgbClr val="7F8C8D"/>
+                </a:solidFill>
+                <a:latin typeface="Calibri"/>
+              </a:defRPr>
+            </a:pPr>
+            <a:r>
+              <a:t>*entropy is a traffic variability proxy (NOT Shannon entropy): UNSW uses ct_srv_src (connection diversity); CIC datasets use Fwd IAT Std (timing variability), both normalized to [0,1].</a:t>
+            </a:r>
+          </a:p>
+        </p:txBody>
+      </p:sp>
+      <p:sp>
+        <p:nvSpPr>
+          <p:cNvPr id="10" name="TextBox 9"/>
           <p:cNvSpPr txBox="1"/>
           <p:nvPr/>
         </p:nvSpPr>
@@ -11864,7 +11900,7 @@
               </a:defRPr>
             </a:pPr>
             <a:r>
-              <a:t>All 3 datasets → Standardized schema:  x_i = [flow_duration, pkt_rate, byte_rate, entropy, port_cat, size_cat, protocol],  y_i ∈ {0,1}</a:t>
+              <a:t>All 3 datasets → Standardized schema:  x_i = [flow_duration, pkt_rate, byte_rate, entropy*, port_cat, size_cat, protocol],  y_i ∈ {0,1}</a:t>
             </a:r>
           </a:p>
         </p:txBody>
@@ -13869,7 +13905,7 @@
               </a:defRPr>
             </a:pPr>
             <a:r>
-              <a:t>•  Maps the 49–80+ raw CSV columns from Stage 0 into a unified 7-dimensional representation: [flow_duration, pkt_rate, byte_rate, entropy, port_cat, size_cat, protocol].</a:t>
+              <a:t>•  Maps the 49–80+ raw CSV columns from Stage 0 into a unified 7-dimensional representation: [flow_duration, pkt_rate, byte_rate, entropy*, port_cat, size_cat, protocol]. *entropy is a traffic variability proxy, not Shannon entropy.</a:t>
             </a:r>
           </a:p>
           <a:p>

--- a/ASRRL_Methodology.pptx
+++ b/ASRRL_Methodology.pptx
@@ -5625,7 +5625,7 @@
                 </a:solidFill>
                 <a:latin typeface="Times New Roman"/>
               </a:rPr>
-              <a:t>σ_var ← std({variability(x) : x ∈ B_t})  // traffic variability volatility</a:t>
+              <a:t>σ_tpv ← std({traffic_pat_var(x) : x ∈ B_t})  // traffic pattern variability volatility</a:t>
             </a:r>
           </a:p>
           <a:p>
@@ -5681,7 +5681,7 @@
                 </a:solidFill>
                 <a:latin typeface="Times New Roman"/>
               </a:rPr>
-              <a:t>volatility ← σ_ent + σ²_bytes / max(σ²_bytes)</a:t>
+              <a:t>volatility ← σ_tpv + σ²_bytes / max(σ²_bytes)</a:t>
             </a:r>
           </a:p>
           <a:p>
@@ -6123,7 +6123,7 @@
               </a:defRPr>
             </a:pPr>
             <a:r>
-              <a:t>•  Dynamically resizes the flow buffer (10–200 flows) based on traffic volatility measured by variability proxy std and byte rate variance.</a:t>
+              <a:t>•  Dynamically resizes the flow buffer (10–200 flows) based on traffic volatility measured by traffic_pat_var std and byte rate variance.</a:t>
             </a:r>
           </a:p>
           <a:p>
@@ -10493,7 +10493,7 @@
               </a:defRPr>
             </a:pPr>
             <a:r>
-              <a:t>Stage 1:  Raw columns (dur, rate, sbytes, ...)  →  x_i = [flow_duration, pkt_rate, byte_rate, entropy*, port_cat, size_cat, protocol] ∈ R^7</a:t>
+              <a:t>Stage 1:  Raw columns (dur, rate, sbytes, ...)  →  x_i = [flow_duration, pkt_rate, byte_rate, traffic_pat_var*, port_cat, size_cat, protocol] ∈ R^7</a:t>
             </a:r>
           </a:p>
           <a:p>
@@ -10573,7 +10573,7 @@
               </a:defRPr>
             </a:pPr>
             <a:r>
-              <a:t>Stage 6:  σ_variability, σ²_bytes of window W_t → |B_{t+1}| = clip(|B_t| ± Δ, 10, 200)</a:t>
+              <a:t>Stage 6:  σ_tpv, σ²_bytes of window W_t → |B_{t+1}| = clip(|B_t| ± Δ, 10, 200)</a:t>
             </a:r>
           </a:p>
           <a:p>
@@ -10929,7 +10929,7 @@
               </a:defRPr>
             </a:pPr>
             <a:r>
-              <a:t>  entropy*      = normalize(ct_srv_src, [0,1])</a:t>
+              <a:t>  traffic_pat_var* = normalize(ct_srv_src, [0,1])</a:t>
             </a:r>
           </a:p>
           <a:p>
@@ -11316,7 +11316,7 @@
               </a:defRPr>
             </a:pPr>
             <a:r>
-              <a:t>  entropy*      = quantile_norm(Fwd IAT Std)</a:t>
+              <a:t>  traffic_pat_var* = quantile_norm(Fwd IAT Std)</a:t>
             </a:r>
           </a:p>
           <a:p>
@@ -11703,7 +11703,7 @@
               </a:defRPr>
             </a:pPr>
             <a:r>
-              <a:t>  entropy*      = quantile_norm(Fwd IAT Std)</a:t>
+              <a:t>  traffic_pat_var* = quantile_norm(Fwd IAT Std)</a:t>
             </a:r>
           </a:p>
           <a:p>
@@ -11864,7 +11864,7 @@
               </a:defRPr>
             </a:pPr>
             <a:r>
-              <a:t>*entropy is a traffic variability proxy (NOT Shannon entropy): UNSW uses ct_srv_src (connection diversity); CIC datasets use Fwd IAT Std (timing variability), both normalized to [0,1].</a:t>
+              <a:t>*traffic_pat_var is a traffic pattern variability proxy (NOT Shannon entropy): UNSW uses ct_srv_src (connection diversity); CIC datasets use Fwd IAT Std (timing variability), both normalized to [0,1].</a:t>
             </a:r>
           </a:p>
         </p:txBody>
@@ -11900,7 +11900,7 @@
               </a:defRPr>
             </a:pPr>
             <a:r>
-              <a:t>All 3 datasets → Standardized schema:  x_i = [flow_duration, pkt_rate, byte_rate, entropy*, port_cat, size_cat, protocol],  y_i ∈ {0,1}</a:t>
+              <a:t>All 3 datasets → Standardized schema:  x_i = [flow_duration, pkt_rate, byte_rate, traffic_pat_var*, port_cat, size_cat, protocol],  y_i ∈ {0,1}</a:t>
             </a:r>
           </a:p>
         </p:txBody>
@@ -13905,7 +13905,7 @@
               </a:defRPr>
             </a:pPr>
             <a:r>
-              <a:t>•  Maps the 49–80+ raw CSV columns from Stage 0 into a unified 7-dimensional representation: [flow_duration, pkt_rate, byte_rate, entropy*, port_cat, size_cat, protocol]. *entropy is a traffic variability proxy, not Shannon entropy.</a:t>
+              <a:t>•  Maps the 49–80+ raw CSV columns from Stage 0 into a unified 7-dimensional representation: [flow_duration, pkt_rate, byte_rate, traffic_pat_var*, port_cat, size_cat, protocol]. *traffic_pat_var is a traffic pattern variability proxy, not Shannon entropy.</a:t>
             </a:r>
           </a:p>
           <a:p>
